--- a/presentaciones/Avances-Experimentales-Simplificados-24-10-2026.pptx
+++ b/presentaciones/Avances-Experimentales-Simplificados-24-10-2026.pptx
@@ -4001,7 +4001,7 @@
     <p:bg>
       <p:bgPr>
         <a:solidFill>
-          <a:srgbClr val="FFFFFF"/>
+          <a:srgbClr val="102A3D"/>
         </a:solidFill>
         <a:effectLst/>
       </p:bgPr>
@@ -4022,13 +4022,13 @@
         <p:spPr>
           <a:xfrm>
             <a:off x="0" y="0"/>
-            <a:ext cx="12192000" cy="88900"/>
+            <a:ext cx="12192000" cy="76200"/>
           </a:xfrm>
           <a:prstGeom prst="rect">
             <a:avLst/>
           </a:prstGeom>
           <a:solidFill>
-            <a:srgbClr val="102B42"/>
+            <a:srgbClr val="087E83"/>
           </a:solidFill>
           <a:ln>
             <a:noFill/>
@@ -4080,7 +4080,7 @@
           <a:p>
             <a:pPr algn="l">
               <a:lnSpc>
-                <a:spcPct val="108000"/>
+                <a:spcPct val="104000"/>
               </a:lnSpc>
               <a:spcBef>
                 <a:spcPts val="0"/>
@@ -4090,13 +4090,13 @@
               </a:spcAft>
               <a:defRPr sz="1100" b="1">
                 <a:solidFill>
-                  <a:srgbClr val="087F86"/>
+                  <a:srgbClr val="DDF0ED"/>
                 </a:solidFill>
-                <a:latin typeface="Arial"/>
+                <a:latin typeface="Aptos"/>
               </a:defRPr>
             </a:pPr>
             <a:r>
-              <a:t>TESIS MDS · 24 DE OCTUBRE DE 2026</a:t>
+              <a:t>01  /  TESIS MDS · 24 DE OCTUBRE DE 2026</a:t>
             </a:r>
           </a:p>
         </p:txBody>
@@ -4110,7 +4110,7 @@
         <p:spPr>
           <a:xfrm>
             <a:off x="609600" y="723900"/>
-            <a:ext cx="10972800" cy="939800"/>
+            <a:ext cx="10972800" cy="990600"/>
           </a:xfrm>
           <a:prstGeom prst="rect">
             <a:avLst/>
@@ -4125,7 +4125,7 @@
           <a:p>
             <a:pPr algn="l">
               <a:lnSpc>
-                <a:spcPct val="108000"/>
+                <a:spcPct val="104000"/>
               </a:lnSpc>
               <a:spcBef>
                 <a:spcPts val="0"/>
@@ -4133,11 +4133,11 @@
               <a:spcAft>
                 <a:spcPts val="0"/>
               </a:spcAft>
-              <a:defRPr sz="3000" b="1">
+              <a:defRPr sz="3200" b="1">
                 <a:solidFill>
-                  <a:srgbClr val="102B42"/>
+                  <a:srgbClr val="FFFFFF"/>
                 </a:solidFill>
-                <a:latin typeface="Arial"/>
+                <a:latin typeface="Aptos"/>
               </a:defRPr>
             </a:pPr>
             <a:r>
@@ -4154,14 +4154,14 @@
         </p:nvSpPr>
         <p:spPr>
           <a:xfrm>
-            <a:off x="609600" y="6096000"/>
+            <a:off x="609600" y="6134100"/>
             <a:ext cx="10972800" cy="12700"/>
           </a:xfrm>
           <a:prstGeom prst="rect">
             <a:avLst/>
           </a:prstGeom>
           <a:solidFill>
-            <a:srgbClr val="D4DFE5"/>
+            <a:srgbClr val="376B91"/>
           </a:solidFill>
           <a:ln>
             <a:noFill/>
@@ -4191,155 +4191,20 @@
       </p:sp>
       <p:sp>
         <p:nvSpPr>
-          <p:cNvPr id="6" name="TextBox 5"/>
-          <p:cNvSpPr txBox="1"/>
-          <p:nvPr/>
-        </p:nvSpPr>
-        <p:spPr>
-          <a:xfrm>
-            <a:off x="609600" y="6197600"/>
-            <a:ext cx="10223500" cy="469900"/>
-          </a:xfrm>
-          <a:prstGeom prst="rect">
-            <a:avLst/>
-          </a:prstGeom>
-          <a:noFill/>
-        </p:spPr>
-        <p:txBody>
-          <a:bodyPr wrap="square" lIns="0" rIns="0" tIns="0" bIns="0" anchor="ctr">
-            <a:spAutoFit/>
-          </a:bodyPr>
-          <a:lstStyle/>
-          <a:p>
-            <a:pPr algn="l">
-              <a:lnSpc>
-                <a:spcPct val="108000"/>
-              </a:lnSpc>
-              <a:spcBef>
-                <a:spcPts val="0"/>
-              </a:spcBef>
-              <a:spcAft>
-                <a:spcPts val="0"/>
-              </a:spcAft>
-              <a:defRPr sz="900" b="0">
-                <a:solidFill>
-                  <a:srgbClr val="536675"/>
-                </a:solidFill>
-                <a:latin typeface="Arial"/>
-              </a:defRPr>
-            </a:pPr>
-            <a:r>
-              <a:t>Fuentes: informes experimentales del 24-10-2026; Toma de Muestra 2</a:t>
-            </a:r>
-          </a:p>
-        </p:txBody>
-      </p:sp>
-      <p:sp>
-        <p:nvSpPr>
-          <p:cNvPr id="7" name="TextBox 6"/>
-          <p:cNvSpPr txBox="1"/>
-          <p:nvPr/>
-        </p:nvSpPr>
-        <p:spPr>
-          <a:xfrm>
-            <a:off x="10896600" y="6210300"/>
-            <a:ext cx="660400" cy="279400"/>
-          </a:xfrm>
-          <a:prstGeom prst="rect">
-            <a:avLst/>
-          </a:prstGeom>
-          <a:noFill/>
-        </p:spPr>
-        <p:txBody>
-          <a:bodyPr wrap="square" lIns="0" rIns="0" tIns="0" bIns="0" anchor="ctr">
-            <a:spAutoFit/>
-          </a:bodyPr>
-          <a:lstStyle/>
-          <a:p>
-            <a:pPr algn="r">
-              <a:lnSpc>
-                <a:spcPct val="108000"/>
-              </a:lnSpc>
-              <a:spcBef>
-                <a:spcPts val="0"/>
-              </a:spcBef>
-              <a:spcAft>
-                <a:spcPts val="0"/>
-              </a:spcAft>
-              <a:defRPr sz="1000" b="1">
-                <a:solidFill>
-                  <a:srgbClr val="536675"/>
-                </a:solidFill>
-                <a:latin typeface="Arial"/>
-              </a:defRPr>
-            </a:pPr>
-            <a:r>
-              <a:t>1 / 8</a:t>
-            </a:r>
-          </a:p>
-        </p:txBody>
-      </p:sp>
-      <p:sp>
-        <p:nvSpPr>
-          <p:cNvPr id="8" name="TextBox 7"/>
-          <p:cNvSpPr txBox="1"/>
-          <p:nvPr/>
-        </p:nvSpPr>
-        <p:spPr>
-          <a:xfrm>
-            <a:off x="609600" y="1879600"/>
-            <a:ext cx="10922000" cy="533400"/>
-          </a:xfrm>
-          <a:prstGeom prst="rect">
-            <a:avLst/>
-          </a:prstGeom>
-          <a:noFill/>
-        </p:spPr>
-        <p:txBody>
-          <a:bodyPr wrap="square" lIns="0" rIns="0" tIns="0" bIns="0" anchor="ctr">
-            <a:spAutoFit/>
-          </a:bodyPr>
-          <a:lstStyle/>
-          <a:p>
-            <a:pPr algn="l">
-              <a:lnSpc>
-                <a:spcPct val="108000"/>
-              </a:lnSpc>
-              <a:spcBef>
-                <a:spcPts val="0"/>
-              </a:spcBef>
-              <a:spcAft>
-                <a:spcPts val="0"/>
-              </a:spcAft>
-              <a:defRPr sz="2300" b="1">
-                <a:solidFill>
-                  <a:srgbClr val="173047"/>
-                </a:solidFill>
-                <a:latin typeface="Arial"/>
-              </a:defRPr>
-            </a:pPr>
-            <a:r>
-              <a:t>Predicción de pseudoetiquetas de activación y atención</a:t>
-            </a:r>
-          </a:p>
-        </p:txBody>
-      </p:sp>
-      <p:sp>
-        <p:nvSpPr>
-          <p:cNvPr id="9" name="Rounded Rectangle 8"/>
+          <p:cNvPr id="6" name="Rectangle 5"/>
           <p:cNvSpPr/>
           <p:nvPr/>
         </p:nvSpPr>
         <p:spPr>
           <a:xfrm>
-            <a:off x="609600" y="2768600"/>
-            <a:ext cx="10972800" cy="1968500"/>
-          </a:xfrm>
-          <a:prstGeom prst="roundRect">
+            <a:off x="609600" y="6083300"/>
+            <a:ext cx="1371600" cy="38100"/>
+          </a:xfrm>
+          <a:prstGeom prst="rect">
             <a:avLst/>
           </a:prstGeom>
           <a:solidFill>
-            <a:srgbClr val="F7F9FB"/>
+            <a:srgbClr val="087E83"/>
           </a:solidFill>
           <a:ln>
             <a:noFill/>
@@ -4369,20 +4234,157 @@
       </p:sp>
       <p:sp>
         <p:nvSpPr>
-          <p:cNvPr id="10" name="Rectangle 9"/>
+          <p:cNvPr id="7" name="TextBox 6"/>
+          <p:cNvSpPr txBox="1"/>
+          <p:nvPr/>
+        </p:nvSpPr>
+        <p:spPr>
+          <a:xfrm>
+            <a:off x="609600" y="6235700"/>
+            <a:ext cx="10223500" cy="444500"/>
+          </a:xfrm>
+          <a:prstGeom prst="rect">
+            <a:avLst/>
+          </a:prstGeom>
+          <a:noFill/>
+        </p:spPr>
+        <p:txBody>
+          <a:bodyPr wrap="square" lIns="0" rIns="0" tIns="0" bIns="0" anchor="ctr">
+            <a:spAutoFit/>
+          </a:bodyPr>
+          <a:lstStyle/>
+          <a:p>
+            <a:pPr algn="l">
+              <a:lnSpc>
+                <a:spcPct val="104000"/>
+              </a:lnSpc>
+              <a:spcBef>
+                <a:spcPts val="0"/>
+              </a:spcBef>
+              <a:spcAft>
+                <a:spcPts val="0"/>
+              </a:spcAft>
+              <a:defRPr sz="900" b="0">
+                <a:solidFill>
+                  <a:srgbClr val="DDF0ED"/>
+                </a:solidFill>
+                <a:latin typeface="Aptos"/>
+              </a:defRPr>
+            </a:pPr>
+            <a:r>
+              <a:t>Fuentes: informes experimentales del 24-10-2026; Toma de Muestra 2</a:t>
+            </a:r>
+          </a:p>
+        </p:txBody>
+      </p:sp>
+      <p:sp>
+        <p:nvSpPr>
+          <p:cNvPr id="8" name="TextBox 7"/>
+          <p:cNvSpPr txBox="1"/>
+          <p:nvPr/>
+        </p:nvSpPr>
+        <p:spPr>
+          <a:xfrm>
+            <a:off x="10820400" y="6235700"/>
+            <a:ext cx="736600" cy="279400"/>
+          </a:xfrm>
+          <a:prstGeom prst="rect">
+            <a:avLst/>
+          </a:prstGeom>
+          <a:noFill/>
+        </p:spPr>
+        <p:txBody>
+          <a:bodyPr wrap="square" lIns="0" rIns="0" tIns="0" bIns="0" anchor="ctr">
+            <a:spAutoFit/>
+          </a:bodyPr>
+          <a:lstStyle/>
+          <a:p>
+            <a:pPr algn="r">
+              <a:lnSpc>
+                <a:spcPct val="104000"/>
+              </a:lnSpc>
+              <a:spcBef>
+                <a:spcPts val="0"/>
+              </a:spcBef>
+              <a:spcAft>
+                <a:spcPts val="0"/>
+              </a:spcAft>
+              <a:defRPr sz="1000" b="1">
+                <a:solidFill>
+                  <a:srgbClr val="DDF0ED"/>
+                </a:solidFill>
+                <a:latin typeface="Aptos"/>
+              </a:defRPr>
+            </a:pPr>
+            <a:r>
+              <a:t>01 / 08</a:t>
+            </a:r>
+          </a:p>
+        </p:txBody>
+      </p:sp>
+      <p:sp>
+        <p:nvSpPr>
+          <p:cNvPr id="9" name="TextBox 8"/>
+          <p:cNvSpPr txBox="1"/>
+          <p:nvPr/>
+        </p:nvSpPr>
+        <p:spPr>
+          <a:xfrm>
+            <a:off x="609600" y="1879600"/>
+            <a:ext cx="10922000" cy="533400"/>
+          </a:xfrm>
+          <a:prstGeom prst="rect">
+            <a:avLst/>
+          </a:prstGeom>
+          <a:noFill/>
+        </p:spPr>
+        <p:txBody>
+          <a:bodyPr wrap="square" lIns="0" rIns="0" tIns="0" bIns="0" anchor="ctr">
+            <a:spAutoFit/>
+          </a:bodyPr>
+          <a:lstStyle/>
+          <a:p>
+            <a:pPr algn="l">
+              <a:lnSpc>
+                <a:spcPct val="104000"/>
+              </a:lnSpc>
+              <a:spcBef>
+                <a:spcPts val="0"/>
+              </a:spcBef>
+              <a:spcAft>
+                <a:spcPts val="0"/>
+              </a:spcAft>
+              <a:defRPr sz="2300" b="1">
+                <a:solidFill>
+                  <a:srgbClr val="FFFFFF"/>
+                </a:solidFill>
+                <a:latin typeface="Aptos"/>
+              </a:defRPr>
+            </a:pPr>
+            <a:r>
+              <a:t>Predicción de pseudoetiquetas de activación y atención</a:t>
+            </a:r>
+          </a:p>
+        </p:txBody>
+      </p:sp>
+      <p:sp>
+        <p:nvSpPr>
+          <p:cNvPr id="10" name="Rounded Rectangle 9"/>
           <p:cNvSpPr/>
           <p:nvPr/>
         </p:nvSpPr>
         <p:spPr>
           <a:xfrm>
             <a:off x="609600" y="2768600"/>
-            <a:ext cx="63500" cy="1968500"/>
-          </a:xfrm>
-          <a:prstGeom prst="rect">
-            <a:avLst/>
+            <a:ext cx="10972800" cy="1968500"/>
+          </a:xfrm>
+          <a:prstGeom prst="roundRect">
+            <a:avLst>
+              <a:gd name="adj" fmla="val 10000"/>
+            </a:avLst>
           </a:prstGeom>
           <a:solidFill>
-            <a:srgbClr val="087F86"/>
+            <a:srgbClr val="376B91"/>
           </a:solidFill>
           <a:ln>
             <a:noFill/>
@@ -4412,110 +4414,20 @@
       </p:sp>
       <p:sp>
         <p:nvSpPr>
-          <p:cNvPr id="11" name="TextBox 10"/>
-          <p:cNvSpPr txBox="1"/>
-          <p:nvPr/>
-        </p:nvSpPr>
-        <p:spPr>
-          <a:xfrm>
-            <a:off x="850900" y="2921000"/>
-            <a:ext cx="10515600" cy="381000"/>
-          </a:xfrm>
-          <a:prstGeom prst="rect">
-            <a:avLst/>
-          </a:prstGeom>
-          <a:noFill/>
-        </p:spPr>
-        <p:txBody>
-          <a:bodyPr wrap="square" lIns="0" rIns="0" tIns="0" bIns="0" anchor="ctr">
-            <a:spAutoFit/>
-          </a:bodyPr>
-          <a:lstStyle/>
-          <a:p>
-            <a:pPr algn="l">
-              <a:lnSpc>
-                <a:spcPct val="108000"/>
-              </a:lnSpc>
-              <a:spcBef>
-                <a:spcPts val="0"/>
-              </a:spcBef>
-              <a:spcAft>
-                <a:spcPts val="0"/>
-              </a:spcAft>
-              <a:defRPr sz="1600" b="1">
-                <a:solidFill>
-                  <a:srgbClr val="087F86"/>
-                </a:solidFill>
-                <a:latin typeface="Arial"/>
-              </a:defRPr>
-            </a:pPr>
-            <a:r>
-              <a:t>PREGUNTA CENTRAL</a:t>
-            </a:r>
-          </a:p>
-        </p:txBody>
-      </p:sp>
-      <p:sp>
-        <p:nvSpPr>
-          <p:cNvPr id="12" name="TextBox 11"/>
-          <p:cNvSpPr txBox="1"/>
-          <p:nvPr/>
-        </p:nvSpPr>
-        <p:spPr>
-          <a:xfrm>
-            <a:off x="850900" y="3378200"/>
-            <a:ext cx="10490200" cy="1219200"/>
-          </a:xfrm>
-          <a:prstGeom prst="rect">
-            <a:avLst/>
-          </a:prstGeom>
-          <a:noFill/>
-        </p:spPr>
-        <p:txBody>
-          <a:bodyPr wrap="square" lIns="0" rIns="0" tIns="0" bIns="0" anchor="ctr">
-            <a:spAutoFit/>
-          </a:bodyPr>
-          <a:lstStyle/>
-          <a:p>
-            <a:pPr algn="l">
-              <a:lnSpc>
-                <a:spcPct val="108000"/>
-              </a:lnSpc>
-              <a:spcBef>
-                <a:spcPts val="0"/>
-              </a:spcBef>
-              <a:spcAft>
-                <a:spcPts val="0"/>
-              </a:spcAft>
-              <a:defRPr sz="2000" b="0">
-                <a:solidFill>
-                  <a:srgbClr val="173047"/>
-                </a:solidFill>
-                <a:latin typeface="Arial"/>
-              </a:defRPr>
-            </a:pPr>
-            <a:r>
-              <a:t>¿Pueden EEG, mirada y pupila anticipar una etiqueta calculada con otras señales, y aportan valor el historial temporal o la fusión por modalidad?</a:t>
-            </a:r>
-          </a:p>
-        </p:txBody>
-      </p:sp>
-      <p:sp>
-        <p:nvSpPr>
-          <p:cNvPr id="13" name="Rounded Rectangle 12"/>
+          <p:cNvPr id="11" name="Rectangle 10"/>
           <p:cNvSpPr/>
           <p:nvPr/>
         </p:nvSpPr>
         <p:spPr>
           <a:xfrm>
-            <a:off x="609600" y="5016500"/>
-            <a:ext cx="10972800" cy="736600"/>
-          </a:xfrm>
-          <a:prstGeom prst="roundRect">
+            <a:off x="609600" y="2768600"/>
+            <a:ext cx="88900" cy="1968500"/>
+          </a:xfrm>
+          <a:prstGeom prst="rect">
             <a:avLst/>
           </a:prstGeom>
           <a:solidFill>
-            <a:srgbClr val="EAF3F4"/>
+            <a:srgbClr val="087E83"/>
           </a:solidFill>
           <a:ln>
             <a:noFill/>
@@ -4545,14 +4457,14 @@
       </p:sp>
       <p:sp>
         <p:nvSpPr>
-          <p:cNvPr id="14" name="TextBox 13"/>
+          <p:cNvPr id="12" name="TextBox 11"/>
           <p:cNvSpPr txBox="1"/>
           <p:nvPr/>
         </p:nvSpPr>
         <p:spPr>
           <a:xfrm>
-            <a:off x="825500" y="5080000"/>
-            <a:ext cx="10528300" cy="609600"/>
+            <a:off x="876300" y="2946400"/>
+            <a:ext cx="10109200" cy="355600"/>
           </a:xfrm>
           <a:prstGeom prst="rect">
             <a:avLst/>
@@ -4567,7 +4479,7 @@
           <a:p>
             <a:pPr algn="l">
               <a:lnSpc>
-                <a:spcPct val="108000"/>
+                <a:spcPct val="104000"/>
               </a:lnSpc>
               <a:spcBef>
                 <a:spcPts val="0"/>
@@ -4575,15 +4487,150 @@
               <a:spcAft>
                 <a:spcPts val="0"/>
               </a:spcAft>
-              <a:defRPr sz="1700" b="1">
+              <a:defRPr sz="1500" b="1">
                 <a:solidFill>
-                  <a:srgbClr val="102B42"/>
+                  <a:srgbClr val="DDF0ED"/>
                 </a:solidFill>
-                <a:latin typeface="Arial"/>
+                <a:latin typeface="Aptos"/>
               </a:defRPr>
             </a:pPr>
             <a:r>
-              <a:t>Conclusión actual: hay señal alineada en train; la generalización y la validez psicológica siguen abiertas.</a:t>
+              <a:t>PREGUNTA CENTRAL</a:t>
+            </a:r>
+          </a:p>
+        </p:txBody>
+      </p:sp>
+      <p:sp>
+        <p:nvSpPr>
+          <p:cNvPr id="13" name="TextBox 12"/>
+          <p:cNvSpPr txBox="1"/>
+          <p:nvPr/>
+        </p:nvSpPr>
+        <p:spPr>
+          <a:xfrm>
+            <a:off x="876300" y="3467100"/>
+            <a:ext cx="10121900" cy="977900"/>
+          </a:xfrm>
+          <a:prstGeom prst="rect">
+            <a:avLst/>
+          </a:prstGeom>
+          <a:noFill/>
+        </p:spPr>
+        <p:txBody>
+          <a:bodyPr wrap="square" lIns="0" rIns="0" tIns="0" bIns="0" anchor="ctr">
+            <a:spAutoFit/>
+          </a:bodyPr>
+          <a:lstStyle/>
+          <a:p>
+            <a:pPr algn="l">
+              <a:lnSpc>
+                <a:spcPct val="104000"/>
+              </a:lnSpc>
+              <a:spcBef>
+                <a:spcPts val="0"/>
+              </a:spcBef>
+              <a:spcAft>
+                <a:spcPts val="0"/>
+              </a:spcAft>
+              <a:defRPr sz="2300" b="1">
+                <a:solidFill>
+                  <a:srgbClr val="FFFFFF"/>
+                </a:solidFill>
+                <a:latin typeface="Aptos"/>
+              </a:defRPr>
+            </a:pPr>
+            <a:r>
+              <a:t>¿Pueden EEG, mirada y pupila anticipar una etiqueta calculada con otras señales? ¿Aportan valor el historial o la fusión?</a:t>
+            </a:r>
+          </a:p>
+        </p:txBody>
+      </p:sp>
+      <p:sp>
+        <p:nvSpPr>
+          <p:cNvPr id="14" name="Rounded Rectangle 13"/>
+          <p:cNvSpPr/>
+          <p:nvPr/>
+        </p:nvSpPr>
+        <p:spPr>
+          <a:xfrm>
+            <a:off x="609600" y="5003800"/>
+            <a:ext cx="10972800" cy="800100"/>
+          </a:xfrm>
+          <a:prstGeom prst="roundRect">
+            <a:avLst>
+              <a:gd name="adj" fmla="val 10000"/>
+            </a:avLst>
+          </a:prstGeom>
+          <a:solidFill>
+            <a:srgbClr val="DDF0ED"/>
+          </a:solidFill>
+          <a:ln>
+            <a:noFill/>
+          </a:ln>
+        </p:spPr>
+        <p:style>
+          <a:lnRef idx="1">
+            <a:schemeClr val="accent1"/>
+          </a:lnRef>
+          <a:fillRef idx="3">
+            <a:schemeClr val="accent1"/>
+          </a:fillRef>
+          <a:effectRef idx="2">
+            <a:schemeClr val="accent1"/>
+          </a:effectRef>
+          <a:fontRef idx="minor">
+            <a:schemeClr val="lt1"/>
+          </a:fontRef>
+        </p:style>
+        <p:txBody>
+          <a:bodyPr rtlCol="0" anchor="ctr"/>
+          <a:lstStyle/>
+          <a:p>
+            <a:pPr algn="ctr"/>
+          </a:p>
+        </p:txBody>
+      </p:sp>
+      <p:sp>
+        <p:nvSpPr>
+          <p:cNvPr id="15" name="TextBox 14"/>
+          <p:cNvSpPr txBox="1"/>
+          <p:nvPr/>
+        </p:nvSpPr>
+        <p:spPr>
+          <a:xfrm>
+            <a:off x="850900" y="5067300"/>
+            <a:ext cx="10477500" cy="660400"/>
+          </a:xfrm>
+          <a:prstGeom prst="rect">
+            <a:avLst/>
+          </a:prstGeom>
+          <a:noFill/>
+        </p:spPr>
+        <p:txBody>
+          <a:bodyPr wrap="square" lIns="0" rIns="0" tIns="0" bIns="0" anchor="ctr">
+            <a:spAutoFit/>
+          </a:bodyPr>
+          <a:lstStyle/>
+          <a:p>
+            <a:pPr algn="l">
+              <a:lnSpc>
+                <a:spcPct val="104000"/>
+              </a:lnSpc>
+              <a:spcBef>
+                <a:spcPts val="0"/>
+              </a:spcBef>
+              <a:spcAft>
+                <a:spcPts val="0"/>
+              </a:spcAft>
+              <a:defRPr sz="1800" b="1">
+                <a:solidFill>
+                  <a:srgbClr val="102A3D"/>
+                </a:solidFill>
+                <a:latin typeface="Aptos"/>
+              </a:defRPr>
+            </a:pPr>
+            <a:r>
+              <a:t>Hay señal alineada en train; la generalización y la validez psicológica siguen abiertas.</a:t>
             </a:r>
           </a:p>
         </p:txBody>
@@ -4602,7 +4649,7 @@
     <p:bg>
       <p:bgPr>
         <a:solidFill>
-          <a:srgbClr val="FFFFFF"/>
+          <a:srgbClr val="F7F8F5"/>
         </a:solidFill>
         <a:effectLst/>
       </p:bgPr>
@@ -4623,13 +4670,13 @@
         <p:spPr>
           <a:xfrm>
             <a:off x="0" y="0"/>
-            <a:ext cx="12192000" cy="88900"/>
+            <a:ext cx="12192000" cy="76200"/>
           </a:xfrm>
           <a:prstGeom prst="rect">
             <a:avLst/>
           </a:prstGeom>
           <a:solidFill>
-            <a:srgbClr val="102B42"/>
+            <a:srgbClr val="087E83"/>
           </a:solidFill>
           <a:ln>
             <a:noFill/>
@@ -4681,7 +4728,7 @@
           <a:p>
             <a:pPr algn="l">
               <a:lnSpc>
-                <a:spcPct val="108000"/>
+                <a:spcPct val="104000"/>
               </a:lnSpc>
               <a:spcBef>
                 <a:spcPts val="0"/>
@@ -4691,13 +4738,13 @@
               </a:spcAft>
               <a:defRPr sz="1100" b="1">
                 <a:solidFill>
-                  <a:srgbClr val="087F86"/>
+                  <a:srgbClr val="087E83"/>
                 </a:solidFill>
-                <a:latin typeface="Arial"/>
+                <a:latin typeface="Aptos"/>
               </a:defRPr>
             </a:pPr>
             <a:r>
-              <a:t>DISEÑO Y SIGNIFICADO DE LA ETIQUETA</a:t>
+              <a:t>02  /  DISEÑO Y SIGNIFICADO DE LA ETIQUETA</a:t>
             </a:r>
           </a:p>
         </p:txBody>
@@ -4711,7 +4758,7 @@
         <p:spPr>
           <a:xfrm>
             <a:off x="609600" y="723900"/>
-            <a:ext cx="10972800" cy="939800"/>
+            <a:ext cx="10972800" cy="990600"/>
           </a:xfrm>
           <a:prstGeom prst="rect">
             <a:avLst/>
@@ -4726,7 +4773,7 @@
           <a:p>
             <a:pPr algn="l">
               <a:lnSpc>
-                <a:spcPct val="108000"/>
+                <a:spcPct val="104000"/>
               </a:lnSpc>
               <a:spcBef>
                 <a:spcPts val="0"/>
@@ -4734,11 +4781,11 @@
               <a:spcAft>
                 <a:spcPts val="0"/>
               </a:spcAft>
-              <a:defRPr sz="3000" b="1">
+              <a:defRPr sz="3200" b="1">
                 <a:solidFill>
-                  <a:srgbClr val="102B42"/>
+                  <a:srgbClr val="102A3D"/>
                 </a:solidFill>
-                <a:latin typeface="Arial"/>
+                <a:latin typeface="Aptos"/>
               </a:defRPr>
             </a:pPr>
             <a:r>
@@ -4755,14 +4802,14 @@
         </p:nvSpPr>
         <p:spPr>
           <a:xfrm>
-            <a:off x="609600" y="6096000"/>
+            <a:off x="609600" y="6134100"/>
             <a:ext cx="10972800" cy="12700"/>
           </a:xfrm>
           <a:prstGeom prst="rect">
             <a:avLst/>
           </a:prstGeom>
           <a:solidFill>
-            <a:srgbClr val="D4DFE5"/>
+            <a:srgbClr val="D9E2E3"/>
           </a:solidFill>
           <a:ln>
             <a:noFill/>
@@ -4792,110 +4839,20 @@
       </p:sp>
       <p:sp>
         <p:nvSpPr>
-          <p:cNvPr id="6" name="TextBox 5"/>
-          <p:cNvSpPr txBox="1"/>
-          <p:nvPr/>
-        </p:nvSpPr>
-        <p:spPr>
-          <a:xfrm>
-            <a:off x="609600" y="6197600"/>
-            <a:ext cx="10223500" cy="469900"/>
-          </a:xfrm>
-          <a:prstGeom prst="rect">
-            <a:avLst/>
-          </a:prstGeom>
-          <a:noFill/>
-        </p:spPr>
-        <p:txBody>
-          <a:bodyPr wrap="square" lIns="0" rIns="0" tIns="0" bIns="0" anchor="ctr">
-            <a:spAutoFit/>
-          </a:bodyPr>
-          <a:lstStyle/>
-          <a:p>
-            <a:pPr algn="l">
-              <a:lnSpc>
-                <a:spcPct val="108000"/>
-              </a:lnSpc>
-              <a:spcBef>
-                <a:spcPts val="0"/>
-              </a:spcBef>
-              <a:spcAft>
-                <a:spcPts val="0"/>
-              </a:spcAft>
-              <a:defRPr sz="900" b="0">
-                <a:solidFill>
-                  <a:srgbClr val="536675"/>
-                </a:solidFill>
-                <a:latin typeface="Arial"/>
-              </a:defRPr>
-            </a:pPr>
-            <a:r>
-              <a:t>Fuente: metodología del manuscrito; Evaluacion_Independiente_y_Validez_24-10-2026.md</a:t>
-            </a:r>
-          </a:p>
-        </p:txBody>
-      </p:sp>
-      <p:sp>
-        <p:nvSpPr>
-          <p:cNvPr id="7" name="TextBox 6"/>
-          <p:cNvSpPr txBox="1"/>
-          <p:nvPr/>
-        </p:nvSpPr>
-        <p:spPr>
-          <a:xfrm>
-            <a:off x="10896600" y="6210300"/>
-            <a:ext cx="660400" cy="279400"/>
-          </a:xfrm>
-          <a:prstGeom prst="rect">
-            <a:avLst/>
-          </a:prstGeom>
-          <a:noFill/>
-        </p:spPr>
-        <p:txBody>
-          <a:bodyPr wrap="square" lIns="0" rIns="0" tIns="0" bIns="0" anchor="ctr">
-            <a:spAutoFit/>
-          </a:bodyPr>
-          <a:lstStyle/>
-          <a:p>
-            <a:pPr algn="r">
-              <a:lnSpc>
-                <a:spcPct val="108000"/>
-              </a:lnSpc>
-              <a:spcBef>
-                <a:spcPts val="0"/>
-              </a:spcBef>
-              <a:spcAft>
-                <a:spcPts val="0"/>
-              </a:spcAft>
-              <a:defRPr sz="1000" b="1">
-                <a:solidFill>
-                  <a:srgbClr val="536675"/>
-                </a:solidFill>
-                <a:latin typeface="Arial"/>
-              </a:defRPr>
-            </a:pPr>
-            <a:r>
-              <a:t>2 / 8</a:t>
-            </a:r>
-          </a:p>
-        </p:txBody>
-      </p:sp>
-      <p:sp>
-        <p:nvSpPr>
-          <p:cNvPr id="8" name="Rounded Rectangle 7"/>
+          <p:cNvPr id="6" name="Rectangle 5"/>
           <p:cNvSpPr/>
           <p:nvPr/>
         </p:nvSpPr>
         <p:spPr>
           <a:xfrm>
-            <a:off x="609600" y="1879600"/>
-            <a:ext cx="5143500" cy="2209800"/>
-          </a:xfrm>
-          <a:prstGeom prst="roundRect">
+            <a:off x="609600" y="6083300"/>
+            <a:ext cx="2743200" cy="38100"/>
+          </a:xfrm>
+          <a:prstGeom prst="rect">
             <a:avLst/>
           </a:prstGeom>
           <a:solidFill>
-            <a:srgbClr val="F7F9FB"/>
+            <a:srgbClr val="087E83"/>
           </a:solidFill>
           <a:ln>
             <a:noFill/>
@@ -4925,20 +4882,112 @@
       </p:sp>
       <p:sp>
         <p:nvSpPr>
-          <p:cNvPr id="9" name="Rectangle 8"/>
+          <p:cNvPr id="7" name="TextBox 6"/>
+          <p:cNvSpPr txBox="1"/>
+          <p:nvPr/>
+        </p:nvSpPr>
+        <p:spPr>
+          <a:xfrm>
+            <a:off x="609600" y="6235700"/>
+            <a:ext cx="10223500" cy="444500"/>
+          </a:xfrm>
+          <a:prstGeom prst="rect">
+            <a:avLst/>
+          </a:prstGeom>
+          <a:noFill/>
+        </p:spPr>
+        <p:txBody>
+          <a:bodyPr wrap="square" lIns="0" rIns="0" tIns="0" bIns="0" anchor="ctr">
+            <a:spAutoFit/>
+          </a:bodyPr>
+          <a:lstStyle/>
+          <a:p>
+            <a:pPr algn="l">
+              <a:lnSpc>
+                <a:spcPct val="104000"/>
+              </a:lnSpc>
+              <a:spcBef>
+                <a:spcPts val="0"/>
+              </a:spcBef>
+              <a:spcAft>
+                <a:spcPts val="0"/>
+              </a:spcAft>
+              <a:defRPr sz="900" b="0">
+                <a:solidFill>
+                  <a:srgbClr val="5D7180"/>
+                </a:solidFill>
+                <a:latin typeface="Aptos"/>
+              </a:defRPr>
+            </a:pPr>
+            <a:r>
+              <a:t>Fuente: metodología del manuscrito; Evaluacion_Independiente_y_Validez_24-10-2026.md</a:t>
+            </a:r>
+          </a:p>
+        </p:txBody>
+      </p:sp>
+      <p:sp>
+        <p:nvSpPr>
+          <p:cNvPr id="8" name="TextBox 7"/>
+          <p:cNvSpPr txBox="1"/>
+          <p:nvPr/>
+        </p:nvSpPr>
+        <p:spPr>
+          <a:xfrm>
+            <a:off x="10820400" y="6235700"/>
+            <a:ext cx="736600" cy="279400"/>
+          </a:xfrm>
+          <a:prstGeom prst="rect">
+            <a:avLst/>
+          </a:prstGeom>
+          <a:noFill/>
+        </p:spPr>
+        <p:txBody>
+          <a:bodyPr wrap="square" lIns="0" rIns="0" tIns="0" bIns="0" anchor="ctr">
+            <a:spAutoFit/>
+          </a:bodyPr>
+          <a:lstStyle/>
+          <a:p>
+            <a:pPr algn="r">
+              <a:lnSpc>
+                <a:spcPct val="104000"/>
+              </a:lnSpc>
+              <a:spcBef>
+                <a:spcPts val="0"/>
+              </a:spcBef>
+              <a:spcAft>
+                <a:spcPts val="0"/>
+              </a:spcAft>
+              <a:defRPr sz="1000" b="1">
+                <a:solidFill>
+                  <a:srgbClr val="5D7180"/>
+                </a:solidFill>
+                <a:latin typeface="Aptos"/>
+              </a:defRPr>
+            </a:pPr>
+            <a:r>
+              <a:t>02 / 08</a:t>
+            </a:r>
+          </a:p>
+        </p:txBody>
+      </p:sp>
+      <p:sp>
+        <p:nvSpPr>
+          <p:cNvPr id="9" name="Rounded Rectangle 8"/>
           <p:cNvSpPr/>
           <p:nvPr/>
         </p:nvSpPr>
         <p:spPr>
           <a:xfrm>
             <a:off x="609600" y="1879600"/>
-            <a:ext cx="63500" cy="2209800"/>
-          </a:xfrm>
-          <a:prstGeom prst="rect">
-            <a:avLst/>
+            <a:ext cx="5143500" cy="2209800"/>
+          </a:xfrm>
+          <a:prstGeom prst="roundRect">
+            <a:avLst>
+              <a:gd name="adj" fmla="val 10000"/>
+            </a:avLst>
           </a:prstGeom>
           <a:solidFill>
-            <a:srgbClr val="087F86"/>
+            <a:srgbClr val="FFFFFF"/>
           </a:solidFill>
           <a:ln>
             <a:noFill/>
@@ -4968,110 +5017,20 @@
       </p:sp>
       <p:sp>
         <p:nvSpPr>
-          <p:cNvPr id="10" name="TextBox 9"/>
-          <p:cNvSpPr txBox="1"/>
-          <p:nvPr/>
-        </p:nvSpPr>
-        <p:spPr>
-          <a:xfrm>
-            <a:off x="850900" y="2032000"/>
-            <a:ext cx="4686300" cy="381000"/>
-          </a:xfrm>
-          <a:prstGeom prst="rect">
-            <a:avLst/>
-          </a:prstGeom>
-          <a:noFill/>
-        </p:spPr>
-        <p:txBody>
-          <a:bodyPr wrap="square" lIns="0" rIns="0" tIns="0" bIns="0" anchor="ctr">
-            <a:spAutoFit/>
-          </a:bodyPr>
-          <a:lstStyle/>
-          <a:p>
-            <a:pPr algn="l">
-              <a:lnSpc>
-                <a:spcPct val="108000"/>
-              </a:lnSpc>
-              <a:spcBef>
-                <a:spcPts val="0"/>
-              </a:spcBef>
-              <a:spcAft>
-                <a:spcPts val="0"/>
-              </a:spcAft>
-              <a:defRPr sz="1600" b="1">
-                <a:solidFill>
-                  <a:srgbClr val="087F86"/>
-                </a:solidFill>
-                <a:latin typeface="Arial"/>
-              </a:defRPr>
-            </a:pPr>
-            <a:r>
-              <a:t>PROFESOR · DEFINE EL OBJETIVO</a:t>
-            </a:r>
-          </a:p>
-        </p:txBody>
-      </p:sp>
-      <p:sp>
-        <p:nvSpPr>
-          <p:cNvPr id="11" name="TextBox 10"/>
-          <p:cNvSpPr txBox="1"/>
-          <p:nvPr/>
-        </p:nvSpPr>
-        <p:spPr>
-          <a:xfrm>
-            <a:off x="850900" y="2489200"/>
-            <a:ext cx="4660900" cy="1460500"/>
-          </a:xfrm>
-          <a:prstGeom prst="rect">
-            <a:avLst/>
-          </a:prstGeom>
-          <a:noFill/>
-        </p:spPr>
-        <p:txBody>
-          <a:bodyPr wrap="square" lIns="0" rIns="0" tIns="0" bIns="0" anchor="ctr">
-            <a:spAutoFit/>
-          </a:bodyPr>
-          <a:lstStyle/>
-          <a:p>
-            <a:pPr algn="l">
-              <a:lnSpc>
-                <a:spcPct val="108000"/>
-              </a:lnSpc>
-              <a:spcBef>
-                <a:spcPts val="0"/>
-              </a:spcBef>
-              <a:spcAft>
-                <a:spcPts val="0"/>
-              </a:spcAft>
-              <a:defRPr sz="1700" b="0">
-                <a:solidFill>
-                  <a:srgbClr val="173047"/>
-                </a:solidFill>
-                <a:latin typeface="Arial"/>
-              </a:defRPr>
-            </a:pPr>
-            <a:r>
-              <a:t>GSR genera la pseudoetiqueta principal de activación: bajo, medio o alto. Se usan terciles relativos a cada persona y toda su sesión.</a:t>
-            </a:r>
-          </a:p>
-        </p:txBody>
-      </p:sp>
-      <p:sp>
-        <p:nvSpPr>
-          <p:cNvPr id="12" name="Rounded Rectangle 11"/>
+          <p:cNvPr id="10" name="Rectangle 9"/>
           <p:cNvSpPr/>
           <p:nvPr/>
         </p:nvSpPr>
         <p:spPr>
           <a:xfrm>
-            <a:off x="6438900" y="1879600"/>
-            <a:ext cx="5143500" cy="2209800"/>
-          </a:xfrm>
-          <a:prstGeom prst="roundRect">
+            <a:off x="609600" y="1879600"/>
+            <a:ext cx="5143500" cy="63500"/>
+          </a:xfrm>
+          <a:prstGeom prst="rect">
             <a:avLst/>
           </a:prstGeom>
           <a:solidFill>
-            <a:srgbClr val="F7F9FB"/>
+            <a:srgbClr val="087E83"/>
           </a:solidFill>
           <a:ln>
             <a:noFill/>
@@ -5101,20 +5060,112 @@
       </p:sp>
       <p:sp>
         <p:nvSpPr>
-          <p:cNvPr id="13" name="Rectangle 12"/>
+          <p:cNvPr id="11" name="TextBox 10"/>
+          <p:cNvSpPr txBox="1"/>
+          <p:nvPr/>
+        </p:nvSpPr>
+        <p:spPr>
+          <a:xfrm>
+            <a:off x="850900" y="2095500"/>
+            <a:ext cx="4686300" cy="381000"/>
+          </a:xfrm>
+          <a:prstGeom prst="rect">
+            <a:avLst/>
+          </a:prstGeom>
+          <a:noFill/>
+        </p:spPr>
+        <p:txBody>
+          <a:bodyPr wrap="square" lIns="0" rIns="0" tIns="0" bIns="0" anchor="ctr">
+            <a:spAutoFit/>
+          </a:bodyPr>
+          <a:lstStyle/>
+          <a:p>
+            <a:pPr algn="l">
+              <a:lnSpc>
+                <a:spcPct val="104000"/>
+              </a:lnSpc>
+              <a:spcBef>
+                <a:spcPts val="0"/>
+              </a:spcBef>
+              <a:spcAft>
+                <a:spcPts val="0"/>
+              </a:spcAft>
+              <a:defRPr sz="1600" b="1">
+                <a:solidFill>
+                  <a:srgbClr val="087E83"/>
+                </a:solidFill>
+                <a:latin typeface="Aptos"/>
+              </a:defRPr>
+            </a:pPr>
+            <a:r>
+              <a:t>PROFESOR · DEFINE EL OBJETIVO</a:t>
+            </a:r>
+          </a:p>
+        </p:txBody>
+      </p:sp>
+      <p:sp>
+        <p:nvSpPr>
+          <p:cNvPr id="12" name="TextBox 11"/>
+          <p:cNvSpPr txBox="1"/>
+          <p:nvPr/>
+        </p:nvSpPr>
+        <p:spPr>
+          <a:xfrm>
+            <a:off x="850900" y="2565400"/>
+            <a:ext cx="4660900" cy="1409700"/>
+          </a:xfrm>
+          <a:prstGeom prst="rect">
+            <a:avLst/>
+          </a:prstGeom>
+          <a:noFill/>
+        </p:spPr>
+        <p:txBody>
+          <a:bodyPr wrap="square" lIns="0" rIns="0" tIns="0" bIns="0" anchor="ctr">
+            <a:spAutoFit/>
+          </a:bodyPr>
+          <a:lstStyle/>
+          <a:p>
+            <a:pPr algn="l">
+              <a:lnSpc>
+                <a:spcPct val="104000"/>
+              </a:lnSpc>
+              <a:spcBef>
+                <a:spcPts val="0"/>
+              </a:spcBef>
+              <a:spcAft>
+                <a:spcPts val="0"/>
+              </a:spcAft>
+              <a:defRPr sz="1700" b="0">
+                <a:solidFill>
+                  <a:srgbClr val="173348"/>
+                </a:solidFill>
+                <a:latin typeface="Aptos"/>
+              </a:defRPr>
+            </a:pPr>
+            <a:r>
+              <a:t>GSR genera la pseudoetiqueta principal de activación: bajo, medio o alto. Se usan terciles relativos a cada persona y toda su sesión.</a:t>
+            </a:r>
+          </a:p>
+        </p:txBody>
+      </p:sp>
+      <p:sp>
+        <p:nvSpPr>
+          <p:cNvPr id="13" name="Rounded Rectangle 12"/>
           <p:cNvSpPr/>
           <p:nvPr/>
         </p:nvSpPr>
         <p:spPr>
           <a:xfrm>
             <a:off x="6438900" y="1879600"/>
-            <a:ext cx="63500" cy="2209800"/>
-          </a:xfrm>
-          <a:prstGeom prst="rect">
-            <a:avLst/>
+            <a:ext cx="5143500" cy="2209800"/>
+          </a:xfrm>
+          <a:prstGeom prst="roundRect">
+            <a:avLst>
+              <a:gd name="adj" fmla="val 10000"/>
+            </a:avLst>
           </a:prstGeom>
           <a:solidFill>
-            <a:srgbClr val="215C80"/>
+            <a:srgbClr val="FFFFFF"/>
           </a:solidFill>
           <a:ln>
             <a:noFill/>
@@ -5144,110 +5195,20 @@
       </p:sp>
       <p:sp>
         <p:nvSpPr>
-          <p:cNvPr id="14" name="TextBox 13"/>
-          <p:cNvSpPr txBox="1"/>
-          <p:nvPr/>
-        </p:nvSpPr>
-        <p:spPr>
-          <a:xfrm>
-            <a:off x="6680200" y="2032000"/>
-            <a:ext cx="4686300" cy="381000"/>
-          </a:xfrm>
-          <a:prstGeom prst="rect">
-            <a:avLst/>
-          </a:prstGeom>
-          <a:noFill/>
-        </p:spPr>
-        <p:txBody>
-          <a:bodyPr wrap="square" lIns="0" rIns="0" tIns="0" bIns="0" anchor="ctr">
-            <a:spAutoFit/>
-          </a:bodyPr>
-          <a:lstStyle/>
-          <a:p>
-            <a:pPr algn="l">
-              <a:lnSpc>
-                <a:spcPct val="108000"/>
-              </a:lnSpc>
-              <a:spcBef>
-                <a:spcPts val="0"/>
-              </a:spcBef>
-              <a:spcAft>
-                <a:spcPts val="0"/>
-              </a:spcAft>
-              <a:defRPr sz="1600" b="1">
-                <a:solidFill>
-                  <a:srgbClr val="215C80"/>
-                </a:solidFill>
-                <a:latin typeface="Arial"/>
-              </a:defRPr>
-            </a:pPr>
-            <a:r>
-              <a:t>ESTUDIANTE · HACE LA PREDICCIÓN</a:t>
-            </a:r>
-          </a:p>
-        </p:txBody>
-      </p:sp>
-      <p:sp>
-        <p:nvSpPr>
-          <p:cNvPr id="15" name="TextBox 14"/>
-          <p:cNvSpPr txBox="1"/>
-          <p:nvPr/>
-        </p:nvSpPr>
-        <p:spPr>
-          <a:xfrm>
-            <a:off x="6680200" y="2489200"/>
-            <a:ext cx="4660900" cy="1460500"/>
-          </a:xfrm>
-          <a:prstGeom prst="rect">
-            <a:avLst/>
-          </a:prstGeom>
-          <a:noFill/>
-        </p:spPr>
-        <p:txBody>
-          <a:bodyPr wrap="square" lIns="0" rIns="0" tIns="0" bIns="0" anchor="ctr">
-            <a:spAutoFit/>
-          </a:bodyPr>
-          <a:lstStyle/>
-          <a:p>
-            <a:pPr algn="l">
-              <a:lnSpc>
-                <a:spcPct val="108000"/>
-              </a:lnSpc>
-              <a:spcBef>
-                <a:spcPts val="0"/>
-              </a:spcBef>
-              <a:spcAft>
-                <a:spcPts val="0"/>
-              </a:spcAft>
-              <a:defRPr sz="1700" b="0">
-                <a:solidFill>
-                  <a:srgbClr val="173047"/>
-                </a:solidFill>
-                <a:latin typeface="Arial"/>
-              </a:defRPr>
-            </a:pPr>
-            <a:r>
-              <a:t>EEG, mirada y pupila predicen esa etiqueta. GSR no entra al predictor. Atención es un objetivo secundario con otra etiqueta.</a:t>
-            </a:r>
-          </a:p>
-        </p:txBody>
-      </p:sp>
-      <p:sp>
-        <p:nvSpPr>
-          <p:cNvPr id="16" name="Rounded Rectangle 15"/>
+          <p:cNvPr id="14" name="Rectangle 13"/>
           <p:cNvSpPr/>
           <p:nvPr/>
         </p:nvSpPr>
         <p:spPr>
           <a:xfrm>
-            <a:off x="609600" y="4445000"/>
-            <a:ext cx="10972800" cy="736600"/>
-          </a:xfrm>
-          <a:prstGeom prst="roundRect">
+            <a:off x="6438900" y="1879600"/>
+            <a:ext cx="5143500" cy="63500"/>
+          </a:xfrm>
+          <a:prstGeom prst="rect">
             <a:avLst/>
           </a:prstGeom>
           <a:solidFill>
-            <a:srgbClr val="EAF3F4"/>
+            <a:srgbClr val="376B91"/>
           </a:solidFill>
           <a:ln>
             <a:noFill/>
@@ -5277,14 +5238,14 @@
       </p:sp>
       <p:sp>
         <p:nvSpPr>
-          <p:cNvPr id="17" name="TextBox 16"/>
+          <p:cNvPr id="15" name="TextBox 14"/>
           <p:cNvSpPr txBox="1"/>
           <p:nvPr/>
         </p:nvSpPr>
         <p:spPr>
           <a:xfrm>
-            <a:off x="825500" y="4508500"/>
-            <a:ext cx="10528300" cy="609600"/>
+            <a:off x="6680200" y="2095500"/>
+            <a:ext cx="4686300" cy="381000"/>
           </a:xfrm>
           <a:prstGeom prst="rect">
             <a:avLst/>
@@ -5299,7 +5260,185 @@
           <a:p>
             <a:pPr algn="l">
               <a:lnSpc>
-                <a:spcPct val="108000"/>
+                <a:spcPct val="104000"/>
+              </a:lnSpc>
+              <a:spcBef>
+                <a:spcPts val="0"/>
+              </a:spcBef>
+              <a:spcAft>
+                <a:spcPts val="0"/>
+              </a:spcAft>
+              <a:defRPr sz="1600" b="1">
+                <a:solidFill>
+                  <a:srgbClr val="376B91"/>
+                </a:solidFill>
+                <a:latin typeface="Aptos"/>
+              </a:defRPr>
+            </a:pPr>
+            <a:r>
+              <a:t>ESTUDIANTE · HACE LA PREDICCIÓN</a:t>
+            </a:r>
+          </a:p>
+        </p:txBody>
+      </p:sp>
+      <p:sp>
+        <p:nvSpPr>
+          <p:cNvPr id="16" name="TextBox 15"/>
+          <p:cNvSpPr txBox="1"/>
+          <p:nvPr/>
+        </p:nvSpPr>
+        <p:spPr>
+          <a:xfrm>
+            <a:off x="6680200" y="2565400"/>
+            <a:ext cx="4660900" cy="1409700"/>
+          </a:xfrm>
+          <a:prstGeom prst="rect">
+            <a:avLst/>
+          </a:prstGeom>
+          <a:noFill/>
+        </p:spPr>
+        <p:txBody>
+          <a:bodyPr wrap="square" lIns="0" rIns="0" tIns="0" bIns="0" anchor="ctr">
+            <a:spAutoFit/>
+          </a:bodyPr>
+          <a:lstStyle/>
+          <a:p>
+            <a:pPr algn="l">
+              <a:lnSpc>
+                <a:spcPct val="104000"/>
+              </a:lnSpc>
+              <a:spcBef>
+                <a:spcPts val="0"/>
+              </a:spcBef>
+              <a:spcAft>
+                <a:spcPts val="0"/>
+              </a:spcAft>
+              <a:defRPr sz="1700" b="0">
+                <a:solidFill>
+                  <a:srgbClr val="173348"/>
+                </a:solidFill>
+                <a:latin typeface="Aptos"/>
+              </a:defRPr>
+            </a:pPr>
+            <a:r>
+              <a:t>EEG, mirada y pupila predicen esa etiqueta. GSR no entra al predictor. Atención es un objetivo secundario con otra etiqueta.</a:t>
+            </a:r>
+          </a:p>
+        </p:txBody>
+      </p:sp>
+      <p:sp>
+        <p:nvSpPr>
+          <p:cNvPr id="17" name="Rounded Rectangle 16"/>
+          <p:cNvSpPr/>
+          <p:nvPr/>
+        </p:nvSpPr>
+        <p:spPr>
+          <a:xfrm>
+            <a:off x="609600" y="4445000"/>
+            <a:ext cx="10972800" cy="736600"/>
+          </a:xfrm>
+          <a:prstGeom prst="roundRect">
+            <a:avLst>
+              <a:gd name="adj" fmla="val 10000"/>
+            </a:avLst>
+          </a:prstGeom>
+          <a:solidFill>
+            <a:srgbClr val="F9EBE5"/>
+          </a:solidFill>
+          <a:ln>
+            <a:noFill/>
+          </a:ln>
+        </p:spPr>
+        <p:style>
+          <a:lnRef idx="1">
+            <a:schemeClr val="accent1"/>
+          </a:lnRef>
+          <a:fillRef idx="3">
+            <a:schemeClr val="accent1"/>
+          </a:fillRef>
+          <a:effectRef idx="2">
+            <a:schemeClr val="accent1"/>
+          </a:effectRef>
+          <a:fontRef idx="minor">
+            <a:schemeClr val="lt1"/>
+          </a:fontRef>
+        </p:style>
+        <p:txBody>
+          <a:bodyPr rtlCol="0" anchor="ctr"/>
+          <a:lstStyle/>
+          <a:p>
+            <a:pPr algn="ctr"/>
+          </a:p>
+        </p:txBody>
+      </p:sp>
+      <p:sp>
+        <p:nvSpPr>
+          <p:cNvPr id="18" name="Rectangle 17"/>
+          <p:cNvSpPr/>
+          <p:nvPr/>
+        </p:nvSpPr>
+        <p:spPr>
+          <a:xfrm>
+            <a:off x="609600" y="4445000"/>
+            <a:ext cx="63500" cy="736600"/>
+          </a:xfrm>
+          <a:prstGeom prst="rect">
+            <a:avLst/>
+          </a:prstGeom>
+          <a:solidFill>
+            <a:srgbClr val="C66A44"/>
+          </a:solidFill>
+          <a:ln>
+            <a:noFill/>
+          </a:ln>
+        </p:spPr>
+        <p:style>
+          <a:lnRef idx="1">
+            <a:schemeClr val="accent1"/>
+          </a:lnRef>
+          <a:fillRef idx="3">
+            <a:schemeClr val="accent1"/>
+          </a:fillRef>
+          <a:effectRef idx="2">
+            <a:schemeClr val="accent1"/>
+          </a:effectRef>
+          <a:fontRef idx="minor">
+            <a:schemeClr val="lt1"/>
+          </a:fontRef>
+        </p:style>
+        <p:txBody>
+          <a:bodyPr rtlCol="0" anchor="ctr"/>
+          <a:lstStyle/>
+          <a:p>
+            <a:pPr algn="ctr"/>
+          </a:p>
+        </p:txBody>
+      </p:sp>
+      <p:sp>
+        <p:nvSpPr>
+          <p:cNvPr id="19" name="TextBox 18"/>
+          <p:cNvSpPr txBox="1"/>
+          <p:nvPr/>
+        </p:nvSpPr>
+        <p:spPr>
+          <a:xfrm>
+            <a:off x="863600" y="4508500"/>
+            <a:ext cx="10464800" cy="609600"/>
+          </a:xfrm>
+          <a:prstGeom prst="rect">
+            <a:avLst/>
+          </a:prstGeom>
+          <a:noFill/>
+        </p:spPr>
+        <p:txBody>
+          <a:bodyPr wrap="square" lIns="0" rIns="0" tIns="0" bIns="0" anchor="ctr">
+            <a:spAutoFit/>
+          </a:bodyPr>
+          <a:lstStyle/>
+          <a:p>
+            <a:pPr algn="l">
+              <a:lnSpc>
+                <a:spcPct val="104000"/>
               </a:lnSpc>
               <a:spcBef>
                 <a:spcPts val="0"/>
@@ -5309,9 +5448,9 @@
               </a:spcAft>
               <a:defRPr sz="1700" b="1">
                 <a:solidFill>
-                  <a:srgbClr val="A45A22"/>
+                  <a:srgbClr val="C66A44"/>
                 </a:solidFill>
-                <a:latin typeface="Arial"/>
+                <a:latin typeface="Aptos"/>
               </a:defRPr>
             </a:pPr>
             <a:r>
@@ -5334,7 +5473,7 @@
     <p:bg>
       <p:bgPr>
         <a:solidFill>
-          <a:srgbClr val="FFFFFF"/>
+          <a:srgbClr val="F7F8F5"/>
         </a:solidFill>
         <a:effectLst/>
       </p:bgPr>
@@ -5355,13 +5494,13 @@
         <p:spPr>
           <a:xfrm>
             <a:off x="0" y="0"/>
-            <a:ext cx="12192000" cy="88900"/>
+            <a:ext cx="12192000" cy="76200"/>
           </a:xfrm>
           <a:prstGeom prst="rect">
             <a:avLst/>
           </a:prstGeom>
           <a:solidFill>
-            <a:srgbClr val="102B42"/>
+            <a:srgbClr val="087E83"/>
           </a:solidFill>
           <a:ln>
             <a:noFill/>
@@ -5413,7 +5552,7 @@
           <a:p>
             <a:pPr algn="l">
               <a:lnSpc>
-                <a:spcPct val="108000"/>
+                <a:spcPct val="104000"/>
               </a:lnSpc>
               <a:spcBef>
                 <a:spcPts val="0"/>
@@ -5423,13 +5562,13 @@
               </a:spcAft>
               <a:defRPr sz="1100" b="1">
                 <a:solidFill>
-                  <a:srgbClr val="087F86"/>
+                  <a:srgbClr val="087E83"/>
                 </a:solidFill>
-                <a:latin typeface="Arial"/>
+                <a:latin typeface="Aptos"/>
               </a:defRPr>
             </a:pPr>
             <a:r>
-              <a:t>MUESTRA, EVALUACIÓN Y LECTURA DE LA MÉTRICA</a:t>
+              <a:t>03  /  MUESTRA, EVALUACIÓN Y LECTURA DE LA MÉTRICA</a:t>
             </a:r>
           </a:p>
         </p:txBody>
@@ -5443,7 +5582,7 @@
         <p:spPr>
           <a:xfrm>
             <a:off x="609600" y="723900"/>
-            <a:ext cx="10972800" cy="939800"/>
+            <a:ext cx="10972800" cy="990600"/>
           </a:xfrm>
           <a:prstGeom prst="rect">
             <a:avLst/>
@@ -5458,7 +5597,7 @@
           <a:p>
             <a:pPr algn="l">
               <a:lnSpc>
-                <a:spcPct val="108000"/>
+                <a:spcPct val="104000"/>
               </a:lnSpc>
               <a:spcBef>
                 <a:spcPts val="0"/>
@@ -5466,11 +5605,11 @@
               <a:spcAft>
                 <a:spcPts val="0"/>
               </a:spcAft>
-              <a:defRPr sz="3000" b="1">
+              <a:defRPr sz="3200" b="1">
                 <a:solidFill>
-                  <a:srgbClr val="102B42"/>
+                  <a:srgbClr val="102A3D"/>
                 </a:solidFill>
-                <a:latin typeface="Arial"/>
+                <a:latin typeface="Aptos"/>
               </a:defRPr>
             </a:pPr>
             <a:r>
@@ -5487,14 +5626,14 @@
         </p:nvSpPr>
         <p:spPr>
           <a:xfrm>
-            <a:off x="609600" y="6096000"/>
+            <a:off x="609600" y="6134100"/>
             <a:ext cx="10972800" cy="12700"/>
           </a:xfrm>
           <a:prstGeom prst="rect">
             <a:avLst/>
           </a:prstGeom>
           <a:solidFill>
-            <a:srgbClr val="D4DFE5"/>
+            <a:srgbClr val="D9E2E3"/>
           </a:solidFill>
           <a:ln>
             <a:noFill/>
@@ -5524,110 +5663,20 @@
       </p:sp>
       <p:sp>
         <p:nvSpPr>
-          <p:cNvPr id="6" name="TextBox 5"/>
-          <p:cNvSpPr txBox="1"/>
-          <p:nvPr/>
-        </p:nvSpPr>
-        <p:spPr>
-          <a:xfrm>
-            <a:off x="609600" y="6197600"/>
-            <a:ext cx="10223500" cy="469900"/>
-          </a:xfrm>
-          <a:prstGeom prst="rect">
-            <a:avLst/>
-          </a:prstGeom>
-          <a:noFill/>
-        </p:spPr>
-        <p:txBody>
-          <a:bodyPr wrap="square" lIns="0" rIns="0" tIns="0" bIns="0" anchor="ctr">
-            <a:spAutoFit/>
-          </a:bodyPr>
-          <a:lstStyle/>
-          <a:p>
-            <a:pPr algn="l">
-              <a:lnSpc>
-                <a:spcPct val="108000"/>
-              </a:lnSpc>
-              <a:spcBef>
-                <a:spcPts val="0"/>
-              </a:spcBef>
-              <a:spcAft>
-                <a:spcPts val="0"/>
-              </a:spcAft>
-              <a:defRPr sz="900" b="0">
-                <a:solidFill>
-                  <a:srgbClr val="536675"/>
-                </a:solidFill>
-                <a:latin typeface="Arial"/>
-              </a:defRPr>
-            </a:pPr>
-            <a:r>
-              <a:t>Fuente: Evaluacion_Independiente_y_Validez_24-10-2026.md; protocolo de robustez</a:t>
-            </a:r>
-          </a:p>
-        </p:txBody>
-      </p:sp>
-      <p:sp>
-        <p:nvSpPr>
-          <p:cNvPr id="7" name="TextBox 6"/>
-          <p:cNvSpPr txBox="1"/>
-          <p:nvPr/>
-        </p:nvSpPr>
-        <p:spPr>
-          <a:xfrm>
-            <a:off x="10896600" y="6210300"/>
-            <a:ext cx="660400" cy="279400"/>
-          </a:xfrm>
-          <a:prstGeom prst="rect">
-            <a:avLst/>
-          </a:prstGeom>
-          <a:noFill/>
-        </p:spPr>
-        <p:txBody>
-          <a:bodyPr wrap="square" lIns="0" rIns="0" tIns="0" bIns="0" anchor="ctr">
-            <a:spAutoFit/>
-          </a:bodyPr>
-          <a:lstStyle/>
-          <a:p>
-            <a:pPr algn="r">
-              <a:lnSpc>
-                <a:spcPct val="108000"/>
-              </a:lnSpc>
-              <a:spcBef>
-                <a:spcPts val="0"/>
-              </a:spcBef>
-              <a:spcAft>
-                <a:spcPts val="0"/>
-              </a:spcAft>
-              <a:defRPr sz="1000" b="1">
-                <a:solidFill>
-                  <a:srgbClr val="536675"/>
-                </a:solidFill>
-                <a:latin typeface="Arial"/>
-              </a:defRPr>
-            </a:pPr>
-            <a:r>
-              <a:t>3 / 8</a:t>
-            </a:r>
-          </a:p>
-        </p:txBody>
-      </p:sp>
-      <p:sp>
-        <p:nvSpPr>
-          <p:cNvPr id="8" name="Rounded Rectangle 7"/>
+          <p:cNvPr id="6" name="Rectangle 5"/>
           <p:cNvSpPr/>
           <p:nvPr/>
         </p:nvSpPr>
         <p:spPr>
           <a:xfrm>
-            <a:off x="609600" y="1879600"/>
-            <a:ext cx="3302000" cy="1574800"/>
-          </a:xfrm>
-          <a:prstGeom prst="roundRect">
+            <a:off x="609600" y="6083300"/>
+            <a:ext cx="4114800" cy="38100"/>
+          </a:xfrm>
+          <a:prstGeom prst="rect">
             <a:avLst/>
           </a:prstGeom>
           <a:solidFill>
-            <a:srgbClr val="F7F9FB"/>
+            <a:srgbClr val="087E83"/>
           </a:solidFill>
           <a:ln>
             <a:noFill/>
@@ -5657,20 +5706,112 @@
       </p:sp>
       <p:sp>
         <p:nvSpPr>
-          <p:cNvPr id="9" name="Rectangle 8"/>
+          <p:cNvPr id="7" name="TextBox 6"/>
+          <p:cNvSpPr txBox="1"/>
+          <p:nvPr/>
+        </p:nvSpPr>
+        <p:spPr>
+          <a:xfrm>
+            <a:off x="609600" y="6235700"/>
+            <a:ext cx="10223500" cy="444500"/>
+          </a:xfrm>
+          <a:prstGeom prst="rect">
+            <a:avLst/>
+          </a:prstGeom>
+          <a:noFill/>
+        </p:spPr>
+        <p:txBody>
+          <a:bodyPr wrap="square" lIns="0" rIns="0" tIns="0" bIns="0" anchor="ctr">
+            <a:spAutoFit/>
+          </a:bodyPr>
+          <a:lstStyle/>
+          <a:p>
+            <a:pPr algn="l">
+              <a:lnSpc>
+                <a:spcPct val="104000"/>
+              </a:lnSpc>
+              <a:spcBef>
+                <a:spcPts val="0"/>
+              </a:spcBef>
+              <a:spcAft>
+                <a:spcPts val="0"/>
+              </a:spcAft>
+              <a:defRPr sz="900" b="0">
+                <a:solidFill>
+                  <a:srgbClr val="5D7180"/>
+                </a:solidFill>
+                <a:latin typeface="Aptos"/>
+              </a:defRPr>
+            </a:pPr>
+            <a:r>
+              <a:t>Fuente: Evaluacion_Independiente_y_Validez_24-10-2026.md; protocolo de robustez</a:t>
+            </a:r>
+          </a:p>
+        </p:txBody>
+      </p:sp>
+      <p:sp>
+        <p:nvSpPr>
+          <p:cNvPr id="8" name="TextBox 7"/>
+          <p:cNvSpPr txBox="1"/>
+          <p:nvPr/>
+        </p:nvSpPr>
+        <p:spPr>
+          <a:xfrm>
+            <a:off x="10820400" y="6235700"/>
+            <a:ext cx="736600" cy="279400"/>
+          </a:xfrm>
+          <a:prstGeom prst="rect">
+            <a:avLst/>
+          </a:prstGeom>
+          <a:noFill/>
+        </p:spPr>
+        <p:txBody>
+          <a:bodyPr wrap="square" lIns="0" rIns="0" tIns="0" bIns="0" anchor="ctr">
+            <a:spAutoFit/>
+          </a:bodyPr>
+          <a:lstStyle/>
+          <a:p>
+            <a:pPr algn="r">
+              <a:lnSpc>
+                <a:spcPct val="104000"/>
+              </a:lnSpc>
+              <a:spcBef>
+                <a:spcPts val="0"/>
+              </a:spcBef>
+              <a:spcAft>
+                <a:spcPts val="0"/>
+              </a:spcAft>
+              <a:defRPr sz="1000" b="1">
+                <a:solidFill>
+                  <a:srgbClr val="5D7180"/>
+                </a:solidFill>
+                <a:latin typeface="Aptos"/>
+              </a:defRPr>
+            </a:pPr>
+            <a:r>
+              <a:t>03 / 08</a:t>
+            </a:r>
+          </a:p>
+        </p:txBody>
+      </p:sp>
+      <p:sp>
+        <p:nvSpPr>
+          <p:cNvPr id="9" name="Rounded Rectangle 8"/>
           <p:cNvSpPr/>
           <p:nvPr/>
         </p:nvSpPr>
         <p:spPr>
           <a:xfrm>
             <a:off x="609600" y="1879600"/>
-            <a:ext cx="63500" cy="1574800"/>
-          </a:xfrm>
-          <a:prstGeom prst="rect">
-            <a:avLst/>
+            <a:ext cx="3302000" cy="2413000"/>
+          </a:xfrm>
+          <a:prstGeom prst="roundRect">
+            <a:avLst>
+              <a:gd name="adj" fmla="val 10000"/>
+            </a:avLst>
           </a:prstGeom>
           <a:solidFill>
-            <a:srgbClr val="087F86"/>
+            <a:srgbClr val="FFFFFF"/>
           </a:solidFill>
           <a:ln>
             <a:noFill/>
@@ -5700,110 +5841,20 @@
       </p:sp>
       <p:sp>
         <p:nvSpPr>
-          <p:cNvPr id="10" name="TextBox 9"/>
-          <p:cNvSpPr txBox="1"/>
-          <p:nvPr/>
-        </p:nvSpPr>
-        <p:spPr>
-          <a:xfrm>
-            <a:off x="850900" y="1981200"/>
-            <a:ext cx="2844800" cy="355600"/>
-          </a:xfrm>
-          <a:prstGeom prst="rect">
-            <a:avLst/>
-          </a:prstGeom>
-          <a:noFill/>
-        </p:spPr>
-        <p:txBody>
-          <a:bodyPr wrap="square" lIns="0" rIns="0" tIns="0" bIns="0" anchor="ctr">
-            <a:spAutoFit/>
-          </a:bodyPr>
-          <a:lstStyle/>
-          <a:p>
-            <a:pPr algn="l">
-              <a:lnSpc>
-                <a:spcPct val="108000"/>
-              </a:lnSpc>
-              <a:spcBef>
-                <a:spcPts val="0"/>
-              </a:spcBef>
-              <a:spcAft>
-                <a:spcPts val="0"/>
-              </a:spcAft>
-              <a:defRPr sz="1600" b="1">
-                <a:solidFill>
-                  <a:srgbClr val="087F86"/>
-                </a:solidFill>
-                <a:latin typeface="Arial"/>
-              </a:defRPr>
-            </a:pPr>
-            <a:r>
-              <a:t>TRAIN · 25 PERSONAS</a:t>
-            </a:r>
-          </a:p>
-        </p:txBody>
-      </p:sp>
-      <p:sp>
-        <p:nvSpPr>
-          <p:cNvPr id="11" name="TextBox 10"/>
-          <p:cNvSpPr txBox="1"/>
-          <p:nvPr/>
-        </p:nvSpPr>
-        <p:spPr>
-          <a:xfrm>
-            <a:off x="850900" y="2374900"/>
-            <a:ext cx="2819400" cy="1016000"/>
-          </a:xfrm>
-          <a:prstGeom prst="rect">
-            <a:avLst/>
-          </a:prstGeom>
-          <a:noFill/>
-        </p:spPr>
-        <p:txBody>
-          <a:bodyPr wrap="square" lIns="0" rIns="0" tIns="0" bIns="0" anchor="ctr">
-            <a:spAutoFit/>
-          </a:bodyPr>
-          <a:lstStyle/>
-          <a:p>
-            <a:pPr algn="l">
-              <a:lnSpc>
-                <a:spcPct val="108000"/>
-              </a:lnSpc>
-              <a:spcBef>
-                <a:spcPts val="0"/>
-              </a:spcBef>
-              <a:spcAft>
-                <a:spcPts val="0"/>
-              </a:spcAft>
-              <a:defRPr sz="1500" b="0">
-                <a:solidFill>
-                  <a:srgbClr val="173047"/>
-                </a:solidFill>
-                <a:latin typeface="Arial"/>
-              </a:defRPr>
-            </a:pPr>
-            <a:r>
-              <a:t>13.524 ventanas. Cinco folds; cada persona se predice fuera del fold donde se ajustó el modelo.</a:t>
-            </a:r>
-          </a:p>
-        </p:txBody>
-      </p:sp>
-      <p:sp>
-        <p:nvSpPr>
-          <p:cNvPr id="12" name="Rounded Rectangle 11"/>
+          <p:cNvPr id="10" name="Rectangle 9"/>
           <p:cNvSpPr/>
           <p:nvPr/>
         </p:nvSpPr>
         <p:spPr>
           <a:xfrm>
-            <a:off x="4140200" y="1879600"/>
-            <a:ext cx="3302000" cy="1574800"/>
-          </a:xfrm>
-          <a:prstGeom prst="roundRect">
+            <a:off x="609600" y="1879600"/>
+            <a:ext cx="3302000" cy="76200"/>
+          </a:xfrm>
+          <a:prstGeom prst="rect">
             <a:avLst/>
           </a:prstGeom>
           <a:solidFill>
-            <a:srgbClr val="F7F9FB"/>
+            <a:srgbClr val="087E83"/>
           </a:solidFill>
           <a:ln>
             <a:noFill/>
@@ -5833,20 +5884,157 @@
       </p:sp>
       <p:sp>
         <p:nvSpPr>
-          <p:cNvPr id="13" name="Rectangle 12"/>
+          <p:cNvPr id="11" name="TextBox 10"/>
+          <p:cNvSpPr txBox="1"/>
+          <p:nvPr/>
+        </p:nvSpPr>
+        <p:spPr>
+          <a:xfrm>
+            <a:off x="838200" y="2120900"/>
+            <a:ext cx="2844800" cy="304800"/>
+          </a:xfrm>
+          <a:prstGeom prst="rect">
+            <a:avLst/>
+          </a:prstGeom>
+          <a:noFill/>
+        </p:spPr>
+        <p:txBody>
+          <a:bodyPr wrap="square" lIns="0" rIns="0" tIns="0" bIns="0" anchor="ctr">
+            <a:spAutoFit/>
+          </a:bodyPr>
+          <a:lstStyle/>
+          <a:p>
+            <a:pPr algn="l">
+              <a:lnSpc>
+                <a:spcPct val="104000"/>
+              </a:lnSpc>
+              <a:spcBef>
+                <a:spcPts val="0"/>
+              </a:spcBef>
+              <a:spcAft>
+                <a:spcPts val="0"/>
+              </a:spcAft>
+              <a:defRPr sz="1300" b="1">
+                <a:solidFill>
+                  <a:srgbClr val="087E83"/>
+                </a:solidFill>
+                <a:latin typeface="Aptos"/>
+              </a:defRPr>
+            </a:pPr>
+            <a:r>
+              <a:t>TRAIN</a:t>
+            </a:r>
+          </a:p>
+        </p:txBody>
+      </p:sp>
+      <p:sp>
+        <p:nvSpPr>
+          <p:cNvPr id="12" name="TextBox 11"/>
+          <p:cNvSpPr txBox="1"/>
+          <p:nvPr/>
+        </p:nvSpPr>
+        <p:spPr>
+          <a:xfrm>
+            <a:off x="812800" y="2501900"/>
+            <a:ext cx="2895600" cy="939800"/>
+          </a:xfrm>
+          <a:prstGeom prst="rect">
+            <a:avLst/>
+          </a:prstGeom>
+          <a:noFill/>
+        </p:spPr>
+        <p:txBody>
+          <a:bodyPr wrap="square" lIns="0" rIns="0" tIns="0" bIns="0" anchor="ctr">
+            <a:spAutoFit/>
+          </a:bodyPr>
+          <a:lstStyle/>
+          <a:p>
+            <a:pPr algn="l">
+              <a:lnSpc>
+                <a:spcPct val="104000"/>
+              </a:lnSpc>
+              <a:spcBef>
+                <a:spcPts val="0"/>
+              </a:spcBef>
+              <a:spcAft>
+                <a:spcPts val="0"/>
+              </a:spcAft>
+              <a:defRPr sz="5800" b="1">
+                <a:solidFill>
+                  <a:srgbClr val="102A3D"/>
+                </a:solidFill>
+                <a:latin typeface="Aptos"/>
+              </a:defRPr>
+            </a:pPr>
+            <a:r>
+              <a:t>25</a:t>
+            </a:r>
+          </a:p>
+        </p:txBody>
+      </p:sp>
+      <p:sp>
+        <p:nvSpPr>
+          <p:cNvPr id="13" name="TextBox 12"/>
+          <p:cNvSpPr txBox="1"/>
+          <p:nvPr/>
+        </p:nvSpPr>
+        <p:spPr>
+          <a:xfrm>
+            <a:off x="838200" y="3619500"/>
+            <a:ext cx="2844800" cy="482600"/>
+          </a:xfrm>
+          <a:prstGeom prst="rect">
+            <a:avLst/>
+          </a:prstGeom>
+          <a:noFill/>
+        </p:spPr>
+        <p:txBody>
+          <a:bodyPr wrap="square" lIns="0" rIns="0" tIns="0" bIns="0" anchor="ctr">
+            <a:spAutoFit/>
+          </a:bodyPr>
+          <a:lstStyle/>
+          <a:p>
+            <a:pPr algn="l">
+              <a:lnSpc>
+                <a:spcPct val="104000"/>
+              </a:lnSpc>
+              <a:spcBef>
+                <a:spcPts val="0"/>
+              </a:spcBef>
+              <a:spcAft>
+                <a:spcPts val="0"/>
+              </a:spcAft>
+              <a:defRPr sz="1500" b="0">
+                <a:solidFill>
+                  <a:srgbClr val="5D7180"/>
+                </a:solidFill>
+                <a:latin typeface="Aptos"/>
+              </a:defRPr>
+            </a:pPr>
+            <a:r>
+              <a:t>13.524 ventanas · 5 folds</a:t>
+            </a:r>
+          </a:p>
+        </p:txBody>
+      </p:sp>
+      <p:sp>
+        <p:nvSpPr>
+          <p:cNvPr id="14" name="Rounded Rectangle 13"/>
           <p:cNvSpPr/>
           <p:nvPr/>
         </p:nvSpPr>
         <p:spPr>
           <a:xfrm>
             <a:off x="4140200" y="1879600"/>
-            <a:ext cx="63500" cy="1574800"/>
-          </a:xfrm>
-          <a:prstGeom prst="rect">
-            <a:avLst/>
+            <a:ext cx="3302000" cy="2413000"/>
+          </a:xfrm>
+          <a:prstGeom prst="roundRect">
+            <a:avLst>
+              <a:gd name="adj" fmla="val 10000"/>
+            </a:avLst>
           </a:prstGeom>
           <a:solidFill>
-            <a:srgbClr val="215C80"/>
+            <a:srgbClr val="FFFFFF"/>
           </a:solidFill>
           <a:ln>
             <a:noFill/>
@@ -5876,110 +6064,20 @@
       </p:sp>
       <p:sp>
         <p:nvSpPr>
-          <p:cNvPr id="14" name="TextBox 13"/>
-          <p:cNvSpPr txBox="1"/>
-          <p:nvPr/>
-        </p:nvSpPr>
-        <p:spPr>
-          <a:xfrm>
-            <a:off x="4381500" y="1981200"/>
-            <a:ext cx="2844800" cy="355600"/>
-          </a:xfrm>
-          <a:prstGeom prst="rect">
-            <a:avLst/>
-          </a:prstGeom>
-          <a:noFill/>
-        </p:spPr>
-        <p:txBody>
-          <a:bodyPr wrap="square" lIns="0" rIns="0" tIns="0" bIns="0" anchor="ctr">
-            <a:spAutoFit/>
-          </a:bodyPr>
-          <a:lstStyle/>
-          <a:p>
-            <a:pPr algn="l">
-              <a:lnSpc>
-                <a:spcPct val="108000"/>
-              </a:lnSpc>
-              <a:spcBef>
-                <a:spcPts val="0"/>
-              </a:spcBef>
-              <a:spcAft>
-                <a:spcPts val="0"/>
-              </a:spcAft>
-              <a:defRPr sz="1600" b="1">
-                <a:solidFill>
-                  <a:srgbClr val="215C80"/>
-                </a:solidFill>
-                <a:latin typeface="Arial"/>
-              </a:defRPr>
-            </a:pPr>
-            <a:r>
-              <a:t>VALIDATION · 8</a:t>
-            </a:r>
-          </a:p>
-        </p:txBody>
-      </p:sp>
-      <p:sp>
-        <p:nvSpPr>
-          <p:cNvPr id="15" name="TextBox 14"/>
-          <p:cNvSpPr txBox="1"/>
-          <p:nvPr/>
-        </p:nvSpPr>
-        <p:spPr>
-          <a:xfrm>
-            <a:off x="4381500" y="2374900"/>
-            <a:ext cx="2819400" cy="1016000"/>
-          </a:xfrm>
-          <a:prstGeom prst="rect">
-            <a:avLst/>
-          </a:prstGeom>
-          <a:noFill/>
-        </p:spPr>
-        <p:txBody>
-          <a:bodyPr wrap="square" lIns="0" rIns="0" tIns="0" bIns="0" anchor="ctr">
-            <a:spAutoFit/>
-          </a:bodyPr>
-          <a:lstStyle/>
-          <a:p>
-            <a:pPr algn="l">
-              <a:lnSpc>
-                <a:spcPct val="108000"/>
-              </a:lnSpc>
-              <a:spcBef>
-                <a:spcPts val="0"/>
-              </a:spcBef>
-              <a:spcAft>
-                <a:spcPts val="0"/>
-              </a:spcAft>
-              <a:defRPr sz="1600" b="0">
-                <a:solidFill>
-                  <a:srgbClr val="173047"/>
-                </a:solidFill>
-                <a:latin typeface="Arial"/>
-              </a:defRPr>
-            </a:pPr>
-            <a:r>
-              <a:t>Ya se usó para comparar entradas en rondas anteriores.</a:t>
-            </a:r>
-          </a:p>
-        </p:txBody>
-      </p:sp>
-      <p:sp>
-        <p:nvSpPr>
-          <p:cNvPr id="16" name="Rounded Rectangle 15"/>
+          <p:cNvPr id="15" name="Rectangle 14"/>
           <p:cNvSpPr/>
           <p:nvPr/>
         </p:nvSpPr>
         <p:spPr>
           <a:xfrm>
-            <a:off x="7670800" y="1879600"/>
-            <a:ext cx="3911600" cy="1574800"/>
-          </a:xfrm>
-          <a:prstGeom prst="roundRect">
+            <a:off x="4140200" y="1879600"/>
+            <a:ext cx="3302000" cy="76200"/>
+          </a:xfrm>
+          <a:prstGeom prst="rect">
             <a:avLst/>
           </a:prstGeom>
           <a:solidFill>
-            <a:srgbClr val="F7F9FB"/>
+            <a:srgbClr val="376B91"/>
           </a:solidFill>
           <a:ln>
             <a:noFill/>
@@ -6009,20 +6107,157 @@
       </p:sp>
       <p:sp>
         <p:nvSpPr>
-          <p:cNvPr id="17" name="Rectangle 16"/>
+          <p:cNvPr id="16" name="TextBox 15"/>
+          <p:cNvSpPr txBox="1"/>
+          <p:nvPr/>
+        </p:nvSpPr>
+        <p:spPr>
+          <a:xfrm>
+            <a:off x="4368800" y="2120900"/>
+            <a:ext cx="2844800" cy="304800"/>
+          </a:xfrm>
+          <a:prstGeom prst="rect">
+            <a:avLst/>
+          </a:prstGeom>
+          <a:noFill/>
+        </p:spPr>
+        <p:txBody>
+          <a:bodyPr wrap="square" lIns="0" rIns="0" tIns="0" bIns="0" anchor="ctr">
+            <a:spAutoFit/>
+          </a:bodyPr>
+          <a:lstStyle/>
+          <a:p>
+            <a:pPr algn="l">
+              <a:lnSpc>
+                <a:spcPct val="104000"/>
+              </a:lnSpc>
+              <a:spcBef>
+                <a:spcPts val="0"/>
+              </a:spcBef>
+              <a:spcAft>
+                <a:spcPts val="0"/>
+              </a:spcAft>
+              <a:defRPr sz="1300" b="1">
+                <a:solidFill>
+                  <a:srgbClr val="376B91"/>
+                </a:solidFill>
+                <a:latin typeface="Aptos"/>
+              </a:defRPr>
+            </a:pPr>
+            <a:r>
+              <a:t>VALIDATION</a:t>
+            </a:r>
+          </a:p>
+        </p:txBody>
+      </p:sp>
+      <p:sp>
+        <p:nvSpPr>
+          <p:cNvPr id="17" name="TextBox 16"/>
+          <p:cNvSpPr txBox="1"/>
+          <p:nvPr/>
+        </p:nvSpPr>
+        <p:spPr>
+          <a:xfrm>
+            <a:off x="4343400" y="2501900"/>
+            <a:ext cx="2895600" cy="939800"/>
+          </a:xfrm>
+          <a:prstGeom prst="rect">
+            <a:avLst/>
+          </a:prstGeom>
+          <a:noFill/>
+        </p:spPr>
+        <p:txBody>
+          <a:bodyPr wrap="square" lIns="0" rIns="0" tIns="0" bIns="0" anchor="ctr">
+            <a:spAutoFit/>
+          </a:bodyPr>
+          <a:lstStyle/>
+          <a:p>
+            <a:pPr algn="l">
+              <a:lnSpc>
+                <a:spcPct val="104000"/>
+              </a:lnSpc>
+              <a:spcBef>
+                <a:spcPts val="0"/>
+              </a:spcBef>
+              <a:spcAft>
+                <a:spcPts val="0"/>
+              </a:spcAft>
+              <a:defRPr sz="5800" b="1">
+                <a:solidFill>
+                  <a:srgbClr val="102A3D"/>
+                </a:solidFill>
+                <a:latin typeface="Aptos"/>
+              </a:defRPr>
+            </a:pPr>
+            <a:r>
+              <a:t>8</a:t>
+            </a:r>
+          </a:p>
+        </p:txBody>
+      </p:sp>
+      <p:sp>
+        <p:nvSpPr>
+          <p:cNvPr id="18" name="TextBox 17"/>
+          <p:cNvSpPr txBox="1"/>
+          <p:nvPr/>
+        </p:nvSpPr>
+        <p:spPr>
+          <a:xfrm>
+            <a:off x="4368800" y="3619500"/>
+            <a:ext cx="2844800" cy="482600"/>
+          </a:xfrm>
+          <a:prstGeom prst="rect">
+            <a:avLst/>
+          </a:prstGeom>
+          <a:noFill/>
+        </p:spPr>
+        <p:txBody>
+          <a:bodyPr wrap="square" lIns="0" rIns="0" tIns="0" bIns="0" anchor="ctr">
+            <a:spAutoFit/>
+          </a:bodyPr>
+          <a:lstStyle/>
+          <a:p>
+            <a:pPr algn="l">
+              <a:lnSpc>
+                <a:spcPct val="104000"/>
+              </a:lnSpc>
+              <a:spcBef>
+                <a:spcPts val="0"/>
+              </a:spcBef>
+              <a:spcAft>
+                <a:spcPts val="0"/>
+              </a:spcAft>
+              <a:defRPr sz="1500" b="0">
+                <a:solidFill>
+                  <a:srgbClr val="5D7180"/>
+                </a:solidFill>
+                <a:latin typeface="Aptos"/>
+              </a:defRPr>
+            </a:pPr>
+            <a:r>
+              <a:t>Ya usada para comparar entradas</a:t>
+            </a:r>
+          </a:p>
+        </p:txBody>
+      </p:sp>
+      <p:sp>
+        <p:nvSpPr>
+          <p:cNvPr id="19" name="Rounded Rectangle 18"/>
           <p:cNvSpPr/>
           <p:nvPr/>
         </p:nvSpPr>
         <p:spPr>
           <a:xfrm>
             <a:off x="7670800" y="1879600"/>
-            <a:ext cx="63500" cy="1574800"/>
-          </a:xfrm>
-          <a:prstGeom prst="rect">
-            <a:avLst/>
+            <a:ext cx="3911600" cy="2413000"/>
+          </a:xfrm>
+          <a:prstGeom prst="roundRect">
+            <a:avLst>
+              <a:gd name="adj" fmla="val 10000"/>
+            </a:avLst>
           </a:prstGeom>
           <a:solidFill>
-            <a:srgbClr val="A45A22"/>
+            <a:srgbClr val="FFFFFF"/>
           </a:solidFill>
           <a:ln>
             <a:noFill/>
@@ -6052,110 +6287,20 @@
       </p:sp>
       <p:sp>
         <p:nvSpPr>
-          <p:cNvPr id="18" name="TextBox 17"/>
-          <p:cNvSpPr txBox="1"/>
-          <p:nvPr/>
-        </p:nvSpPr>
-        <p:spPr>
-          <a:xfrm>
-            <a:off x="7912100" y="1981200"/>
-            <a:ext cx="3454400" cy="355600"/>
-          </a:xfrm>
-          <a:prstGeom prst="rect">
-            <a:avLst/>
-          </a:prstGeom>
-          <a:noFill/>
-        </p:spPr>
-        <p:txBody>
-          <a:bodyPr wrap="square" lIns="0" rIns="0" tIns="0" bIns="0" anchor="ctr">
-            <a:spAutoFit/>
-          </a:bodyPr>
-          <a:lstStyle/>
-          <a:p>
-            <a:pPr algn="l">
-              <a:lnSpc>
-                <a:spcPct val="108000"/>
-              </a:lnSpc>
-              <a:spcBef>
-                <a:spcPts val="0"/>
-              </a:spcBef>
-              <a:spcAft>
-                <a:spcPts val="0"/>
-              </a:spcAft>
-              <a:defRPr sz="1600" b="1">
-                <a:solidFill>
-                  <a:srgbClr val="A45A22"/>
-                </a:solidFill>
-                <a:latin typeface="Arial"/>
-              </a:defRPr>
-            </a:pPr>
-            <a:r>
-              <a:t>TEST · 8 PERSONAS</a:t>
-            </a:r>
-          </a:p>
-        </p:txBody>
-      </p:sp>
-      <p:sp>
-        <p:nvSpPr>
-          <p:cNvPr id="19" name="TextBox 18"/>
-          <p:cNvSpPr txBox="1"/>
-          <p:nvPr/>
-        </p:nvSpPr>
-        <p:spPr>
-          <a:xfrm>
-            <a:off x="7912100" y="2374900"/>
-            <a:ext cx="3429000" cy="1016000"/>
-          </a:xfrm>
-          <a:prstGeom prst="rect">
-            <a:avLst/>
-          </a:prstGeom>
-          <a:noFill/>
-        </p:spPr>
-        <p:txBody>
-          <a:bodyPr wrap="square" lIns="0" rIns="0" tIns="0" bIns="0" anchor="ctr">
-            <a:spAutoFit/>
-          </a:bodyPr>
-          <a:lstStyle/>
-          <a:p>
-            <a:pPr algn="l">
-              <a:lnSpc>
-                <a:spcPct val="108000"/>
-              </a:lnSpc>
-              <a:spcBef>
-                <a:spcPts val="0"/>
-              </a:spcBef>
-              <a:spcAft>
-                <a:spcPts val="0"/>
-              </a:spcAft>
-              <a:defRPr sz="1500" b="0">
-                <a:solidFill>
-                  <a:srgbClr val="173047"/>
-                </a:solidFill>
-                <a:latin typeface="Arial"/>
-              </a:defRPr>
-            </a:pPr>
-            <a:r>
-              <a:t>4.025 ventanas. Ya consultado: evaluación adicional, sin confirmación independiente.</a:t>
-            </a:r>
-          </a:p>
-        </p:txBody>
-      </p:sp>
-      <p:sp>
-        <p:nvSpPr>
-          <p:cNvPr id="20" name="Rounded Rectangle 19"/>
+          <p:cNvPr id="20" name="Rectangle 19"/>
           <p:cNvSpPr/>
           <p:nvPr/>
         </p:nvSpPr>
         <p:spPr>
           <a:xfrm>
-            <a:off x="609600" y="3708400"/>
-            <a:ext cx="10972800" cy="1206500"/>
-          </a:xfrm>
-          <a:prstGeom prst="roundRect">
+            <a:off x="7670800" y="1879600"/>
+            <a:ext cx="3911600" cy="76200"/>
+          </a:xfrm>
+          <a:prstGeom prst="rect">
             <a:avLst/>
           </a:prstGeom>
           <a:solidFill>
-            <a:srgbClr val="F7F9FB"/>
+            <a:srgbClr val="C66A44"/>
           </a:solidFill>
           <a:ln>
             <a:noFill/>
@@ -6185,20 +6330,157 @@
       </p:sp>
       <p:sp>
         <p:nvSpPr>
-          <p:cNvPr id="21" name="Rectangle 20"/>
+          <p:cNvPr id="21" name="TextBox 20"/>
+          <p:cNvSpPr txBox="1"/>
+          <p:nvPr/>
+        </p:nvSpPr>
+        <p:spPr>
+          <a:xfrm>
+            <a:off x="7899400" y="2120900"/>
+            <a:ext cx="3454400" cy="304800"/>
+          </a:xfrm>
+          <a:prstGeom prst="rect">
+            <a:avLst/>
+          </a:prstGeom>
+          <a:noFill/>
+        </p:spPr>
+        <p:txBody>
+          <a:bodyPr wrap="square" lIns="0" rIns="0" tIns="0" bIns="0" anchor="ctr">
+            <a:spAutoFit/>
+          </a:bodyPr>
+          <a:lstStyle/>
+          <a:p>
+            <a:pPr algn="l">
+              <a:lnSpc>
+                <a:spcPct val="104000"/>
+              </a:lnSpc>
+              <a:spcBef>
+                <a:spcPts val="0"/>
+              </a:spcBef>
+              <a:spcAft>
+                <a:spcPts val="0"/>
+              </a:spcAft>
+              <a:defRPr sz="1300" b="1">
+                <a:solidFill>
+                  <a:srgbClr val="C66A44"/>
+                </a:solidFill>
+                <a:latin typeface="Aptos"/>
+              </a:defRPr>
+            </a:pPr>
+            <a:r>
+              <a:t>TEST</a:t>
+            </a:r>
+          </a:p>
+        </p:txBody>
+      </p:sp>
+      <p:sp>
+        <p:nvSpPr>
+          <p:cNvPr id="22" name="TextBox 21"/>
+          <p:cNvSpPr txBox="1"/>
+          <p:nvPr/>
+        </p:nvSpPr>
+        <p:spPr>
+          <a:xfrm>
+            <a:off x="7874000" y="2501900"/>
+            <a:ext cx="3505200" cy="939800"/>
+          </a:xfrm>
+          <a:prstGeom prst="rect">
+            <a:avLst/>
+          </a:prstGeom>
+          <a:noFill/>
+        </p:spPr>
+        <p:txBody>
+          <a:bodyPr wrap="square" lIns="0" rIns="0" tIns="0" bIns="0" anchor="ctr">
+            <a:spAutoFit/>
+          </a:bodyPr>
+          <a:lstStyle/>
+          <a:p>
+            <a:pPr algn="l">
+              <a:lnSpc>
+                <a:spcPct val="104000"/>
+              </a:lnSpc>
+              <a:spcBef>
+                <a:spcPts val="0"/>
+              </a:spcBef>
+              <a:spcAft>
+                <a:spcPts val="0"/>
+              </a:spcAft>
+              <a:defRPr sz="5800" b="1">
+                <a:solidFill>
+                  <a:srgbClr val="102A3D"/>
+                </a:solidFill>
+                <a:latin typeface="Aptos"/>
+              </a:defRPr>
+            </a:pPr>
+            <a:r>
+              <a:t>8</a:t>
+            </a:r>
+          </a:p>
+        </p:txBody>
+      </p:sp>
+      <p:sp>
+        <p:nvSpPr>
+          <p:cNvPr id="23" name="TextBox 22"/>
+          <p:cNvSpPr txBox="1"/>
+          <p:nvPr/>
+        </p:nvSpPr>
+        <p:spPr>
+          <a:xfrm>
+            <a:off x="7899400" y="3619500"/>
+            <a:ext cx="3454400" cy="482600"/>
+          </a:xfrm>
+          <a:prstGeom prst="rect">
+            <a:avLst/>
+          </a:prstGeom>
+          <a:noFill/>
+        </p:spPr>
+        <p:txBody>
+          <a:bodyPr wrap="square" lIns="0" rIns="0" tIns="0" bIns="0" anchor="ctr">
+            <a:spAutoFit/>
+          </a:bodyPr>
+          <a:lstStyle/>
+          <a:p>
+            <a:pPr algn="l">
+              <a:lnSpc>
+                <a:spcPct val="104000"/>
+              </a:lnSpc>
+              <a:spcBef>
+                <a:spcPts val="0"/>
+              </a:spcBef>
+              <a:spcAft>
+                <a:spcPts val="0"/>
+              </a:spcAft>
+              <a:defRPr sz="1500" b="0">
+                <a:solidFill>
+                  <a:srgbClr val="5D7180"/>
+                </a:solidFill>
+                <a:latin typeface="Aptos"/>
+              </a:defRPr>
+            </a:pPr>
+            <a:r>
+              <a:t>4.025 ventanas · ya consultado</a:t>
+            </a:r>
+          </a:p>
+        </p:txBody>
+      </p:sp>
+      <p:sp>
+        <p:nvSpPr>
+          <p:cNvPr id="24" name="Rounded Rectangle 23"/>
           <p:cNvSpPr/>
           <p:nvPr/>
         </p:nvSpPr>
         <p:spPr>
           <a:xfrm>
-            <a:off x="609600" y="3708400"/>
-            <a:ext cx="63500" cy="1206500"/>
-          </a:xfrm>
-          <a:prstGeom prst="rect">
-            <a:avLst/>
+            <a:off x="609600" y="4521200"/>
+            <a:ext cx="10972800" cy="1155700"/>
+          </a:xfrm>
+          <a:prstGeom prst="roundRect">
+            <a:avLst>
+              <a:gd name="adj" fmla="val 10000"/>
+            </a:avLst>
           </a:prstGeom>
           <a:solidFill>
-            <a:srgbClr val="087F86"/>
+            <a:srgbClr val="102A3D"/>
           </a:solidFill>
           <a:ln>
             <a:noFill/>
@@ -6228,14 +6510,14 @@
       </p:sp>
       <p:sp>
         <p:nvSpPr>
-          <p:cNvPr id="22" name="TextBox 21"/>
+          <p:cNvPr id="25" name="TextBox 24"/>
           <p:cNvSpPr txBox="1"/>
           <p:nvPr/>
         </p:nvSpPr>
         <p:spPr>
           <a:xfrm>
-            <a:off x="850900" y="3810000"/>
-            <a:ext cx="10515600" cy="355600"/>
+            <a:off x="863600" y="4660900"/>
+            <a:ext cx="9779000" cy="393700"/>
           </a:xfrm>
           <a:prstGeom prst="rect">
             <a:avLst/>
@@ -6250,7 +6532,7 @@
           <a:p>
             <a:pPr algn="l">
               <a:lnSpc>
-                <a:spcPct val="108000"/>
+                <a:spcPct val="104000"/>
               </a:lnSpc>
               <a:spcBef>
                 <a:spcPts val="0"/>
@@ -6258,29 +6540,29 @@
               <a:spcAft>
                 <a:spcPts val="0"/>
               </a:spcAft>
-              <a:defRPr sz="1600" b="1">
+              <a:defRPr sz="2000" b="1">
                 <a:solidFill>
-                  <a:srgbClr val="087F86"/>
+                  <a:srgbClr val="FFFFFF"/>
                 </a:solidFill>
-                <a:latin typeface="Arial"/>
+                <a:latin typeface="Aptos"/>
               </a:defRPr>
             </a:pPr>
             <a:r>
-              <a:t>BA MACRO POR PERSONA</a:t>
-            </a:r>
-          </a:p>
-        </p:txBody>
-      </p:sp>
-      <p:sp>
-        <p:nvSpPr>
-          <p:cNvPr id="23" name="TextBox 22"/>
+              <a:t>BA macro por persona</a:t>
+            </a:r>
+          </a:p>
+        </p:txBody>
+      </p:sp>
+      <p:sp>
+        <p:nvSpPr>
+          <p:cNvPr id="26" name="TextBox 25"/>
           <p:cNvSpPr txBox="1"/>
           <p:nvPr/>
         </p:nvSpPr>
         <p:spPr>
           <a:xfrm>
-            <a:off x="850900" y="4203700"/>
-            <a:ext cx="10490200" cy="647700"/>
+            <a:off x="863600" y="5092700"/>
+            <a:ext cx="10096500" cy="419100"/>
           </a:xfrm>
           <a:prstGeom prst="rect">
             <a:avLst/>
@@ -6295,7 +6577,7 @@
           <a:p>
             <a:pPr algn="l">
               <a:lnSpc>
-                <a:spcPct val="108000"/>
+                <a:spcPct val="104000"/>
               </a:lnSpc>
               <a:spcBef>
                 <a:spcPts val="0"/>
@@ -6303,103 +6585,15 @@
               <a:spcAft>
                 <a:spcPts val="0"/>
               </a:spcAft>
-              <a:defRPr sz="1700" b="0">
+              <a:defRPr sz="1600" b="0">
                 <a:solidFill>
-                  <a:srgbClr val="173047"/>
+                  <a:srgbClr val="DDF0ED"/>
                 </a:solidFill>
-                <a:latin typeface="Arial"/>
+                <a:latin typeface="Aptos"/>
               </a:defRPr>
             </a:pPr>
             <a:r>
-              <a:t>Para cada persona se promedia el recall de las clases presentes; luego se promedian las personas con igual peso.</a:t>
-            </a:r>
-          </a:p>
-        </p:txBody>
-      </p:sp>
-      <p:sp>
-        <p:nvSpPr>
-          <p:cNvPr id="24" name="Rounded Rectangle 23"/>
-          <p:cNvSpPr/>
-          <p:nvPr/>
-        </p:nvSpPr>
-        <p:spPr>
-          <a:xfrm>
-            <a:off x="609600" y="5105400"/>
-            <a:ext cx="10972800" cy="736600"/>
-          </a:xfrm>
-          <a:prstGeom prst="roundRect">
-            <a:avLst/>
-          </a:prstGeom>
-          <a:solidFill>
-            <a:srgbClr val="EAF3F4"/>
-          </a:solidFill>
-          <a:ln>
-            <a:noFill/>
-          </a:ln>
-        </p:spPr>
-        <p:style>
-          <a:lnRef idx="1">
-            <a:schemeClr val="accent1"/>
-          </a:lnRef>
-          <a:fillRef idx="3">
-            <a:schemeClr val="accent1"/>
-          </a:fillRef>
-          <a:effectRef idx="2">
-            <a:schemeClr val="accent1"/>
-          </a:effectRef>
-          <a:fontRef idx="minor">
-            <a:schemeClr val="lt1"/>
-          </a:fontRef>
-        </p:style>
-        <p:txBody>
-          <a:bodyPr rtlCol="0" anchor="ctr"/>
-          <a:lstStyle/>
-          <a:p>
-            <a:pPr algn="ctr"/>
-          </a:p>
-        </p:txBody>
-      </p:sp>
-      <p:sp>
-        <p:nvSpPr>
-          <p:cNvPr id="25" name="TextBox 24"/>
-          <p:cNvSpPr txBox="1"/>
-          <p:nvPr/>
-        </p:nvSpPr>
-        <p:spPr>
-          <a:xfrm>
-            <a:off x="825500" y="5168900"/>
-            <a:ext cx="10528300" cy="609600"/>
-          </a:xfrm>
-          <a:prstGeom prst="rect">
-            <a:avLst/>
-          </a:prstGeom>
-          <a:noFill/>
-        </p:spPr>
-        <p:txBody>
-          <a:bodyPr wrap="square" lIns="0" rIns="0" tIns="0" bIns="0" anchor="ctr">
-            <a:spAutoFit/>
-          </a:bodyPr>
-          <a:lstStyle/>
-          <a:p>
-            <a:pPr algn="l">
-              <a:lnSpc>
-                <a:spcPct val="108000"/>
-              </a:lnSpc>
-              <a:spcBef>
-                <a:spcPts val="0"/>
-              </a:spcBef>
-              <a:spcAft>
-                <a:spcPts val="0"/>
-              </a:spcAft>
-              <a:defRPr sz="1700" b="1">
-                <a:solidFill>
-                  <a:srgbClr val="102B42"/>
-                </a:solidFill>
-                <a:latin typeface="Arial"/>
-              </a:defRPr>
-            </a:pPr>
-            <a:r>
-              <a:t>Los intervalos descriptivos remuestrean personas, no ventanas.</a:t>
+              <a:t>Recall por clase presente, promediado por persona con igual peso.</a:t>
             </a:r>
           </a:p>
         </p:txBody>
@@ -6418,7 +6612,7 @@
     <p:bg>
       <p:bgPr>
         <a:solidFill>
-          <a:srgbClr val="FFFFFF"/>
+          <a:srgbClr val="F7F8F5"/>
         </a:solidFill>
         <a:effectLst/>
       </p:bgPr>
@@ -6439,13 +6633,13 @@
         <p:spPr>
           <a:xfrm>
             <a:off x="0" y="0"/>
-            <a:ext cx="12192000" cy="88900"/>
+            <a:ext cx="12192000" cy="76200"/>
           </a:xfrm>
           <a:prstGeom prst="rect">
             <a:avLst/>
           </a:prstGeom>
           <a:solidFill>
-            <a:srgbClr val="102B42"/>
+            <a:srgbClr val="087E83"/>
           </a:solidFill>
           <a:ln>
             <a:noFill/>
@@ -6497,7 +6691,7 @@
           <a:p>
             <a:pPr algn="l">
               <a:lnSpc>
-                <a:spcPct val="108000"/>
+                <a:spcPct val="104000"/>
               </a:lnSpc>
               <a:spcBef>
                 <a:spcPts val="0"/>
@@ -6507,13 +6701,13 @@
               </a:spcAft>
               <a:defRPr sz="1100" b="1">
                 <a:solidFill>
-                  <a:srgbClr val="087F86"/>
+                  <a:srgbClr val="087E83"/>
                 </a:solidFill>
-                <a:latin typeface="Arial"/>
+                <a:latin typeface="Aptos"/>
               </a:defRPr>
             </a:pPr>
             <a:r>
-              <a:t>CONTRASTE FACTORIAL 2 × 2 · TRAIN</a:t>
+              <a:t>04  /  CONTRASTE FACTORIAL 2 × 2 · TRAIN</a:t>
             </a:r>
           </a:p>
         </p:txBody>
@@ -6527,7 +6721,7 @@
         <p:spPr>
           <a:xfrm>
             <a:off x="609600" y="723900"/>
-            <a:ext cx="10972800" cy="939800"/>
+            <a:ext cx="10972800" cy="990600"/>
           </a:xfrm>
           <a:prstGeom prst="rect">
             <a:avLst/>
@@ -6542,7 +6736,7 @@
           <a:p>
             <a:pPr algn="l">
               <a:lnSpc>
-                <a:spcPct val="108000"/>
+                <a:spcPct val="104000"/>
               </a:lnSpc>
               <a:spcBef>
                 <a:spcPts val="0"/>
@@ -6550,11 +6744,11 @@
               <a:spcAft>
                 <a:spcPts val="0"/>
               </a:spcAft>
-              <a:defRPr sz="3000" b="1">
+              <a:defRPr sz="3200" b="1">
                 <a:solidFill>
-                  <a:srgbClr val="102B42"/>
+                  <a:srgbClr val="102A3D"/>
                 </a:solidFill>
-                <a:latin typeface="Arial"/>
+                <a:latin typeface="Aptos"/>
               </a:defRPr>
             </a:pPr>
             <a:r>
@@ -6571,14 +6765,14 @@
         </p:nvSpPr>
         <p:spPr>
           <a:xfrm>
-            <a:off x="609600" y="6096000"/>
+            <a:off x="609600" y="6134100"/>
             <a:ext cx="10972800" cy="12700"/>
           </a:xfrm>
           <a:prstGeom prst="rect">
             <a:avLst/>
           </a:prstGeom>
           <a:solidFill>
-            <a:srgbClr val="D4DFE5"/>
+            <a:srgbClr val="D9E2E3"/>
           </a:solidFill>
           <a:ln>
             <a:noFill/>
@@ -6608,155 +6802,20 @@
       </p:sp>
       <p:sp>
         <p:nvSpPr>
-          <p:cNvPr id="6" name="TextBox 5"/>
-          <p:cNvSpPr txBox="1"/>
-          <p:nvPr/>
-        </p:nvSpPr>
-        <p:spPr>
-          <a:xfrm>
-            <a:off x="609600" y="6197600"/>
-            <a:ext cx="10223500" cy="469900"/>
-          </a:xfrm>
-          <a:prstGeom prst="rect">
-            <a:avLst/>
-          </a:prstGeom>
-          <a:noFill/>
-        </p:spPr>
-        <p:txBody>
-          <a:bodyPr wrap="square" lIns="0" rIns="0" tIns="0" bIns="0" anchor="ctr">
-            <a:spAutoFit/>
-          </a:bodyPr>
-          <a:lstStyle/>
-          <a:p>
-            <a:pPr algn="l">
-              <a:lnSpc>
-                <a:spcPct val="108000"/>
-              </a:lnSpc>
-              <a:spcBef>
-                <a:spcPts val="0"/>
-              </a:spcBef>
-              <a:spcAft>
-                <a:spcPts val="0"/>
-              </a:spcAft>
-              <a:defRPr sz="900" b="0">
-                <a:solidFill>
-                  <a:srgbClr val="536675"/>
-                </a:solidFill>
-                <a:latin typeface="Arial"/>
-              </a:defRPr>
-            </a:pPr>
-            <a:r>
-              <a:t>Fuente: Contraste_Temporalidad_Fusion_24-10-2026.md; 25 personas, 5 folds, 2 semillas</a:t>
-            </a:r>
-          </a:p>
-        </p:txBody>
-      </p:sp>
-      <p:sp>
-        <p:nvSpPr>
-          <p:cNvPr id="7" name="TextBox 6"/>
-          <p:cNvSpPr txBox="1"/>
-          <p:nvPr/>
-        </p:nvSpPr>
-        <p:spPr>
-          <a:xfrm>
-            <a:off x="10896600" y="6210300"/>
-            <a:ext cx="660400" cy="279400"/>
-          </a:xfrm>
-          <a:prstGeom prst="rect">
-            <a:avLst/>
-          </a:prstGeom>
-          <a:noFill/>
-        </p:spPr>
-        <p:txBody>
-          <a:bodyPr wrap="square" lIns="0" rIns="0" tIns="0" bIns="0" anchor="ctr">
-            <a:spAutoFit/>
-          </a:bodyPr>
-          <a:lstStyle/>
-          <a:p>
-            <a:pPr algn="r">
-              <a:lnSpc>
-                <a:spcPct val="108000"/>
-              </a:lnSpc>
-              <a:spcBef>
-                <a:spcPts val="0"/>
-              </a:spcBef>
-              <a:spcAft>
-                <a:spcPts val="0"/>
-              </a:spcAft>
-              <a:defRPr sz="1000" b="1">
-                <a:solidFill>
-                  <a:srgbClr val="536675"/>
-                </a:solidFill>
-                <a:latin typeface="Arial"/>
-              </a:defRPr>
-            </a:pPr>
-            <a:r>
-              <a:t>4 / 8</a:t>
-            </a:r>
-          </a:p>
-        </p:txBody>
-      </p:sp>
-      <p:sp>
-        <p:nvSpPr>
-          <p:cNvPr id="8" name="TextBox 7"/>
-          <p:cNvSpPr txBox="1"/>
-          <p:nvPr/>
-        </p:nvSpPr>
-        <p:spPr>
-          <a:xfrm>
-            <a:off x="609600" y="1778000"/>
-            <a:ext cx="10972800" cy="482600"/>
-          </a:xfrm>
-          <a:prstGeom prst="rect">
-            <a:avLst/>
-          </a:prstGeom>
-          <a:noFill/>
-        </p:spPr>
-        <p:txBody>
-          <a:bodyPr wrap="square" lIns="0" rIns="0" tIns="0" bIns="0" anchor="ctr">
-            <a:spAutoFit/>
-          </a:bodyPr>
-          <a:lstStyle/>
-          <a:p>
-            <a:pPr algn="l">
-              <a:lnSpc>
-                <a:spcPct val="108000"/>
-              </a:lnSpc>
-              <a:spcBef>
-                <a:spcPts val="0"/>
-              </a:spcBef>
-              <a:spcAft>
-                <a:spcPts val="0"/>
-              </a:spcAft>
-              <a:defRPr sz="1700" b="0">
-                <a:solidFill>
-                  <a:srgbClr val="173047"/>
-                </a:solidFill>
-                <a:latin typeface="Arial"/>
-              </a:defRPr>
-            </a:pPr>
-            <a:r>
-              <a:t>TCN: historial real (R) o ventana actual repetida (C); fusión temprana (E) o tardía (T).</a:t>
-            </a:r>
-          </a:p>
-        </p:txBody>
-      </p:sp>
-      <p:sp>
-        <p:nvSpPr>
-          <p:cNvPr id="9" name="Rounded Rectangle 8"/>
+          <p:cNvPr id="6" name="Rectangle 5"/>
           <p:cNvSpPr/>
           <p:nvPr/>
         </p:nvSpPr>
         <p:spPr>
           <a:xfrm>
-            <a:off x="609600" y="2501900"/>
-            <a:ext cx="2552700" cy="1104900"/>
-          </a:xfrm>
-          <a:prstGeom prst="roundRect">
+            <a:off x="609600" y="6083300"/>
+            <a:ext cx="5486400" cy="38100"/>
+          </a:xfrm>
+          <a:prstGeom prst="rect">
             <a:avLst/>
           </a:prstGeom>
           <a:solidFill>
-            <a:srgbClr val="F7F9FB"/>
+            <a:srgbClr val="087E83"/>
           </a:solidFill>
           <a:ln>
             <a:noFill/>
@@ -6786,14 +6845,14 @@
       </p:sp>
       <p:sp>
         <p:nvSpPr>
-          <p:cNvPr id="10" name="TextBox 9"/>
+          <p:cNvPr id="7" name="TextBox 6"/>
           <p:cNvSpPr txBox="1"/>
           <p:nvPr/>
         </p:nvSpPr>
         <p:spPr>
           <a:xfrm>
-            <a:off x="787400" y="2628900"/>
-            <a:ext cx="2184400" cy="317500"/>
+            <a:off x="609600" y="6235700"/>
+            <a:ext cx="10223500" cy="444500"/>
           </a:xfrm>
           <a:prstGeom prst="rect">
             <a:avLst/>
@@ -6808,7 +6867,7 @@
           <a:p>
             <a:pPr algn="l">
               <a:lnSpc>
-                <a:spcPct val="108000"/>
+                <a:spcPct val="104000"/>
               </a:lnSpc>
               <a:spcBef>
                 <a:spcPts val="0"/>
@@ -6816,29 +6875,29 @@
               <a:spcAft>
                 <a:spcPts val="0"/>
               </a:spcAft>
-              <a:defRPr sz="1600" b="1">
+              <a:defRPr sz="900" b="0">
                 <a:solidFill>
-                  <a:srgbClr val="536675"/>
+                  <a:srgbClr val="5D7180"/>
                 </a:solidFill>
-                <a:latin typeface="Arial"/>
+                <a:latin typeface="Aptos"/>
               </a:defRPr>
             </a:pPr>
             <a:r>
-              <a:t>E-C</a:t>
-            </a:r>
-          </a:p>
-        </p:txBody>
-      </p:sp>
-      <p:sp>
-        <p:nvSpPr>
-          <p:cNvPr id="11" name="TextBox 10"/>
+              <a:t>Fuente: Contraste_Temporalidad_Fusion_24-10-2026.md; 25 personas, 5 folds, 2 semillas</a:t>
+            </a:r>
+          </a:p>
+        </p:txBody>
+      </p:sp>
+      <p:sp>
+        <p:nvSpPr>
+          <p:cNvPr id="8" name="TextBox 7"/>
           <p:cNvSpPr txBox="1"/>
           <p:nvPr/>
         </p:nvSpPr>
         <p:spPr>
           <a:xfrm>
-            <a:off x="787400" y="3009900"/>
-            <a:ext cx="2184400" cy="444500"/>
+            <a:off x="10820400" y="6235700"/>
+            <a:ext cx="736600" cy="279400"/>
           </a:xfrm>
           <a:prstGeom prst="rect">
             <a:avLst/>
@@ -6851,9 +6910,54 @@
           </a:bodyPr>
           <a:lstStyle/>
           <a:p>
+            <a:pPr algn="r">
+              <a:lnSpc>
+                <a:spcPct val="104000"/>
+              </a:lnSpc>
+              <a:spcBef>
+                <a:spcPts val="0"/>
+              </a:spcBef>
+              <a:spcAft>
+                <a:spcPts val="0"/>
+              </a:spcAft>
+              <a:defRPr sz="1000" b="1">
+                <a:solidFill>
+                  <a:srgbClr val="5D7180"/>
+                </a:solidFill>
+                <a:latin typeface="Aptos"/>
+              </a:defRPr>
+            </a:pPr>
+            <a:r>
+              <a:t>04 / 08</a:t>
+            </a:r>
+          </a:p>
+        </p:txBody>
+      </p:sp>
+      <p:sp>
+        <p:nvSpPr>
+          <p:cNvPr id="9" name="TextBox 8"/>
+          <p:cNvSpPr txBox="1"/>
+          <p:nvPr/>
+        </p:nvSpPr>
+        <p:spPr>
+          <a:xfrm>
+            <a:off x="609600" y="1778000"/>
+            <a:ext cx="10972800" cy="482600"/>
+          </a:xfrm>
+          <a:prstGeom prst="rect">
+            <a:avLst/>
+          </a:prstGeom>
+          <a:noFill/>
+        </p:spPr>
+        <p:txBody>
+          <a:bodyPr wrap="square" lIns="0" rIns="0" tIns="0" bIns="0" anchor="ctr">
+            <a:spAutoFit/>
+          </a:bodyPr>
+          <a:lstStyle/>
+          <a:p>
             <a:pPr algn="l">
               <a:lnSpc>
-                <a:spcPct val="108000"/>
+                <a:spcPct val="104000"/>
               </a:lnSpc>
               <a:spcBef>
                 <a:spcPts val="0"/>
@@ -6861,35 +6965,37 @@
               <a:spcAft>
                 <a:spcPts val="0"/>
               </a:spcAft>
-              <a:defRPr sz="2600" b="1">
+              <a:defRPr sz="1700" b="0">
                 <a:solidFill>
-                  <a:srgbClr val="102B42"/>
+                  <a:srgbClr val="173348"/>
                 </a:solidFill>
-                <a:latin typeface="Arial"/>
+                <a:latin typeface="Aptos"/>
               </a:defRPr>
             </a:pPr>
             <a:r>
-              <a:t>0,3524</a:t>
-            </a:r>
-          </a:p>
-        </p:txBody>
-      </p:sp>
-      <p:sp>
-        <p:nvSpPr>
-          <p:cNvPr id="12" name="Rounded Rectangle 11"/>
+              <a:t>TCN: historial real (R) o ventana actual repetida (C); fusión temprana (E) o tardía (T).</a:t>
+            </a:r>
+          </a:p>
+        </p:txBody>
+      </p:sp>
+      <p:sp>
+        <p:nvSpPr>
+          <p:cNvPr id="10" name="Rounded Rectangle 9"/>
           <p:cNvSpPr/>
           <p:nvPr/>
         </p:nvSpPr>
         <p:spPr>
           <a:xfrm>
-            <a:off x="3416300" y="2501900"/>
+            <a:off x="609600" y="2501900"/>
             <a:ext cx="2552700" cy="1104900"/>
           </a:xfrm>
           <a:prstGeom prst="roundRect">
-            <a:avLst/>
+            <a:avLst>
+              <a:gd name="adj" fmla="val 10000"/>
+            </a:avLst>
           </a:prstGeom>
           <a:solidFill>
-            <a:srgbClr val="F7F9FB"/>
+            <a:srgbClr val="F7F8F5"/>
           </a:solidFill>
           <a:ln>
             <a:noFill/>
@@ -6919,13 +7025,13 @@
       </p:sp>
       <p:sp>
         <p:nvSpPr>
-          <p:cNvPr id="13" name="TextBox 12"/>
+          <p:cNvPr id="11" name="TextBox 10"/>
           <p:cNvSpPr txBox="1"/>
           <p:nvPr/>
         </p:nvSpPr>
         <p:spPr>
           <a:xfrm>
-            <a:off x="3594100" y="2628900"/>
+            <a:off x="787400" y="2628900"/>
             <a:ext cx="2184400" cy="317500"/>
           </a:xfrm>
           <a:prstGeom prst="rect">
@@ -6941,7 +7047,7 @@
           <a:p>
             <a:pPr algn="l">
               <a:lnSpc>
-                <a:spcPct val="108000"/>
+                <a:spcPct val="104000"/>
               </a:lnSpc>
               <a:spcBef>
                 <a:spcPts val="0"/>
@@ -6951,26 +7057,26 @@
               </a:spcAft>
               <a:defRPr sz="1600" b="1">
                 <a:solidFill>
-                  <a:srgbClr val="087F86"/>
+                  <a:srgbClr val="5D7180"/>
                 </a:solidFill>
-                <a:latin typeface="Arial"/>
+                <a:latin typeface="Aptos"/>
               </a:defRPr>
             </a:pPr>
             <a:r>
-              <a:t>E-R</a:t>
-            </a:r>
-          </a:p>
-        </p:txBody>
-      </p:sp>
-      <p:sp>
-        <p:nvSpPr>
-          <p:cNvPr id="14" name="TextBox 13"/>
+              <a:t>E-C</a:t>
+            </a:r>
+          </a:p>
+        </p:txBody>
+      </p:sp>
+      <p:sp>
+        <p:nvSpPr>
+          <p:cNvPr id="12" name="TextBox 11"/>
           <p:cNvSpPr txBox="1"/>
           <p:nvPr/>
         </p:nvSpPr>
         <p:spPr>
           <a:xfrm>
-            <a:off x="3594100" y="3009900"/>
+            <a:off x="787400" y="3009900"/>
             <a:ext cx="2184400" cy="444500"/>
           </a:xfrm>
           <a:prstGeom prst="rect">
@@ -6986,7 +7092,7 @@
           <a:p>
             <a:pPr algn="l">
               <a:lnSpc>
-                <a:spcPct val="108000"/>
+                <a:spcPct val="104000"/>
               </a:lnSpc>
               <a:spcBef>
                 <a:spcPts val="0"/>
@@ -6996,33 +7102,35 @@
               </a:spcAft>
               <a:defRPr sz="2600" b="1">
                 <a:solidFill>
-                  <a:srgbClr val="102B42"/>
+                  <a:srgbClr val="102A3D"/>
                 </a:solidFill>
-                <a:latin typeface="Arial"/>
+                <a:latin typeface="Aptos"/>
               </a:defRPr>
             </a:pPr>
             <a:r>
-              <a:t>0,3612</a:t>
-            </a:r>
-          </a:p>
-        </p:txBody>
-      </p:sp>
-      <p:sp>
-        <p:nvSpPr>
-          <p:cNvPr id="15" name="Rounded Rectangle 14"/>
+              <a:t>0,3524</a:t>
+            </a:r>
+          </a:p>
+        </p:txBody>
+      </p:sp>
+      <p:sp>
+        <p:nvSpPr>
+          <p:cNvPr id="13" name="Rounded Rectangle 12"/>
           <p:cNvSpPr/>
           <p:nvPr/>
         </p:nvSpPr>
         <p:spPr>
           <a:xfrm>
-            <a:off x="6223000" y="2501900"/>
+            <a:off x="3416300" y="2501900"/>
             <a:ext cx="2552700" cy="1104900"/>
           </a:xfrm>
           <a:prstGeom prst="roundRect">
-            <a:avLst/>
+            <a:avLst>
+              <a:gd name="adj" fmla="val 10000"/>
+            </a:avLst>
           </a:prstGeom>
           <a:solidFill>
-            <a:srgbClr val="F7F9FB"/>
+            <a:srgbClr val="F7F8F5"/>
           </a:solidFill>
           <a:ln>
             <a:noFill/>
@@ -7052,13 +7160,13 @@
       </p:sp>
       <p:sp>
         <p:nvSpPr>
-          <p:cNvPr id="16" name="TextBox 15"/>
+          <p:cNvPr id="14" name="TextBox 13"/>
           <p:cNvSpPr txBox="1"/>
           <p:nvPr/>
         </p:nvSpPr>
         <p:spPr>
           <a:xfrm>
-            <a:off x="6400800" y="2628900"/>
+            <a:off x="3594100" y="2628900"/>
             <a:ext cx="2184400" cy="317500"/>
           </a:xfrm>
           <a:prstGeom prst="rect">
@@ -7074,7 +7182,7 @@
           <a:p>
             <a:pPr algn="l">
               <a:lnSpc>
-                <a:spcPct val="108000"/>
+                <a:spcPct val="104000"/>
               </a:lnSpc>
               <a:spcBef>
                 <a:spcPts val="0"/>
@@ -7084,26 +7192,26 @@
               </a:spcAft>
               <a:defRPr sz="1600" b="1">
                 <a:solidFill>
-                  <a:srgbClr val="215C80"/>
+                  <a:srgbClr val="087E83"/>
                 </a:solidFill>
-                <a:latin typeface="Arial"/>
+                <a:latin typeface="Aptos"/>
               </a:defRPr>
             </a:pPr>
             <a:r>
-              <a:t>T-C</a:t>
-            </a:r>
-          </a:p>
-        </p:txBody>
-      </p:sp>
-      <p:sp>
-        <p:nvSpPr>
-          <p:cNvPr id="17" name="TextBox 16"/>
+              <a:t>E-R</a:t>
+            </a:r>
+          </a:p>
+        </p:txBody>
+      </p:sp>
+      <p:sp>
+        <p:nvSpPr>
+          <p:cNvPr id="15" name="TextBox 14"/>
           <p:cNvSpPr txBox="1"/>
           <p:nvPr/>
         </p:nvSpPr>
         <p:spPr>
           <a:xfrm>
-            <a:off x="6400800" y="3009900"/>
+            <a:off x="3594100" y="3009900"/>
             <a:ext cx="2184400" cy="444500"/>
           </a:xfrm>
           <a:prstGeom prst="rect">
@@ -7119,7 +7227,7 @@
           <a:p>
             <a:pPr algn="l">
               <a:lnSpc>
-                <a:spcPct val="108000"/>
+                <a:spcPct val="104000"/>
               </a:lnSpc>
               <a:spcBef>
                 <a:spcPts val="0"/>
@@ -7129,33 +7237,35 @@
               </a:spcAft>
               <a:defRPr sz="2600" b="1">
                 <a:solidFill>
-                  <a:srgbClr val="102B42"/>
+                  <a:srgbClr val="102A3D"/>
                 </a:solidFill>
-                <a:latin typeface="Arial"/>
+                <a:latin typeface="Aptos"/>
               </a:defRPr>
             </a:pPr>
             <a:r>
-              <a:t>0,3596</a:t>
-            </a:r>
-          </a:p>
-        </p:txBody>
-      </p:sp>
-      <p:sp>
-        <p:nvSpPr>
-          <p:cNvPr id="18" name="Rounded Rectangle 17"/>
+              <a:t>0,3612</a:t>
+            </a:r>
+          </a:p>
+        </p:txBody>
+      </p:sp>
+      <p:sp>
+        <p:nvSpPr>
+          <p:cNvPr id="16" name="Rounded Rectangle 15"/>
           <p:cNvSpPr/>
           <p:nvPr/>
         </p:nvSpPr>
         <p:spPr>
           <a:xfrm>
-            <a:off x="9029700" y="2501900"/>
+            <a:off x="6223000" y="2501900"/>
             <a:ext cx="2552700" cy="1104900"/>
           </a:xfrm>
           <a:prstGeom prst="roundRect">
-            <a:avLst/>
+            <a:avLst>
+              <a:gd name="adj" fmla="val 10000"/>
+            </a:avLst>
           </a:prstGeom>
           <a:solidFill>
-            <a:srgbClr val="F7F9FB"/>
+            <a:srgbClr val="F7F8F5"/>
           </a:solidFill>
           <a:ln>
             <a:noFill/>
@@ -7185,13 +7295,13 @@
       </p:sp>
       <p:sp>
         <p:nvSpPr>
-          <p:cNvPr id="19" name="TextBox 18"/>
+          <p:cNvPr id="17" name="TextBox 16"/>
           <p:cNvSpPr txBox="1"/>
           <p:nvPr/>
         </p:nvSpPr>
         <p:spPr>
           <a:xfrm>
-            <a:off x="9207500" y="2628900"/>
+            <a:off x="6400800" y="2628900"/>
             <a:ext cx="2184400" cy="317500"/>
           </a:xfrm>
           <a:prstGeom prst="rect">
@@ -7207,7 +7317,7 @@
           <a:p>
             <a:pPr algn="l">
               <a:lnSpc>
-                <a:spcPct val="108000"/>
+                <a:spcPct val="104000"/>
               </a:lnSpc>
               <a:spcBef>
                 <a:spcPts val="0"/>
@@ -7217,26 +7327,26 @@
               </a:spcAft>
               <a:defRPr sz="1600" b="1">
                 <a:solidFill>
-                  <a:srgbClr val="215C80"/>
+                  <a:srgbClr val="376B91"/>
                 </a:solidFill>
-                <a:latin typeface="Arial"/>
+                <a:latin typeface="Aptos"/>
               </a:defRPr>
             </a:pPr>
             <a:r>
-              <a:t>T-R</a:t>
-            </a:r>
-          </a:p>
-        </p:txBody>
-      </p:sp>
-      <p:sp>
-        <p:nvSpPr>
-          <p:cNvPr id="20" name="TextBox 19"/>
+              <a:t>T-C</a:t>
+            </a:r>
+          </a:p>
+        </p:txBody>
+      </p:sp>
+      <p:sp>
+        <p:nvSpPr>
+          <p:cNvPr id="18" name="TextBox 17"/>
           <p:cNvSpPr txBox="1"/>
           <p:nvPr/>
         </p:nvSpPr>
         <p:spPr>
           <a:xfrm>
-            <a:off x="9207500" y="3009900"/>
+            <a:off x="6400800" y="3009900"/>
             <a:ext cx="2184400" cy="444500"/>
           </a:xfrm>
           <a:prstGeom prst="rect">
@@ -7252,7 +7362,7 @@
           <a:p>
             <a:pPr algn="l">
               <a:lnSpc>
-                <a:spcPct val="108000"/>
+                <a:spcPct val="104000"/>
               </a:lnSpc>
               <a:spcBef>
                 <a:spcPts val="0"/>
@@ -7262,78 +7372,35 @@
               </a:spcAft>
               <a:defRPr sz="2600" b="1">
                 <a:solidFill>
-                  <a:srgbClr val="102B42"/>
+                  <a:srgbClr val="102A3D"/>
                 </a:solidFill>
-                <a:latin typeface="Arial"/>
+                <a:latin typeface="Aptos"/>
               </a:defRPr>
             </a:pPr>
             <a:r>
-              <a:t>0,3630</a:t>
-            </a:r>
-          </a:p>
-        </p:txBody>
-      </p:sp>
-      <p:sp>
-        <p:nvSpPr>
-          <p:cNvPr id="21" name="TextBox 20"/>
-          <p:cNvSpPr txBox="1"/>
-          <p:nvPr/>
-        </p:nvSpPr>
-        <p:spPr>
-          <a:xfrm>
-            <a:off x="609600" y="3683000"/>
-            <a:ext cx="10972800" cy="292100"/>
-          </a:xfrm>
-          <a:prstGeom prst="rect">
-            <a:avLst/>
-          </a:prstGeom>
-          <a:noFill/>
-        </p:spPr>
-        <p:txBody>
-          <a:bodyPr wrap="square" lIns="0" rIns="0" tIns="0" bIns="0" anchor="ctr">
-            <a:spAutoFit/>
-          </a:bodyPr>
-          <a:lstStyle/>
-          <a:p>
-            <a:pPr algn="l">
-              <a:lnSpc>
-                <a:spcPct val="108000"/>
-              </a:lnSpc>
-              <a:spcBef>
-                <a:spcPts val="0"/>
-              </a:spcBef>
-              <a:spcAft>
-                <a:spcPts val="0"/>
-              </a:spcAft>
-              <a:defRPr sz="1300" b="0">
-                <a:solidFill>
-                  <a:srgbClr val="536675"/>
-                </a:solidFill>
-                <a:latin typeface="Arial"/>
-              </a:defRPr>
-            </a:pPr>
-            <a:r>
-              <a:t>BA macro por persona fuera de fold</a:t>
-            </a:r>
-          </a:p>
-        </p:txBody>
-      </p:sp>
-      <p:sp>
-        <p:nvSpPr>
-          <p:cNvPr id="22" name="Rounded Rectangle 21"/>
+              <a:t>0,3596</a:t>
+            </a:r>
+          </a:p>
+        </p:txBody>
+      </p:sp>
+      <p:sp>
+        <p:nvSpPr>
+          <p:cNvPr id="19" name="Rounded Rectangle 18"/>
           <p:cNvSpPr/>
           <p:nvPr/>
         </p:nvSpPr>
         <p:spPr>
           <a:xfrm>
-            <a:off x="609600" y="4152900"/>
-            <a:ext cx="5143500" cy="889000"/>
+            <a:off x="9029700" y="2501900"/>
+            <a:ext cx="2552700" cy="1104900"/>
           </a:xfrm>
           <a:prstGeom prst="roundRect">
-            <a:avLst/>
+            <a:avLst>
+              <a:gd name="adj" fmla="val 10000"/>
+            </a:avLst>
           </a:prstGeom>
           <a:solidFill>
-            <a:srgbClr val="F7F9FB"/>
+            <a:srgbClr val="F7F8F5"/>
           </a:solidFill>
           <a:ln>
             <a:noFill/>
@@ -7363,20 +7430,157 @@
       </p:sp>
       <p:sp>
         <p:nvSpPr>
-          <p:cNvPr id="23" name="Rectangle 22"/>
+          <p:cNvPr id="20" name="TextBox 19"/>
+          <p:cNvSpPr txBox="1"/>
+          <p:nvPr/>
+        </p:nvSpPr>
+        <p:spPr>
+          <a:xfrm>
+            <a:off x="9207500" y="2628900"/>
+            <a:ext cx="2184400" cy="317500"/>
+          </a:xfrm>
+          <a:prstGeom prst="rect">
+            <a:avLst/>
+          </a:prstGeom>
+          <a:noFill/>
+        </p:spPr>
+        <p:txBody>
+          <a:bodyPr wrap="square" lIns="0" rIns="0" tIns="0" bIns="0" anchor="ctr">
+            <a:spAutoFit/>
+          </a:bodyPr>
+          <a:lstStyle/>
+          <a:p>
+            <a:pPr algn="l">
+              <a:lnSpc>
+                <a:spcPct val="104000"/>
+              </a:lnSpc>
+              <a:spcBef>
+                <a:spcPts val="0"/>
+              </a:spcBef>
+              <a:spcAft>
+                <a:spcPts val="0"/>
+              </a:spcAft>
+              <a:defRPr sz="1600" b="1">
+                <a:solidFill>
+                  <a:srgbClr val="376B91"/>
+                </a:solidFill>
+                <a:latin typeface="Aptos"/>
+              </a:defRPr>
+            </a:pPr>
+            <a:r>
+              <a:t>T-R</a:t>
+            </a:r>
+          </a:p>
+        </p:txBody>
+      </p:sp>
+      <p:sp>
+        <p:nvSpPr>
+          <p:cNvPr id="21" name="TextBox 20"/>
+          <p:cNvSpPr txBox="1"/>
+          <p:nvPr/>
+        </p:nvSpPr>
+        <p:spPr>
+          <a:xfrm>
+            <a:off x="9207500" y="3009900"/>
+            <a:ext cx="2184400" cy="444500"/>
+          </a:xfrm>
+          <a:prstGeom prst="rect">
+            <a:avLst/>
+          </a:prstGeom>
+          <a:noFill/>
+        </p:spPr>
+        <p:txBody>
+          <a:bodyPr wrap="square" lIns="0" rIns="0" tIns="0" bIns="0" anchor="ctr">
+            <a:spAutoFit/>
+          </a:bodyPr>
+          <a:lstStyle/>
+          <a:p>
+            <a:pPr algn="l">
+              <a:lnSpc>
+                <a:spcPct val="104000"/>
+              </a:lnSpc>
+              <a:spcBef>
+                <a:spcPts val="0"/>
+              </a:spcBef>
+              <a:spcAft>
+                <a:spcPts val="0"/>
+              </a:spcAft>
+              <a:defRPr sz="2600" b="1">
+                <a:solidFill>
+                  <a:srgbClr val="102A3D"/>
+                </a:solidFill>
+                <a:latin typeface="Aptos"/>
+              </a:defRPr>
+            </a:pPr>
+            <a:r>
+              <a:t>0,3630</a:t>
+            </a:r>
+          </a:p>
+        </p:txBody>
+      </p:sp>
+      <p:sp>
+        <p:nvSpPr>
+          <p:cNvPr id="22" name="TextBox 21"/>
+          <p:cNvSpPr txBox="1"/>
+          <p:nvPr/>
+        </p:nvSpPr>
+        <p:spPr>
+          <a:xfrm>
+            <a:off x="609600" y="3683000"/>
+            <a:ext cx="10972800" cy="292100"/>
+          </a:xfrm>
+          <a:prstGeom prst="rect">
+            <a:avLst/>
+          </a:prstGeom>
+          <a:noFill/>
+        </p:spPr>
+        <p:txBody>
+          <a:bodyPr wrap="square" lIns="0" rIns="0" tIns="0" bIns="0" anchor="ctr">
+            <a:spAutoFit/>
+          </a:bodyPr>
+          <a:lstStyle/>
+          <a:p>
+            <a:pPr algn="l">
+              <a:lnSpc>
+                <a:spcPct val="104000"/>
+              </a:lnSpc>
+              <a:spcBef>
+                <a:spcPts val="0"/>
+              </a:spcBef>
+              <a:spcAft>
+                <a:spcPts val="0"/>
+              </a:spcAft>
+              <a:defRPr sz="1300" b="0">
+                <a:solidFill>
+                  <a:srgbClr val="5D7180"/>
+                </a:solidFill>
+                <a:latin typeface="Aptos"/>
+              </a:defRPr>
+            </a:pPr>
+            <a:r>
+              <a:t>BA macro por persona fuera de fold</a:t>
+            </a:r>
+          </a:p>
+        </p:txBody>
+      </p:sp>
+      <p:sp>
+        <p:nvSpPr>
+          <p:cNvPr id="23" name="Rounded Rectangle 22"/>
           <p:cNvSpPr/>
           <p:nvPr/>
         </p:nvSpPr>
         <p:spPr>
           <a:xfrm>
             <a:off x="609600" y="4152900"/>
-            <a:ext cx="63500" cy="889000"/>
-          </a:xfrm>
-          <a:prstGeom prst="rect">
-            <a:avLst/>
+            <a:ext cx="5143500" cy="889000"/>
+          </a:xfrm>
+          <a:prstGeom prst="roundRect">
+            <a:avLst>
+              <a:gd name="adj" fmla="val 10000"/>
+            </a:avLst>
           </a:prstGeom>
           <a:solidFill>
-            <a:srgbClr val="087F86"/>
+            <a:srgbClr val="FFFFFF"/>
           </a:solidFill>
           <a:ln>
             <a:noFill/>
@@ -7406,110 +7610,20 @@
       </p:sp>
       <p:sp>
         <p:nvSpPr>
-          <p:cNvPr id="24" name="TextBox 23"/>
-          <p:cNvSpPr txBox="1"/>
-          <p:nvPr/>
-        </p:nvSpPr>
-        <p:spPr>
-          <a:xfrm>
-            <a:off x="850900" y="4254500"/>
-            <a:ext cx="4686300" cy="355600"/>
-          </a:xfrm>
-          <a:prstGeom prst="rect">
-            <a:avLst/>
-          </a:prstGeom>
-          <a:noFill/>
-        </p:spPr>
-        <p:txBody>
-          <a:bodyPr wrap="square" lIns="0" rIns="0" tIns="0" bIns="0" anchor="ctr">
-            <a:spAutoFit/>
-          </a:bodyPr>
-          <a:lstStyle/>
-          <a:p>
-            <a:pPr algn="l">
-              <a:lnSpc>
-                <a:spcPct val="108000"/>
-              </a:lnSpc>
-              <a:spcBef>
-                <a:spcPts val="0"/>
-              </a:spcBef>
-              <a:spcAft>
-                <a:spcPts val="0"/>
-              </a:spcAft>
-              <a:defRPr sz="1500" b="1">
-                <a:solidFill>
-                  <a:srgbClr val="087F86"/>
-                </a:solidFill>
-                <a:latin typeface="Arial"/>
-              </a:defRPr>
-            </a:pPr>
-            <a:r>
-              <a:t>HISTORIAL: E-R − E-C</a:t>
-            </a:r>
-          </a:p>
-        </p:txBody>
-      </p:sp>
-      <p:sp>
-        <p:nvSpPr>
-          <p:cNvPr id="25" name="TextBox 24"/>
-          <p:cNvSpPr txBox="1"/>
-          <p:nvPr/>
-        </p:nvSpPr>
-        <p:spPr>
-          <a:xfrm>
-            <a:off x="850900" y="4648200"/>
-            <a:ext cx="4660900" cy="330200"/>
-          </a:xfrm>
-          <a:prstGeom prst="rect">
-            <a:avLst/>
-          </a:prstGeom>
-          <a:noFill/>
-        </p:spPr>
-        <p:txBody>
-          <a:bodyPr wrap="square" lIns="0" rIns="0" tIns="0" bIns="0" anchor="ctr">
-            <a:spAutoFit/>
-          </a:bodyPr>
-          <a:lstStyle/>
-          <a:p>
-            <a:pPr algn="l">
-              <a:lnSpc>
-                <a:spcPct val="108000"/>
-              </a:lnSpc>
-              <a:spcBef>
-                <a:spcPts val="0"/>
-              </a:spcBef>
-              <a:spcAft>
-                <a:spcPts val="0"/>
-              </a:spcAft>
-              <a:defRPr sz="1600" b="0">
-                <a:solidFill>
-                  <a:srgbClr val="173047"/>
-                </a:solidFill>
-                <a:latin typeface="Arial"/>
-              </a:defRPr>
-            </a:pPr>
-            <a:r>
-              <a:t>+0,88 pp · intervalo [−0,28; +2,00]</a:t>
-            </a:r>
-          </a:p>
-        </p:txBody>
-      </p:sp>
-      <p:sp>
-        <p:nvSpPr>
-          <p:cNvPr id="26" name="Rounded Rectangle 25"/>
+          <p:cNvPr id="24" name="Rectangle 23"/>
           <p:cNvSpPr/>
           <p:nvPr/>
         </p:nvSpPr>
         <p:spPr>
           <a:xfrm>
-            <a:off x="6438900" y="4152900"/>
-            <a:ext cx="5143500" cy="889000"/>
-          </a:xfrm>
-          <a:prstGeom prst="roundRect">
+            <a:off x="609600" y="4152900"/>
+            <a:ext cx="5143500" cy="63500"/>
+          </a:xfrm>
+          <a:prstGeom prst="rect">
             <a:avLst/>
           </a:prstGeom>
           <a:solidFill>
-            <a:srgbClr val="F7F9FB"/>
+            <a:srgbClr val="087E83"/>
           </a:solidFill>
           <a:ln>
             <a:noFill/>
@@ -7539,20 +7653,112 @@
       </p:sp>
       <p:sp>
         <p:nvSpPr>
-          <p:cNvPr id="27" name="Rectangle 26"/>
+          <p:cNvPr id="25" name="TextBox 24"/>
+          <p:cNvSpPr txBox="1"/>
+          <p:nvPr/>
+        </p:nvSpPr>
+        <p:spPr>
+          <a:xfrm>
+            <a:off x="850900" y="4305300"/>
+            <a:ext cx="4686300" cy="355600"/>
+          </a:xfrm>
+          <a:prstGeom prst="rect">
+            <a:avLst/>
+          </a:prstGeom>
+          <a:noFill/>
+        </p:spPr>
+        <p:txBody>
+          <a:bodyPr wrap="square" lIns="0" rIns="0" tIns="0" bIns="0" anchor="ctr">
+            <a:spAutoFit/>
+          </a:bodyPr>
+          <a:lstStyle/>
+          <a:p>
+            <a:pPr algn="l">
+              <a:lnSpc>
+                <a:spcPct val="104000"/>
+              </a:lnSpc>
+              <a:spcBef>
+                <a:spcPts val="0"/>
+              </a:spcBef>
+              <a:spcAft>
+                <a:spcPts val="0"/>
+              </a:spcAft>
+              <a:defRPr sz="1500" b="1">
+                <a:solidFill>
+                  <a:srgbClr val="087E83"/>
+                </a:solidFill>
+                <a:latin typeface="Aptos"/>
+              </a:defRPr>
+            </a:pPr>
+            <a:r>
+              <a:t>HISTORIAL: E-R − E-C</a:t>
+            </a:r>
+          </a:p>
+        </p:txBody>
+      </p:sp>
+      <p:sp>
+        <p:nvSpPr>
+          <p:cNvPr id="26" name="TextBox 25"/>
+          <p:cNvSpPr txBox="1"/>
+          <p:nvPr/>
+        </p:nvSpPr>
+        <p:spPr>
+          <a:xfrm>
+            <a:off x="850900" y="4699000"/>
+            <a:ext cx="4660900" cy="279400"/>
+          </a:xfrm>
+          <a:prstGeom prst="rect">
+            <a:avLst/>
+          </a:prstGeom>
+          <a:noFill/>
+        </p:spPr>
+        <p:txBody>
+          <a:bodyPr wrap="square" lIns="0" rIns="0" tIns="0" bIns="0" anchor="ctr">
+            <a:spAutoFit/>
+          </a:bodyPr>
+          <a:lstStyle/>
+          <a:p>
+            <a:pPr algn="l">
+              <a:lnSpc>
+                <a:spcPct val="104000"/>
+              </a:lnSpc>
+              <a:spcBef>
+                <a:spcPts val="0"/>
+              </a:spcBef>
+              <a:spcAft>
+                <a:spcPts val="0"/>
+              </a:spcAft>
+              <a:defRPr sz="1600" b="0">
+                <a:solidFill>
+                  <a:srgbClr val="173348"/>
+                </a:solidFill>
+                <a:latin typeface="Aptos"/>
+              </a:defRPr>
+            </a:pPr>
+            <a:r>
+              <a:t>+0,88 pp · intervalo [−0,28; +2,00]</a:t>
+            </a:r>
+          </a:p>
+        </p:txBody>
+      </p:sp>
+      <p:sp>
+        <p:nvSpPr>
+          <p:cNvPr id="27" name="Rounded Rectangle 26"/>
           <p:cNvSpPr/>
           <p:nvPr/>
         </p:nvSpPr>
         <p:spPr>
           <a:xfrm>
             <a:off x="6438900" y="4152900"/>
-            <a:ext cx="63500" cy="889000"/>
-          </a:xfrm>
-          <a:prstGeom prst="rect">
-            <a:avLst/>
+            <a:ext cx="5143500" cy="889000"/>
+          </a:xfrm>
+          <a:prstGeom prst="roundRect">
+            <a:avLst>
+              <a:gd name="adj" fmla="val 10000"/>
+            </a:avLst>
           </a:prstGeom>
           <a:solidFill>
-            <a:srgbClr val="215C80"/>
+            <a:srgbClr val="FFFFFF"/>
           </a:solidFill>
           <a:ln>
             <a:noFill/>
@@ -7582,110 +7788,20 @@
       </p:sp>
       <p:sp>
         <p:nvSpPr>
-          <p:cNvPr id="28" name="TextBox 27"/>
-          <p:cNvSpPr txBox="1"/>
-          <p:nvPr/>
-        </p:nvSpPr>
-        <p:spPr>
-          <a:xfrm>
-            <a:off x="6680200" y="4254500"/>
-            <a:ext cx="4686300" cy="355600"/>
-          </a:xfrm>
-          <a:prstGeom prst="rect">
-            <a:avLst/>
-          </a:prstGeom>
-          <a:noFill/>
-        </p:spPr>
-        <p:txBody>
-          <a:bodyPr wrap="square" lIns="0" rIns="0" tIns="0" bIns="0" anchor="ctr">
-            <a:spAutoFit/>
-          </a:bodyPr>
-          <a:lstStyle/>
-          <a:p>
-            <a:pPr algn="l">
-              <a:lnSpc>
-                <a:spcPct val="108000"/>
-              </a:lnSpc>
-              <a:spcBef>
-                <a:spcPts val="0"/>
-              </a:spcBef>
-              <a:spcAft>
-                <a:spcPts val="0"/>
-              </a:spcAft>
-              <a:defRPr sz="1500" b="1">
-                <a:solidFill>
-                  <a:srgbClr val="215C80"/>
-                </a:solidFill>
-                <a:latin typeface="Arial"/>
-              </a:defRPr>
-            </a:pPr>
-            <a:r>
-              <a:t>FUSIÓN: T-R − E-R</a:t>
-            </a:r>
-          </a:p>
-        </p:txBody>
-      </p:sp>
-      <p:sp>
-        <p:nvSpPr>
-          <p:cNvPr id="29" name="TextBox 28"/>
-          <p:cNvSpPr txBox="1"/>
-          <p:nvPr/>
-        </p:nvSpPr>
-        <p:spPr>
-          <a:xfrm>
-            <a:off x="6680200" y="4648200"/>
-            <a:ext cx="4660900" cy="330200"/>
-          </a:xfrm>
-          <a:prstGeom prst="rect">
-            <a:avLst/>
-          </a:prstGeom>
-          <a:noFill/>
-        </p:spPr>
-        <p:txBody>
-          <a:bodyPr wrap="square" lIns="0" rIns="0" tIns="0" bIns="0" anchor="ctr">
-            <a:spAutoFit/>
-          </a:bodyPr>
-          <a:lstStyle/>
-          <a:p>
-            <a:pPr algn="l">
-              <a:lnSpc>
-                <a:spcPct val="108000"/>
-              </a:lnSpc>
-              <a:spcBef>
-                <a:spcPts val="0"/>
-              </a:spcBef>
-              <a:spcAft>
-                <a:spcPts val="0"/>
-              </a:spcAft>
-              <a:defRPr sz="1600" b="0">
-                <a:solidFill>
-                  <a:srgbClr val="173047"/>
-                </a:solidFill>
-                <a:latin typeface="Arial"/>
-              </a:defRPr>
-            </a:pPr>
-            <a:r>
-              <a:t>+0,18 pp · intervalo [−0,80; +1,37]</a:t>
-            </a:r>
-          </a:p>
-        </p:txBody>
-      </p:sp>
-      <p:sp>
-        <p:nvSpPr>
-          <p:cNvPr id="30" name="Rounded Rectangle 29"/>
+          <p:cNvPr id="28" name="Rectangle 27"/>
           <p:cNvSpPr/>
           <p:nvPr/>
         </p:nvSpPr>
         <p:spPr>
           <a:xfrm>
-            <a:off x="609600" y="5219700"/>
-            <a:ext cx="10972800" cy="736600"/>
-          </a:xfrm>
-          <a:prstGeom prst="roundRect">
+            <a:off x="6438900" y="4152900"/>
+            <a:ext cx="5143500" cy="63500"/>
+          </a:xfrm>
+          <a:prstGeom prst="rect">
             <a:avLst/>
           </a:prstGeom>
           <a:solidFill>
-            <a:srgbClr val="EAF3F4"/>
+            <a:srgbClr val="376B91"/>
           </a:solidFill>
           <a:ln>
             <a:noFill/>
@@ -7715,14 +7831,14 @@
       </p:sp>
       <p:sp>
         <p:nvSpPr>
-          <p:cNvPr id="31" name="TextBox 30"/>
+          <p:cNvPr id="29" name="TextBox 28"/>
           <p:cNvSpPr txBox="1"/>
           <p:nvPr/>
         </p:nvSpPr>
         <p:spPr>
           <a:xfrm>
-            <a:off x="825500" y="5283200"/>
-            <a:ext cx="10528300" cy="609600"/>
+            <a:off x="6680200" y="4305300"/>
+            <a:ext cx="4686300" cy="355600"/>
           </a:xfrm>
           <a:prstGeom prst="rect">
             <a:avLst/>
@@ -7737,7 +7853,185 @@
           <a:p>
             <a:pPr algn="l">
               <a:lnSpc>
-                <a:spcPct val="108000"/>
+                <a:spcPct val="104000"/>
+              </a:lnSpc>
+              <a:spcBef>
+                <a:spcPts val="0"/>
+              </a:spcBef>
+              <a:spcAft>
+                <a:spcPts val="0"/>
+              </a:spcAft>
+              <a:defRPr sz="1500" b="1">
+                <a:solidFill>
+                  <a:srgbClr val="376B91"/>
+                </a:solidFill>
+                <a:latin typeface="Aptos"/>
+              </a:defRPr>
+            </a:pPr>
+            <a:r>
+              <a:t>FUSIÓN: T-R − E-R</a:t>
+            </a:r>
+          </a:p>
+        </p:txBody>
+      </p:sp>
+      <p:sp>
+        <p:nvSpPr>
+          <p:cNvPr id="30" name="TextBox 29"/>
+          <p:cNvSpPr txBox="1"/>
+          <p:nvPr/>
+        </p:nvSpPr>
+        <p:spPr>
+          <a:xfrm>
+            <a:off x="6680200" y="4699000"/>
+            <a:ext cx="4660900" cy="279400"/>
+          </a:xfrm>
+          <a:prstGeom prst="rect">
+            <a:avLst/>
+          </a:prstGeom>
+          <a:noFill/>
+        </p:spPr>
+        <p:txBody>
+          <a:bodyPr wrap="square" lIns="0" rIns="0" tIns="0" bIns="0" anchor="ctr">
+            <a:spAutoFit/>
+          </a:bodyPr>
+          <a:lstStyle/>
+          <a:p>
+            <a:pPr algn="l">
+              <a:lnSpc>
+                <a:spcPct val="104000"/>
+              </a:lnSpc>
+              <a:spcBef>
+                <a:spcPts val="0"/>
+              </a:spcBef>
+              <a:spcAft>
+                <a:spcPts val="0"/>
+              </a:spcAft>
+              <a:defRPr sz="1600" b="0">
+                <a:solidFill>
+                  <a:srgbClr val="173348"/>
+                </a:solidFill>
+                <a:latin typeface="Aptos"/>
+              </a:defRPr>
+            </a:pPr>
+            <a:r>
+              <a:t>+0,18 pp · intervalo [−0,80; +1,37]</a:t>
+            </a:r>
+          </a:p>
+        </p:txBody>
+      </p:sp>
+      <p:sp>
+        <p:nvSpPr>
+          <p:cNvPr id="31" name="Rounded Rectangle 30"/>
+          <p:cNvSpPr/>
+          <p:nvPr/>
+        </p:nvSpPr>
+        <p:spPr>
+          <a:xfrm>
+            <a:off x="609600" y="5219700"/>
+            <a:ext cx="10972800" cy="736600"/>
+          </a:xfrm>
+          <a:prstGeom prst="roundRect">
+            <a:avLst>
+              <a:gd name="adj" fmla="val 10000"/>
+            </a:avLst>
+          </a:prstGeom>
+          <a:solidFill>
+            <a:srgbClr val="F9EBE5"/>
+          </a:solidFill>
+          <a:ln>
+            <a:noFill/>
+          </a:ln>
+        </p:spPr>
+        <p:style>
+          <a:lnRef idx="1">
+            <a:schemeClr val="accent1"/>
+          </a:lnRef>
+          <a:fillRef idx="3">
+            <a:schemeClr val="accent1"/>
+          </a:fillRef>
+          <a:effectRef idx="2">
+            <a:schemeClr val="accent1"/>
+          </a:effectRef>
+          <a:fontRef idx="minor">
+            <a:schemeClr val="lt1"/>
+          </a:fontRef>
+        </p:style>
+        <p:txBody>
+          <a:bodyPr rtlCol="0" anchor="ctr"/>
+          <a:lstStyle/>
+          <a:p>
+            <a:pPr algn="ctr"/>
+          </a:p>
+        </p:txBody>
+      </p:sp>
+      <p:sp>
+        <p:nvSpPr>
+          <p:cNvPr id="32" name="Rectangle 31"/>
+          <p:cNvSpPr/>
+          <p:nvPr/>
+        </p:nvSpPr>
+        <p:spPr>
+          <a:xfrm>
+            <a:off x="609600" y="5219700"/>
+            <a:ext cx="63500" cy="736600"/>
+          </a:xfrm>
+          <a:prstGeom prst="rect">
+            <a:avLst/>
+          </a:prstGeom>
+          <a:solidFill>
+            <a:srgbClr val="C66A44"/>
+          </a:solidFill>
+          <a:ln>
+            <a:noFill/>
+          </a:ln>
+        </p:spPr>
+        <p:style>
+          <a:lnRef idx="1">
+            <a:schemeClr val="accent1"/>
+          </a:lnRef>
+          <a:fillRef idx="3">
+            <a:schemeClr val="accent1"/>
+          </a:fillRef>
+          <a:effectRef idx="2">
+            <a:schemeClr val="accent1"/>
+          </a:effectRef>
+          <a:fontRef idx="minor">
+            <a:schemeClr val="lt1"/>
+          </a:fontRef>
+        </p:style>
+        <p:txBody>
+          <a:bodyPr rtlCol="0" anchor="ctr"/>
+          <a:lstStyle/>
+          <a:p>
+            <a:pPr algn="ctr"/>
+          </a:p>
+        </p:txBody>
+      </p:sp>
+      <p:sp>
+        <p:nvSpPr>
+          <p:cNvPr id="33" name="TextBox 32"/>
+          <p:cNvSpPr txBox="1"/>
+          <p:nvPr/>
+        </p:nvSpPr>
+        <p:spPr>
+          <a:xfrm>
+            <a:off x="863600" y="5283200"/>
+            <a:ext cx="10464800" cy="609600"/>
+          </a:xfrm>
+          <a:prstGeom prst="rect">
+            <a:avLst/>
+          </a:prstGeom>
+          <a:noFill/>
+        </p:spPr>
+        <p:txBody>
+          <a:bodyPr wrap="square" lIns="0" rIns="0" tIns="0" bIns="0" anchor="ctr">
+            <a:spAutoFit/>
+          </a:bodyPr>
+          <a:lstStyle/>
+          <a:p>
+            <a:pPr algn="l">
+              <a:lnSpc>
+                <a:spcPct val="104000"/>
               </a:lnSpc>
               <a:spcBef>
                 <a:spcPts val="0"/>
@@ -7747,9 +8041,9 @@
               </a:spcAft>
               <a:defRPr sz="1800" b="1">
                 <a:solidFill>
-                  <a:srgbClr val="A45A22"/>
+                  <a:srgbClr val="C66A44"/>
                 </a:solidFill>
-                <a:latin typeface="Arial"/>
+                <a:latin typeface="Aptos"/>
               </a:defRPr>
             </a:pPr>
             <a:r>
@@ -7772,7 +8066,7 @@
     <p:bg>
       <p:bgPr>
         <a:solidFill>
-          <a:srgbClr val="FFFFFF"/>
+          <a:srgbClr val="F7F8F5"/>
         </a:solidFill>
         <a:effectLst/>
       </p:bgPr>
@@ -7793,13 +8087,13 @@
         <p:spPr>
           <a:xfrm>
             <a:off x="0" y="0"/>
-            <a:ext cx="12192000" cy="88900"/>
+            <a:ext cx="12192000" cy="76200"/>
           </a:xfrm>
           <a:prstGeom prst="rect">
             <a:avLst/>
           </a:prstGeom>
           <a:solidFill>
-            <a:srgbClr val="102B42"/>
+            <a:srgbClr val="087E83"/>
           </a:solidFill>
           <a:ln>
             <a:noFill/>
@@ -7851,7 +8145,7 @@
           <a:p>
             <a:pPr algn="l">
               <a:lnSpc>
-                <a:spcPct val="108000"/>
+                <a:spcPct val="104000"/>
               </a:lnSpc>
               <a:spcBef>
                 <a:spcPts val="0"/>
@@ -7861,13 +8155,13 @@
               </a:spcAft>
               <a:defRPr sz="1100" b="1">
                 <a:solidFill>
-                  <a:srgbClr val="087F86"/>
+                  <a:srgbClr val="087E83"/>
                 </a:solidFill>
-                <a:latin typeface="Arial"/>
+                <a:latin typeface="Aptos"/>
               </a:defRPr>
             </a:pPr>
             <a:r>
-              <a:t>DIAGNÓSTICO DEL CONTRASTE</a:t>
+              <a:t>05  /  DIAGNÓSTICO DEL CONTRASTE</a:t>
             </a:r>
           </a:p>
         </p:txBody>
@@ -7881,7 +8175,7 @@
         <p:spPr>
           <a:xfrm>
             <a:off x="609600" y="723900"/>
-            <a:ext cx="10972800" cy="939800"/>
+            <a:ext cx="10972800" cy="990600"/>
           </a:xfrm>
           <a:prstGeom prst="rect">
             <a:avLst/>
@@ -7896,7 +8190,7 @@
           <a:p>
             <a:pPr algn="l">
               <a:lnSpc>
-                <a:spcPct val="108000"/>
+                <a:spcPct val="104000"/>
               </a:lnSpc>
               <a:spcBef>
                 <a:spcPts val="0"/>
@@ -7904,11 +8198,11 @@
               <a:spcAft>
                 <a:spcPts val="0"/>
               </a:spcAft>
-              <a:defRPr sz="3000" b="1">
+              <a:defRPr sz="3200" b="1">
                 <a:solidFill>
-                  <a:srgbClr val="102B42"/>
+                  <a:srgbClr val="102A3D"/>
                 </a:solidFill>
-                <a:latin typeface="Arial"/>
+                <a:latin typeface="Aptos"/>
               </a:defRPr>
             </a:pPr>
             <a:r>
@@ -7925,14 +8219,14 @@
         </p:nvSpPr>
         <p:spPr>
           <a:xfrm>
-            <a:off x="609600" y="6096000"/>
+            <a:off x="609600" y="6134100"/>
             <a:ext cx="10972800" cy="12700"/>
           </a:xfrm>
           <a:prstGeom prst="rect">
             <a:avLst/>
           </a:prstGeom>
           <a:solidFill>
-            <a:srgbClr val="D4DFE5"/>
+            <a:srgbClr val="D9E2E3"/>
           </a:solidFill>
           <a:ln>
             <a:noFill/>
@@ -7962,110 +8256,20 @@
       </p:sp>
       <p:sp>
         <p:nvSpPr>
-          <p:cNvPr id="6" name="TextBox 5"/>
-          <p:cNvSpPr txBox="1"/>
-          <p:nvPr/>
-        </p:nvSpPr>
-        <p:spPr>
-          <a:xfrm>
-            <a:off x="609600" y="6197600"/>
-            <a:ext cx="10223500" cy="469900"/>
-          </a:xfrm>
-          <a:prstGeom prst="rect">
-            <a:avLst/>
-          </a:prstGeom>
-          <a:noFill/>
-        </p:spPr>
-        <p:txBody>
-          <a:bodyPr wrap="square" lIns="0" rIns="0" tIns="0" bIns="0" anchor="ctr">
-            <a:spAutoFit/>
-          </a:bodyPr>
-          <a:lstStyle/>
-          <a:p>
-            <a:pPr algn="l">
-              <a:lnSpc>
-                <a:spcPct val="108000"/>
-              </a:lnSpc>
-              <a:spcBef>
-                <a:spcPts val="0"/>
-              </a:spcBef>
-              <a:spcAft>
-                <a:spcPts val="0"/>
-              </a:spcAft>
-              <a:defRPr sz="900" b="0">
-                <a:solidFill>
-                  <a:srgbClr val="536675"/>
-                </a:solidFill>
-                <a:latin typeface="Arial"/>
-              </a:defRPr>
-            </a:pPr>
-            <a:r>
-              <a:t>Fuente: Contraste_Temporalidad_Fusion_24-10-2026.md; diagnóstico por clase</a:t>
-            </a:r>
-          </a:p>
-        </p:txBody>
-      </p:sp>
-      <p:sp>
-        <p:nvSpPr>
-          <p:cNvPr id="7" name="TextBox 6"/>
-          <p:cNvSpPr txBox="1"/>
-          <p:nvPr/>
-        </p:nvSpPr>
-        <p:spPr>
-          <a:xfrm>
-            <a:off x="10896600" y="6210300"/>
-            <a:ext cx="660400" cy="279400"/>
-          </a:xfrm>
-          <a:prstGeom prst="rect">
-            <a:avLst/>
-          </a:prstGeom>
-          <a:noFill/>
-        </p:spPr>
-        <p:txBody>
-          <a:bodyPr wrap="square" lIns="0" rIns="0" tIns="0" bIns="0" anchor="ctr">
-            <a:spAutoFit/>
-          </a:bodyPr>
-          <a:lstStyle/>
-          <a:p>
-            <a:pPr algn="r">
-              <a:lnSpc>
-                <a:spcPct val="108000"/>
-              </a:lnSpc>
-              <a:spcBef>
-                <a:spcPts val="0"/>
-              </a:spcBef>
-              <a:spcAft>
-                <a:spcPts val="0"/>
-              </a:spcAft>
-              <a:defRPr sz="1000" b="1">
-                <a:solidFill>
-                  <a:srgbClr val="536675"/>
-                </a:solidFill>
-                <a:latin typeface="Arial"/>
-              </a:defRPr>
-            </a:pPr>
-            <a:r>
-              <a:t>5 / 8</a:t>
-            </a:r>
-          </a:p>
-        </p:txBody>
-      </p:sp>
-      <p:sp>
-        <p:nvSpPr>
-          <p:cNvPr id="8" name="Rounded Rectangle 7"/>
+          <p:cNvPr id="6" name="Rectangle 5"/>
           <p:cNvSpPr/>
           <p:nvPr/>
         </p:nvSpPr>
         <p:spPr>
           <a:xfrm>
-            <a:off x="609600" y="1905000"/>
-            <a:ext cx="5143500" cy="2070100"/>
-          </a:xfrm>
-          <a:prstGeom prst="roundRect">
+            <a:off x="609600" y="6083300"/>
+            <a:ext cx="6858000" cy="38100"/>
+          </a:xfrm>
+          <a:prstGeom prst="rect">
             <a:avLst/>
           </a:prstGeom>
           <a:solidFill>
-            <a:srgbClr val="F7F9FB"/>
+            <a:srgbClr val="087E83"/>
           </a:solidFill>
           <a:ln>
             <a:noFill/>
@@ -8095,20 +8299,112 @@
       </p:sp>
       <p:sp>
         <p:nvSpPr>
-          <p:cNvPr id="9" name="Rectangle 8"/>
+          <p:cNvPr id="7" name="TextBox 6"/>
+          <p:cNvSpPr txBox="1"/>
+          <p:nvPr/>
+        </p:nvSpPr>
+        <p:spPr>
+          <a:xfrm>
+            <a:off x="609600" y="6235700"/>
+            <a:ext cx="10223500" cy="444500"/>
+          </a:xfrm>
+          <a:prstGeom prst="rect">
+            <a:avLst/>
+          </a:prstGeom>
+          <a:noFill/>
+        </p:spPr>
+        <p:txBody>
+          <a:bodyPr wrap="square" lIns="0" rIns="0" tIns="0" bIns="0" anchor="ctr">
+            <a:spAutoFit/>
+          </a:bodyPr>
+          <a:lstStyle/>
+          <a:p>
+            <a:pPr algn="l">
+              <a:lnSpc>
+                <a:spcPct val="104000"/>
+              </a:lnSpc>
+              <a:spcBef>
+                <a:spcPts val="0"/>
+              </a:spcBef>
+              <a:spcAft>
+                <a:spcPts val="0"/>
+              </a:spcAft>
+              <a:defRPr sz="900" b="0">
+                <a:solidFill>
+                  <a:srgbClr val="5D7180"/>
+                </a:solidFill>
+                <a:latin typeface="Aptos"/>
+              </a:defRPr>
+            </a:pPr>
+            <a:r>
+              <a:t>Fuente: Contraste_Temporalidad_Fusion_24-10-2026.md; diagnóstico por clase</a:t>
+            </a:r>
+          </a:p>
+        </p:txBody>
+      </p:sp>
+      <p:sp>
+        <p:nvSpPr>
+          <p:cNvPr id="8" name="TextBox 7"/>
+          <p:cNvSpPr txBox="1"/>
+          <p:nvPr/>
+        </p:nvSpPr>
+        <p:spPr>
+          <a:xfrm>
+            <a:off x="10820400" y="6235700"/>
+            <a:ext cx="736600" cy="279400"/>
+          </a:xfrm>
+          <a:prstGeom prst="rect">
+            <a:avLst/>
+          </a:prstGeom>
+          <a:noFill/>
+        </p:spPr>
+        <p:txBody>
+          <a:bodyPr wrap="square" lIns="0" rIns="0" tIns="0" bIns="0" anchor="ctr">
+            <a:spAutoFit/>
+          </a:bodyPr>
+          <a:lstStyle/>
+          <a:p>
+            <a:pPr algn="r">
+              <a:lnSpc>
+                <a:spcPct val="104000"/>
+              </a:lnSpc>
+              <a:spcBef>
+                <a:spcPts val="0"/>
+              </a:spcBef>
+              <a:spcAft>
+                <a:spcPts val="0"/>
+              </a:spcAft>
+              <a:defRPr sz="1000" b="1">
+                <a:solidFill>
+                  <a:srgbClr val="5D7180"/>
+                </a:solidFill>
+                <a:latin typeface="Aptos"/>
+              </a:defRPr>
+            </a:pPr>
+            <a:r>
+              <a:t>05 / 08</a:t>
+            </a:r>
+          </a:p>
+        </p:txBody>
+      </p:sp>
+      <p:sp>
+        <p:nvSpPr>
+          <p:cNvPr id="9" name="Rounded Rectangle 8"/>
           <p:cNvSpPr/>
           <p:nvPr/>
         </p:nvSpPr>
         <p:spPr>
           <a:xfrm>
             <a:off x="609600" y="1905000"/>
-            <a:ext cx="63500" cy="2070100"/>
-          </a:xfrm>
-          <a:prstGeom prst="rect">
-            <a:avLst/>
+            <a:ext cx="5143500" cy="2070100"/>
+          </a:xfrm>
+          <a:prstGeom prst="roundRect">
+            <a:avLst>
+              <a:gd name="adj" fmla="val 10000"/>
+            </a:avLst>
           </a:prstGeom>
           <a:solidFill>
-            <a:srgbClr val="A45A22"/>
+            <a:srgbClr val="FFFFFF"/>
           </a:solidFill>
           <a:ln>
             <a:noFill/>
@@ -8138,110 +8434,20 @@
       </p:sp>
       <p:sp>
         <p:nvSpPr>
-          <p:cNvPr id="10" name="TextBox 9"/>
-          <p:cNvSpPr txBox="1"/>
-          <p:nvPr/>
-        </p:nvSpPr>
-        <p:spPr>
-          <a:xfrm>
-            <a:off x="850900" y="2057400"/>
-            <a:ext cx="4686300" cy="381000"/>
-          </a:xfrm>
-          <a:prstGeom prst="rect">
-            <a:avLst/>
-          </a:prstGeom>
-          <a:noFill/>
-        </p:spPr>
-        <p:txBody>
-          <a:bodyPr wrap="square" lIns="0" rIns="0" tIns="0" bIns="0" anchor="ctr">
-            <a:spAutoFit/>
-          </a:bodyPr>
-          <a:lstStyle/>
-          <a:p>
-            <a:pPr algn="l">
-              <a:lnSpc>
-                <a:spcPct val="108000"/>
-              </a:lnSpc>
-              <a:spcBef>
-                <a:spcPts val="0"/>
-              </a:spcBef>
-              <a:spcAft>
-                <a:spcPts val="0"/>
-              </a:spcAft>
-              <a:defRPr sz="1600" b="1">
-                <a:solidFill>
-                  <a:srgbClr val="A45A22"/>
-                </a:solidFill>
-                <a:latin typeface="Arial"/>
-              </a:defRPr>
-            </a:pPr>
-            <a:r>
-              <a:t>ACTIVACIÓN · CLASE MEDIA</a:t>
-            </a:r>
-          </a:p>
-        </p:txBody>
-      </p:sp>
-      <p:sp>
-        <p:nvSpPr>
-          <p:cNvPr id="11" name="TextBox 10"/>
-          <p:cNvSpPr txBox="1"/>
-          <p:nvPr/>
-        </p:nvSpPr>
-        <p:spPr>
-          <a:xfrm>
-            <a:off x="850900" y="2514600"/>
-            <a:ext cx="4660900" cy="1320800"/>
-          </a:xfrm>
-          <a:prstGeom prst="rect">
-            <a:avLst/>
-          </a:prstGeom>
-          <a:noFill/>
-        </p:spPr>
-        <p:txBody>
-          <a:bodyPr wrap="square" lIns="0" rIns="0" tIns="0" bIns="0" anchor="ctr">
-            <a:spAutoFit/>
-          </a:bodyPr>
-          <a:lstStyle/>
-          <a:p>
-            <a:pPr algn="l">
-              <a:lnSpc>
-                <a:spcPct val="108000"/>
-              </a:lnSpc>
-              <a:spcBef>
-                <a:spcPts val="0"/>
-              </a:spcBef>
-              <a:spcAft>
-                <a:spcPts val="0"/>
-              </a:spcAft>
-              <a:defRPr sz="1900" b="0">
-                <a:solidFill>
-                  <a:srgbClr val="173047"/>
-                </a:solidFill>
-                <a:latin typeface="Arial"/>
-              </a:defRPr>
-            </a:pPr>
-            <a:r>
-              <a:t>Al pasar de fusión temprana con historial (E-R) a tardía (T-R), el recall cae de 23,4 % a 8,2 %.</a:t>
-            </a:r>
-          </a:p>
-        </p:txBody>
-      </p:sp>
-      <p:sp>
-        <p:nvSpPr>
-          <p:cNvPr id="12" name="Rounded Rectangle 11"/>
+          <p:cNvPr id="10" name="Rectangle 9"/>
           <p:cNvSpPr/>
           <p:nvPr/>
         </p:nvSpPr>
         <p:spPr>
           <a:xfrm>
-            <a:off x="6438900" y="1905000"/>
-            <a:ext cx="5143500" cy="2070100"/>
-          </a:xfrm>
-          <a:prstGeom prst="roundRect">
+            <a:off x="609600" y="1905000"/>
+            <a:ext cx="5143500" cy="63500"/>
+          </a:xfrm>
+          <a:prstGeom prst="rect">
             <a:avLst/>
           </a:prstGeom>
           <a:solidFill>
-            <a:srgbClr val="F7F9FB"/>
+            <a:srgbClr val="C66A44"/>
           </a:solidFill>
           <a:ln>
             <a:noFill/>
@@ -8271,20 +8477,247 @@
       </p:sp>
       <p:sp>
         <p:nvSpPr>
-          <p:cNvPr id="13" name="Rectangle 12"/>
+          <p:cNvPr id="11" name="TextBox 10"/>
+          <p:cNvSpPr txBox="1"/>
+          <p:nvPr/>
+        </p:nvSpPr>
+        <p:spPr>
+          <a:xfrm>
+            <a:off x="850900" y="2095500"/>
+            <a:ext cx="4635500" cy="342900"/>
+          </a:xfrm>
+          <a:prstGeom prst="rect">
+            <a:avLst/>
+          </a:prstGeom>
+          <a:noFill/>
+        </p:spPr>
+        <p:txBody>
+          <a:bodyPr wrap="square" lIns="0" rIns="0" tIns="0" bIns="0" anchor="ctr">
+            <a:spAutoFit/>
+          </a:bodyPr>
+          <a:lstStyle/>
+          <a:p>
+            <a:pPr algn="l">
+              <a:lnSpc>
+                <a:spcPct val="104000"/>
+              </a:lnSpc>
+              <a:spcBef>
+                <a:spcPts val="0"/>
+              </a:spcBef>
+              <a:spcAft>
+                <a:spcPts val="0"/>
+              </a:spcAft>
+              <a:defRPr sz="1500" b="1">
+                <a:solidFill>
+                  <a:srgbClr val="C66A44"/>
+                </a:solidFill>
+                <a:latin typeface="Aptos"/>
+              </a:defRPr>
+            </a:pPr>
+            <a:r>
+              <a:t>ACTIVACIÓN · CLASE MEDIA</a:t>
+            </a:r>
+          </a:p>
+        </p:txBody>
+      </p:sp>
+      <p:sp>
+        <p:nvSpPr>
+          <p:cNvPr id="12" name="TextBox 11"/>
+          <p:cNvSpPr txBox="1"/>
+          <p:nvPr/>
+        </p:nvSpPr>
+        <p:spPr>
+          <a:xfrm>
+            <a:off x="863600" y="2578100"/>
+            <a:ext cx="2159000" cy="622300"/>
+          </a:xfrm>
+          <a:prstGeom prst="rect">
+            <a:avLst/>
+          </a:prstGeom>
+          <a:noFill/>
+        </p:spPr>
+        <p:txBody>
+          <a:bodyPr wrap="square" lIns="0" rIns="0" tIns="0" bIns="0" anchor="ctr">
+            <a:spAutoFit/>
+          </a:bodyPr>
+          <a:lstStyle/>
+          <a:p>
+            <a:pPr algn="l">
+              <a:lnSpc>
+                <a:spcPct val="104000"/>
+              </a:lnSpc>
+              <a:spcBef>
+                <a:spcPts val="0"/>
+              </a:spcBef>
+              <a:spcAft>
+                <a:spcPts val="0"/>
+              </a:spcAft>
+              <a:defRPr sz="3100" b="1">
+                <a:solidFill>
+                  <a:srgbClr val="102A3D"/>
+                </a:solidFill>
+                <a:latin typeface="Aptos"/>
+              </a:defRPr>
+            </a:pPr>
+            <a:r>
+              <a:t>23,4 %</a:t>
+            </a:r>
+          </a:p>
+        </p:txBody>
+      </p:sp>
+      <p:sp>
+        <p:nvSpPr>
+          <p:cNvPr id="13" name="TextBox 12"/>
+          <p:cNvSpPr txBox="1"/>
+          <p:nvPr/>
+        </p:nvSpPr>
+        <p:spPr>
+          <a:xfrm>
+            <a:off x="2933700" y="2628900"/>
+            <a:ext cx="508000" cy="520700"/>
+          </a:xfrm>
+          <a:prstGeom prst="rect">
+            <a:avLst/>
+          </a:prstGeom>
+          <a:noFill/>
+        </p:spPr>
+        <p:txBody>
+          <a:bodyPr wrap="square" lIns="0" rIns="0" tIns="0" bIns="0" anchor="ctr">
+            <a:spAutoFit/>
+          </a:bodyPr>
+          <a:lstStyle/>
+          <a:p>
+            <a:pPr algn="l">
+              <a:lnSpc>
+                <a:spcPct val="104000"/>
+              </a:lnSpc>
+              <a:spcBef>
+                <a:spcPts val="0"/>
+              </a:spcBef>
+              <a:spcAft>
+                <a:spcPts val="0"/>
+              </a:spcAft>
+              <a:defRPr sz="2500" b="1">
+                <a:solidFill>
+                  <a:srgbClr val="C66A44"/>
+                </a:solidFill>
+                <a:latin typeface="Aptos"/>
+              </a:defRPr>
+            </a:pPr>
+            <a:r>
+              <a:t>→</a:t>
+            </a:r>
+          </a:p>
+        </p:txBody>
+      </p:sp>
+      <p:sp>
+        <p:nvSpPr>
+          <p:cNvPr id="14" name="TextBox 13"/>
+          <p:cNvSpPr txBox="1"/>
+          <p:nvPr/>
+        </p:nvSpPr>
+        <p:spPr>
+          <a:xfrm>
+            <a:off x="3556000" y="2578100"/>
+            <a:ext cx="1930400" cy="622300"/>
+          </a:xfrm>
+          <a:prstGeom prst="rect">
+            <a:avLst/>
+          </a:prstGeom>
+          <a:noFill/>
+        </p:spPr>
+        <p:txBody>
+          <a:bodyPr wrap="square" lIns="0" rIns="0" tIns="0" bIns="0" anchor="ctr">
+            <a:spAutoFit/>
+          </a:bodyPr>
+          <a:lstStyle/>
+          <a:p>
+            <a:pPr algn="l">
+              <a:lnSpc>
+                <a:spcPct val="104000"/>
+              </a:lnSpc>
+              <a:spcBef>
+                <a:spcPts val="0"/>
+              </a:spcBef>
+              <a:spcAft>
+                <a:spcPts val="0"/>
+              </a:spcAft>
+              <a:defRPr sz="3100" b="1">
+                <a:solidFill>
+                  <a:srgbClr val="C66A44"/>
+                </a:solidFill>
+                <a:latin typeface="Aptos"/>
+              </a:defRPr>
+            </a:pPr>
+            <a:r>
+              <a:t>8,2 %</a:t>
+            </a:r>
+          </a:p>
+        </p:txBody>
+      </p:sp>
+      <p:sp>
+        <p:nvSpPr>
+          <p:cNvPr id="15" name="TextBox 14"/>
+          <p:cNvSpPr txBox="1"/>
+          <p:nvPr/>
+        </p:nvSpPr>
+        <p:spPr>
+          <a:xfrm>
+            <a:off x="863600" y="3327400"/>
+            <a:ext cx="4508500" cy="393700"/>
+          </a:xfrm>
+          <a:prstGeom prst="rect">
+            <a:avLst/>
+          </a:prstGeom>
+          <a:noFill/>
+        </p:spPr>
+        <p:txBody>
+          <a:bodyPr wrap="square" lIns="0" rIns="0" tIns="0" bIns="0" anchor="ctr">
+            <a:spAutoFit/>
+          </a:bodyPr>
+          <a:lstStyle/>
+          <a:p>
+            <a:pPr algn="l">
+              <a:lnSpc>
+                <a:spcPct val="104000"/>
+              </a:lnSpc>
+              <a:spcBef>
+                <a:spcPts val="0"/>
+              </a:spcBef>
+              <a:spcAft>
+                <a:spcPts val="0"/>
+              </a:spcAft>
+              <a:defRPr sz="1300" b="0">
+                <a:solidFill>
+                  <a:srgbClr val="5D7180"/>
+                </a:solidFill>
+                <a:latin typeface="Aptos"/>
+              </a:defRPr>
+            </a:pPr>
+            <a:r>
+              <a:t>E-R · fusión temprana       T-R · fusión tardía</a:t>
+            </a:r>
+          </a:p>
+        </p:txBody>
+      </p:sp>
+      <p:sp>
+        <p:nvSpPr>
+          <p:cNvPr id="16" name="Rounded Rectangle 15"/>
           <p:cNvSpPr/>
           <p:nvPr/>
         </p:nvSpPr>
         <p:spPr>
           <a:xfrm>
             <a:off x="6438900" y="1905000"/>
-            <a:ext cx="63500" cy="2070100"/>
-          </a:xfrm>
-          <a:prstGeom prst="rect">
-            <a:avLst/>
+            <a:ext cx="5143500" cy="2070100"/>
+          </a:xfrm>
+          <a:prstGeom prst="roundRect">
+            <a:avLst>
+              <a:gd name="adj" fmla="val 10000"/>
+            </a:avLst>
           </a:prstGeom>
           <a:solidFill>
-            <a:srgbClr val="215C80"/>
+            <a:srgbClr val="FFFFFF"/>
           </a:solidFill>
           <a:ln>
             <a:noFill/>
@@ -8314,110 +8747,20 @@
       </p:sp>
       <p:sp>
         <p:nvSpPr>
-          <p:cNvPr id="14" name="TextBox 13"/>
-          <p:cNvSpPr txBox="1"/>
-          <p:nvPr/>
-        </p:nvSpPr>
-        <p:spPr>
-          <a:xfrm>
-            <a:off x="6680200" y="2057400"/>
-            <a:ext cx="4686300" cy="381000"/>
-          </a:xfrm>
-          <a:prstGeom prst="rect">
-            <a:avLst/>
-          </a:prstGeom>
-          <a:noFill/>
-        </p:spPr>
-        <p:txBody>
-          <a:bodyPr wrap="square" lIns="0" rIns="0" tIns="0" bIns="0" anchor="ctr">
-            <a:spAutoFit/>
-          </a:bodyPr>
-          <a:lstStyle/>
-          <a:p>
-            <a:pPr algn="l">
-              <a:lnSpc>
-                <a:spcPct val="108000"/>
-              </a:lnSpc>
-              <a:spcBef>
-                <a:spcPts val="0"/>
-              </a:spcBef>
-              <a:spcAft>
-                <a:spcPts val="0"/>
-              </a:spcAft>
-              <a:defRPr sz="1600" b="1">
-                <a:solidFill>
-                  <a:srgbClr val="215C80"/>
-                </a:solidFill>
-                <a:latin typeface="Arial"/>
-              </a:defRPr>
-            </a:pPr>
-            <a:r>
-              <a:t>ATENCIÓN · OBJETIVO SECUNDARIO</a:t>
-            </a:r>
-          </a:p>
-        </p:txBody>
-      </p:sp>
-      <p:sp>
-        <p:nvSpPr>
-          <p:cNvPr id="15" name="TextBox 14"/>
-          <p:cNvSpPr txBox="1"/>
-          <p:nvPr/>
-        </p:nvSpPr>
-        <p:spPr>
-          <a:xfrm>
-            <a:off x="6680200" y="2514600"/>
-            <a:ext cx="4660900" cy="1320800"/>
-          </a:xfrm>
-          <a:prstGeom prst="rect">
-            <a:avLst/>
-          </a:prstGeom>
-          <a:noFill/>
-        </p:spPr>
-        <p:txBody>
-          <a:bodyPr wrap="square" lIns="0" rIns="0" tIns="0" bIns="0" anchor="ctr">
-            <a:spAutoFit/>
-          </a:bodyPr>
-          <a:lstStyle/>
-          <a:p>
-            <a:pPr algn="l">
-              <a:lnSpc>
-                <a:spcPct val="108000"/>
-              </a:lnSpc>
-              <a:spcBef>
-                <a:spcPts val="0"/>
-              </a:spcBef>
-              <a:spcAft>
-                <a:spcPts val="0"/>
-              </a:spcAft>
-              <a:defRPr sz="1800" b="0">
-                <a:solidFill>
-                  <a:srgbClr val="173047"/>
-                </a:solidFill>
-                <a:latin typeface="Arial"/>
-              </a:defRPr>
-            </a:pPr>
-            <a:r>
-              <a:t>El historial temprano baja BA en 0,65 pp. La fusión tardía con historial sube 1,01 pp; resultados exploratorios.</a:t>
-            </a:r>
-          </a:p>
-        </p:txBody>
-      </p:sp>
-      <p:sp>
-        <p:nvSpPr>
-          <p:cNvPr id="16" name="Rounded Rectangle 15"/>
+          <p:cNvPr id="17" name="Rectangle 16"/>
           <p:cNvSpPr/>
           <p:nvPr/>
         </p:nvSpPr>
         <p:spPr>
           <a:xfrm>
-            <a:off x="609600" y="4394200"/>
-            <a:ext cx="10972800" cy="736600"/>
-          </a:xfrm>
-          <a:prstGeom prst="roundRect">
+            <a:off x="6438900" y="1905000"/>
+            <a:ext cx="5143500" cy="63500"/>
+          </a:xfrm>
+          <a:prstGeom prst="rect">
             <a:avLst/>
           </a:prstGeom>
           <a:solidFill>
-            <a:srgbClr val="EAF3F4"/>
+            <a:srgbClr val="376B91"/>
           </a:solidFill>
           <a:ln>
             <a:noFill/>
@@ -8447,14 +8790,14 @@
       </p:sp>
       <p:sp>
         <p:nvSpPr>
-          <p:cNvPr id="17" name="TextBox 16"/>
+          <p:cNvPr id="18" name="TextBox 17"/>
           <p:cNvSpPr txBox="1"/>
           <p:nvPr/>
         </p:nvSpPr>
         <p:spPr>
           <a:xfrm>
-            <a:off x="825500" y="4457700"/>
-            <a:ext cx="10528300" cy="609600"/>
+            <a:off x="6680200" y="2120900"/>
+            <a:ext cx="4686300" cy="381000"/>
           </a:xfrm>
           <a:prstGeom prst="rect">
             <a:avLst/>
@@ -8469,7 +8812,185 @@
           <a:p>
             <a:pPr algn="l">
               <a:lnSpc>
-                <a:spcPct val="108000"/>
+                <a:spcPct val="104000"/>
+              </a:lnSpc>
+              <a:spcBef>
+                <a:spcPts val="0"/>
+              </a:spcBef>
+              <a:spcAft>
+                <a:spcPts val="0"/>
+              </a:spcAft>
+              <a:defRPr sz="1600" b="1">
+                <a:solidFill>
+                  <a:srgbClr val="376B91"/>
+                </a:solidFill>
+                <a:latin typeface="Aptos"/>
+              </a:defRPr>
+            </a:pPr>
+            <a:r>
+              <a:t>ATENCIÓN · OBJETIVO SECUNDARIO</a:t>
+            </a:r>
+          </a:p>
+        </p:txBody>
+      </p:sp>
+      <p:sp>
+        <p:nvSpPr>
+          <p:cNvPr id="19" name="TextBox 18"/>
+          <p:cNvSpPr txBox="1"/>
+          <p:nvPr/>
+        </p:nvSpPr>
+        <p:spPr>
+          <a:xfrm>
+            <a:off x="6680200" y="2590800"/>
+            <a:ext cx="4660900" cy="1270000"/>
+          </a:xfrm>
+          <a:prstGeom prst="rect">
+            <a:avLst/>
+          </a:prstGeom>
+          <a:noFill/>
+        </p:spPr>
+        <p:txBody>
+          <a:bodyPr wrap="square" lIns="0" rIns="0" tIns="0" bIns="0" anchor="ctr">
+            <a:spAutoFit/>
+          </a:bodyPr>
+          <a:lstStyle/>
+          <a:p>
+            <a:pPr algn="l">
+              <a:lnSpc>
+                <a:spcPct val="104000"/>
+              </a:lnSpc>
+              <a:spcBef>
+                <a:spcPts val="0"/>
+              </a:spcBef>
+              <a:spcAft>
+                <a:spcPts val="0"/>
+              </a:spcAft>
+              <a:defRPr sz="1800" b="0">
+                <a:solidFill>
+                  <a:srgbClr val="173348"/>
+                </a:solidFill>
+                <a:latin typeface="Aptos"/>
+              </a:defRPr>
+            </a:pPr>
+            <a:r>
+              <a:t>El historial temprano baja BA en 0,65 pp. La fusión tardía con historial sube 1,01 pp; resultados exploratorios.</a:t>
+            </a:r>
+          </a:p>
+        </p:txBody>
+      </p:sp>
+      <p:sp>
+        <p:nvSpPr>
+          <p:cNvPr id="20" name="Rounded Rectangle 19"/>
+          <p:cNvSpPr/>
+          <p:nvPr/>
+        </p:nvSpPr>
+        <p:spPr>
+          <a:xfrm>
+            <a:off x="609600" y="4394200"/>
+            <a:ext cx="10972800" cy="736600"/>
+          </a:xfrm>
+          <a:prstGeom prst="roundRect">
+            <a:avLst>
+              <a:gd name="adj" fmla="val 10000"/>
+            </a:avLst>
+          </a:prstGeom>
+          <a:solidFill>
+            <a:srgbClr val="DDF0ED"/>
+          </a:solidFill>
+          <a:ln>
+            <a:noFill/>
+          </a:ln>
+        </p:spPr>
+        <p:style>
+          <a:lnRef idx="1">
+            <a:schemeClr val="accent1"/>
+          </a:lnRef>
+          <a:fillRef idx="3">
+            <a:schemeClr val="accent1"/>
+          </a:fillRef>
+          <a:effectRef idx="2">
+            <a:schemeClr val="accent1"/>
+          </a:effectRef>
+          <a:fontRef idx="minor">
+            <a:schemeClr val="lt1"/>
+          </a:fontRef>
+        </p:style>
+        <p:txBody>
+          <a:bodyPr rtlCol="0" anchor="ctr"/>
+          <a:lstStyle/>
+          <a:p>
+            <a:pPr algn="ctr"/>
+          </a:p>
+        </p:txBody>
+      </p:sp>
+      <p:sp>
+        <p:nvSpPr>
+          <p:cNvPr id="21" name="Rectangle 20"/>
+          <p:cNvSpPr/>
+          <p:nvPr/>
+        </p:nvSpPr>
+        <p:spPr>
+          <a:xfrm>
+            <a:off x="609600" y="4394200"/>
+            <a:ext cx="63500" cy="736600"/>
+          </a:xfrm>
+          <a:prstGeom prst="rect">
+            <a:avLst/>
+          </a:prstGeom>
+          <a:solidFill>
+            <a:srgbClr val="102A3D"/>
+          </a:solidFill>
+          <a:ln>
+            <a:noFill/>
+          </a:ln>
+        </p:spPr>
+        <p:style>
+          <a:lnRef idx="1">
+            <a:schemeClr val="accent1"/>
+          </a:lnRef>
+          <a:fillRef idx="3">
+            <a:schemeClr val="accent1"/>
+          </a:fillRef>
+          <a:effectRef idx="2">
+            <a:schemeClr val="accent1"/>
+          </a:effectRef>
+          <a:fontRef idx="minor">
+            <a:schemeClr val="lt1"/>
+          </a:fontRef>
+        </p:style>
+        <p:txBody>
+          <a:bodyPr rtlCol="0" anchor="ctr"/>
+          <a:lstStyle/>
+          <a:p>
+            <a:pPr algn="ctr"/>
+          </a:p>
+        </p:txBody>
+      </p:sp>
+      <p:sp>
+        <p:nvSpPr>
+          <p:cNvPr id="22" name="TextBox 21"/>
+          <p:cNvSpPr txBox="1"/>
+          <p:nvPr/>
+        </p:nvSpPr>
+        <p:spPr>
+          <a:xfrm>
+            <a:off x="863600" y="4457700"/>
+            <a:ext cx="10464800" cy="609600"/>
+          </a:xfrm>
+          <a:prstGeom prst="rect">
+            <a:avLst/>
+          </a:prstGeom>
+          <a:noFill/>
+        </p:spPr>
+        <p:txBody>
+          <a:bodyPr wrap="square" lIns="0" rIns="0" tIns="0" bIns="0" anchor="ctr">
+            <a:spAutoFit/>
+          </a:bodyPr>
+          <a:lstStyle/>
+          <a:p>
+            <a:pPr algn="l">
+              <a:lnSpc>
+                <a:spcPct val="104000"/>
               </a:lnSpc>
               <a:spcBef>
                 <a:spcPts val="0"/>
@@ -8479,9 +9000,9 @@
               </a:spcAft>
               <a:defRPr sz="1800" b="1">
                 <a:solidFill>
-                  <a:srgbClr val="102B42"/>
+                  <a:srgbClr val="102A3D"/>
                 </a:solidFill>
-                <a:latin typeface="Arial"/>
+                <a:latin typeface="Aptos"/>
               </a:defRPr>
             </a:pPr>
             <a:r>
@@ -8492,7 +9013,7 @@
       </p:sp>
       <p:sp>
         <p:nvSpPr>
-          <p:cNvPr id="18" name="TextBox 17"/>
+          <p:cNvPr id="23" name="TextBox 22"/>
           <p:cNvSpPr txBox="1"/>
           <p:nvPr/>
         </p:nvSpPr>
@@ -8514,7 +9035,7 @@
           <a:p>
             <a:pPr algn="l">
               <a:lnSpc>
-                <a:spcPct val="108000"/>
+                <a:spcPct val="104000"/>
               </a:lnSpc>
               <a:spcBef>
                 <a:spcPts val="0"/>
@@ -8524,9 +9045,9 @@
               </a:spcAft>
               <a:defRPr sz="1500" b="0">
                 <a:solidFill>
-                  <a:srgbClr val="536675"/>
+                  <a:srgbClr val="5D7180"/>
                 </a:solidFill>
-                <a:latin typeface="Arial"/>
+                <a:latin typeface="Aptos"/>
               </a:defRPr>
             </a:pPr>
             <a:r>
@@ -8549,7 +9070,7 @@
     <p:bg>
       <p:bgPr>
         <a:solidFill>
-          <a:srgbClr val="FFFFFF"/>
+          <a:srgbClr val="F7F8F5"/>
         </a:solidFill>
         <a:effectLst/>
       </p:bgPr>
@@ -8570,13 +9091,13 @@
         <p:spPr>
           <a:xfrm>
             <a:off x="0" y="0"/>
-            <a:ext cx="12192000" cy="88900"/>
+            <a:ext cx="12192000" cy="76200"/>
           </a:xfrm>
           <a:prstGeom prst="rect">
             <a:avLst/>
           </a:prstGeom>
           <a:solidFill>
-            <a:srgbClr val="102B42"/>
+            <a:srgbClr val="087E83"/>
           </a:solidFill>
           <a:ln>
             <a:noFill/>
@@ -8628,7 +9149,7 @@
           <a:p>
             <a:pPr algn="l">
               <a:lnSpc>
-                <a:spcPct val="108000"/>
+                <a:spcPct val="104000"/>
               </a:lnSpc>
               <a:spcBef>
                 <a:spcPts val="0"/>
@@ -8638,13 +9159,13 @@
               </a:spcAft>
               <a:defRPr sz="1100" b="1">
                 <a:solidFill>
-                  <a:srgbClr val="087F86"/>
+                  <a:srgbClr val="087E83"/>
                 </a:solidFill>
-                <a:latin typeface="Arial"/>
+                <a:latin typeface="Aptos"/>
               </a:defRPr>
             </a:pPr>
             <a:r>
-              <a:t>RIDGE DE ACTIVACIÓN · EVALUACIÓN ADICIONAL</a:t>
+              <a:t>06  /  RIDGE DE ACTIVACIÓN · EVALUACIÓN ADICIONAL</a:t>
             </a:r>
           </a:p>
         </p:txBody>
@@ -8658,7 +9179,7 @@
         <p:spPr>
           <a:xfrm>
             <a:off x="609600" y="723900"/>
-            <a:ext cx="10972800" cy="939800"/>
+            <a:ext cx="10972800" cy="990600"/>
           </a:xfrm>
           <a:prstGeom prst="rect">
             <a:avLst/>
@@ -8673,7 +9194,7 @@
           <a:p>
             <a:pPr algn="l">
               <a:lnSpc>
-                <a:spcPct val="108000"/>
+                <a:spcPct val="104000"/>
               </a:lnSpc>
               <a:spcBef>
                 <a:spcPts val="0"/>
@@ -8681,11 +9202,11 @@
               <a:spcAft>
                 <a:spcPts val="0"/>
               </a:spcAft>
-              <a:defRPr sz="3000" b="1">
+              <a:defRPr sz="3200" b="1">
                 <a:solidFill>
-                  <a:srgbClr val="102B42"/>
+                  <a:srgbClr val="102A3D"/>
                 </a:solidFill>
-                <a:latin typeface="Arial"/>
+                <a:latin typeface="Aptos"/>
               </a:defRPr>
             </a:pPr>
             <a:r>
@@ -8702,14 +9223,14 @@
         </p:nvSpPr>
         <p:spPr>
           <a:xfrm>
-            <a:off x="609600" y="6096000"/>
+            <a:off x="609600" y="6134100"/>
             <a:ext cx="10972800" cy="12700"/>
           </a:xfrm>
           <a:prstGeom prst="rect">
             <a:avLst/>
           </a:prstGeom>
           <a:solidFill>
-            <a:srgbClr val="D4DFE5"/>
+            <a:srgbClr val="D9E2E3"/>
           </a:solidFill>
           <a:ln>
             <a:noFill/>
@@ -8739,155 +9260,20 @@
       </p:sp>
       <p:sp>
         <p:nvSpPr>
-          <p:cNvPr id="6" name="TextBox 5"/>
-          <p:cNvSpPr txBox="1"/>
-          <p:nvPr/>
-        </p:nvSpPr>
-        <p:spPr>
-          <a:xfrm>
-            <a:off x="609600" y="6197600"/>
-            <a:ext cx="10223500" cy="469900"/>
-          </a:xfrm>
-          <a:prstGeom prst="rect">
-            <a:avLst/>
-          </a:prstGeom>
-          <a:noFill/>
-        </p:spPr>
-        <p:txBody>
-          <a:bodyPr wrap="square" lIns="0" rIns="0" tIns="0" bIns="0" anchor="ctr">
-            <a:spAutoFit/>
-          </a:bodyPr>
-          <a:lstStyle/>
-          <a:p>
-            <a:pPr algn="l">
-              <a:lnSpc>
-                <a:spcPct val="108000"/>
-              </a:lnSpc>
-              <a:spcBef>
-                <a:spcPts val="0"/>
-              </a:spcBef>
-              <a:spcAft>
-                <a:spcPts val="0"/>
-              </a:spcAft>
-              <a:defRPr sz="900" b="0">
-                <a:solidFill>
-                  <a:srgbClr val="536675"/>
-                </a:solidFill>
-                <a:latin typeface="Arial"/>
-              </a:defRPr>
-            </a:pPr>
-            <a:r>
-              <a:t>Fuentes: Evaluacion_Independiente_y_Validez_24-10-2026.md; Robustez_Sin_Cohorte_Nueva_24-10-2026.md</a:t>
-            </a:r>
-          </a:p>
-        </p:txBody>
-      </p:sp>
-      <p:sp>
-        <p:nvSpPr>
-          <p:cNvPr id="7" name="TextBox 6"/>
-          <p:cNvSpPr txBox="1"/>
-          <p:nvPr/>
-        </p:nvSpPr>
-        <p:spPr>
-          <a:xfrm>
-            <a:off x="10896600" y="6210300"/>
-            <a:ext cx="660400" cy="279400"/>
-          </a:xfrm>
-          <a:prstGeom prst="rect">
-            <a:avLst/>
-          </a:prstGeom>
-          <a:noFill/>
-        </p:spPr>
-        <p:txBody>
-          <a:bodyPr wrap="square" lIns="0" rIns="0" tIns="0" bIns="0" anchor="ctr">
-            <a:spAutoFit/>
-          </a:bodyPr>
-          <a:lstStyle/>
-          <a:p>
-            <a:pPr algn="r">
-              <a:lnSpc>
-                <a:spcPct val="108000"/>
-              </a:lnSpc>
-              <a:spcBef>
-                <a:spcPts val="0"/>
-              </a:spcBef>
-              <a:spcAft>
-                <a:spcPts val="0"/>
-              </a:spcAft>
-              <a:defRPr sz="1000" b="1">
-                <a:solidFill>
-                  <a:srgbClr val="536675"/>
-                </a:solidFill>
-                <a:latin typeface="Arial"/>
-              </a:defRPr>
-            </a:pPr>
-            <a:r>
-              <a:t>6 / 8</a:t>
-            </a:r>
-          </a:p>
-        </p:txBody>
-      </p:sp>
-      <p:sp>
-        <p:nvSpPr>
-          <p:cNvPr id="8" name="TextBox 7"/>
-          <p:cNvSpPr txBox="1"/>
-          <p:nvPr/>
-        </p:nvSpPr>
-        <p:spPr>
-          <a:xfrm>
-            <a:off x="609600" y="1981200"/>
-            <a:ext cx="4102100" cy="406400"/>
-          </a:xfrm>
-          <a:prstGeom prst="rect">
-            <a:avLst/>
-          </a:prstGeom>
-          <a:noFill/>
-        </p:spPr>
-        <p:txBody>
-          <a:bodyPr wrap="square" lIns="0" rIns="0" tIns="0" bIns="0" anchor="ctr">
-            <a:spAutoFit/>
-          </a:bodyPr>
-          <a:lstStyle/>
-          <a:p>
-            <a:pPr algn="l">
-              <a:lnSpc>
-                <a:spcPct val="108000"/>
-              </a:lnSpc>
-              <a:spcBef>
-                <a:spcPts val="0"/>
-              </a:spcBef>
-              <a:spcAft>
-                <a:spcPts val="0"/>
-              </a:spcAft>
-              <a:defRPr sz="1700" b="1">
-                <a:solidFill>
-                  <a:srgbClr val="173047"/>
-                </a:solidFill>
-                <a:latin typeface="Arial"/>
-              </a:defRPr>
-            </a:pPr>
-            <a:r>
-              <a:t>Train · fuera de fold</a:t>
-            </a:r>
-          </a:p>
-        </p:txBody>
-      </p:sp>
-      <p:sp>
-        <p:nvSpPr>
-          <p:cNvPr id="9" name="Rounded Rectangle 8"/>
+          <p:cNvPr id="6" name="Rectangle 5"/>
           <p:cNvSpPr/>
           <p:nvPr/>
         </p:nvSpPr>
         <p:spPr>
           <a:xfrm>
-            <a:off x="4813300" y="2044700"/>
-            <a:ext cx="5029200" cy="279400"/>
-          </a:xfrm>
-          <a:prstGeom prst="roundRect">
+            <a:off x="609600" y="6083300"/>
+            <a:ext cx="8229600" cy="38100"/>
+          </a:xfrm>
+          <a:prstGeom prst="rect">
             <a:avLst/>
           </a:prstGeom>
           <a:solidFill>
-            <a:srgbClr val="EAF3F4"/>
+            <a:srgbClr val="087E83"/>
           </a:solidFill>
           <a:ln>
             <a:noFill/>
@@ -8917,6 +9303,141 @@
       </p:sp>
       <p:sp>
         <p:nvSpPr>
+          <p:cNvPr id="7" name="TextBox 6"/>
+          <p:cNvSpPr txBox="1"/>
+          <p:nvPr/>
+        </p:nvSpPr>
+        <p:spPr>
+          <a:xfrm>
+            <a:off x="609600" y="6235700"/>
+            <a:ext cx="10223500" cy="444500"/>
+          </a:xfrm>
+          <a:prstGeom prst="rect">
+            <a:avLst/>
+          </a:prstGeom>
+          <a:noFill/>
+        </p:spPr>
+        <p:txBody>
+          <a:bodyPr wrap="square" lIns="0" rIns="0" tIns="0" bIns="0" anchor="ctr">
+            <a:spAutoFit/>
+          </a:bodyPr>
+          <a:lstStyle/>
+          <a:p>
+            <a:pPr algn="l">
+              <a:lnSpc>
+                <a:spcPct val="104000"/>
+              </a:lnSpc>
+              <a:spcBef>
+                <a:spcPts val="0"/>
+              </a:spcBef>
+              <a:spcAft>
+                <a:spcPts val="0"/>
+              </a:spcAft>
+              <a:defRPr sz="900" b="0">
+                <a:solidFill>
+                  <a:srgbClr val="5D7180"/>
+                </a:solidFill>
+                <a:latin typeface="Aptos"/>
+              </a:defRPr>
+            </a:pPr>
+            <a:r>
+              <a:t>Fuentes: Evaluacion_Independiente_y_Validez_24-10-2026.md; Robustez_Sin_Cohorte_Nueva_24-10-2026.md</a:t>
+            </a:r>
+          </a:p>
+        </p:txBody>
+      </p:sp>
+      <p:sp>
+        <p:nvSpPr>
+          <p:cNvPr id="8" name="TextBox 7"/>
+          <p:cNvSpPr txBox="1"/>
+          <p:nvPr/>
+        </p:nvSpPr>
+        <p:spPr>
+          <a:xfrm>
+            <a:off x="10820400" y="6235700"/>
+            <a:ext cx="736600" cy="279400"/>
+          </a:xfrm>
+          <a:prstGeom prst="rect">
+            <a:avLst/>
+          </a:prstGeom>
+          <a:noFill/>
+        </p:spPr>
+        <p:txBody>
+          <a:bodyPr wrap="square" lIns="0" rIns="0" tIns="0" bIns="0" anchor="ctr">
+            <a:spAutoFit/>
+          </a:bodyPr>
+          <a:lstStyle/>
+          <a:p>
+            <a:pPr algn="r">
+              <a:lnSpc>
+                <a:spcPct val="104000"/>
+              </a:lnSpc>
+              <a:spcBef>
+                <a:spcPts val="0"/>
+              </a:spcBef>
+              <a:spcAft>
+                <a:spcPts val="0"/>
+              </a:spcAft>
+              <a:defRPr sz="1000" b="1">
+                <a:solidFill>
+                  <a:srgbClr val="5D7180"/>
+                </a:solidFill>
+                <a:latin typeface="Aptos"/>
+              </a:defRPr>
+            </a:pPr>
+            <a:r>
+              <a:t>06 / 08</a:t>
+            </a:r>
+          </a:p>
+        </p:txBody>
+      </p:sp>
+      <p:sp>
+        <p:nvSpPr>
+          <p:cNvPr id="9" name="TextBox 8"/>
+          <p:cNvSpPr txBox="1"/>
+          <p:nvPr/>
+        </p:nvSpPr>
+        <p:spPr>
+          <a:xfrm>
+            <a:off x="609600" y="1981200"/>
+            <a:ext cx="4102100" cy="406400"/>
+          </a:xfrm>
+          <a:prstGeom prst="rect">
+            <a:avLst/>
+          </a:prstGeom>
+          <a:noFill/>
+        </p:spPr>
+        <p:txBody>
+          <a:bodyPr wrap="square" lIns="0" rIns="0" tIns="0" bIns="0" anchor="ctr">
+            <a:spAutoFit/>
+          </a:bodyPr>
+          <a:lstStyle/>
+          <a:p>
+            <a:pPr algn="l">
+              <a:lnSpc>
+                <a:spcPct val="104000"/>
+              </a:lnSpc>
+              <a:spcBef>
+                <a:spcPts val="0"/>
+              </a:spcBef>
+              <a:spcAft>
+                <a:spcPts val="0"/>
+              </a:spcAft>
+              <a:defRPr sz="1700" b="1">
+                <a:solidFill>
+                  <a:srgbClr val="173348"/>
+                </a:solidFill>
+                <a:latin typeface="Aptos"/>
+              </a:defRPr>
+            </a:pPr>
+            <a:r>
+              <a:t>Train · fuera de fold</a:t>
+            </a:r>
+          </a:p>
+        </p:txBody>
+      </p:sp>
+      <p:sp>
+        <p:nvSpPr>
           <p:cNvPr id="10" name="Rounded Rectangle 9"/>
           <p:cNvSpPr/>
           <p:nvPr/>
@@ -8924,13 +9445,15 @@
         <p:spPr>
           <a:xfrm>
             <a:off x="4813300" y="2044700"/>
-            <a:ext cx="3865443" cy="279400"/>
+            <a:ext cx="5029200" cy="279400"/>
           </a:xfrm>
           <a:prstGeom prst="roundRect">
-            <a:avLst/>
+            <a:avLst>
+              <a:gd name="adj" fmla="val 10000"/>
+            </a:avLst>
           </a:prstGeom>
           <a:solidFill>
-            <a:srgbClr val="087F86"/>
+            <a:srgbClr val="DDF0ED"/>
           </a:solidFill>
           <a:ln>
             <a:noFill/>
@@ -8960,110 +9483,22 @@
       </p:sp>
       <p:sp>
         <p:nvSpPr>
-          <p:cNvPr id="11" name="TextBox 10"/>
-          <p:cNvSpPr txBox="1"/>
-          <p:nvPr/>
-        </p:nvSpPr>
-        <p:spPr>
-          <a:xfrm>
-            <a:off x="10109200" y="1955800"/>
-            <a:ext cx="1435100" cy="495300"/>
-          </a:xfrm>
-          <a:prstGeom prst="rect">
-            <a:avLst/>
-          </a:prstGeom>
-          <a:noFill/>
-        </p:spPr>
-        <p:txBody>
-          <a:bodyPr wrap="square" lIns="0" rIns="0" tIns="0" bIns="0" anchor="ctr">
-            <a:spAutoFit/>
-          </a:bodyPr>
-          <a:lstStyle/>
-          <a:p>
-            <a:pPr algn="l">
-              <a:lnSpc>
-                <a:spcPct val="108000"/>
-              </a:lnSpc>
-              <a:spcBef>
-                <a:spcPts val="0"/>
-              </a:spcBef>
-              <a:spcAft>
-                <a:spcPts val="0"/>
-              </a:spcAft>
-              <a:defRPr sz="2300" b="1">
-                <a:solidFill>
-                  <a:srgbClr val="102B42"/>
-                </a:solidFill>
-                <a:latin typeface="Arial"/>
-              </a:defRPr>
-            </a:pPr>
-            <a:r>
-              <a:t>0,3843</a:t>
-            </a:r>
-          </a:p>
-        </p:txBody>
-      </p:sp>
-      <p:sp>
-        <p:nvSpPr>
-          <p:cNvPr id="12" name="TextBox 11"/>
-          <p:cNvSpPr txBox="1"/>
-          <p:nvPr/>
-        </p:nvSpPr>
-        <p:spPr>
-          <a:xfrm>
-            <a:off x="609600" y="2895600"/>
-            <a:ext cx="4102100" cy="406400"/>
-          </a:xfrm>
-          <a:prstGeom prst="rect">
-            <a:avLst/>
-          </a:prstGeom>
-          <a:noFill/>
-        </p:spPr>
-        <p:txBody>
-          <a:bodyPr wrap="square" lIns="0" rIns="0" tIns="0" bIns="0" anchor="ctr">
-            <a:spAutoFit/>
-          </a:bodyPr>
-          <a:lstStyle/>
-          <a:p>
-            <a:pPr algn="l">
-              <a:lnSpc>
-                <a:spcPct val="108000"/>
-              </a:lnSpc>
-              <a:spcBef>
-                <a:spcPts val="0"/>
-              </a:spcBef>
-              <a:spcAft>
-                <a:spcPts val="0"/>
-              </a:spcAft>
-              <a:defRPr sz="1700" b="1">
-                <a:solidFill>
-                  <a:srgbClr val="173047"/>
-                </a:solidFill>
-                <a:latin typeface="Arial"/>
-              </a:defRPr>
-            </a:pPr>
-            <a:r>
-              <a:t>Test · ensamble fijo</a:t>
-            </a:r>
-          </a:p>
-        </p:txBody>
-      </p:sp>
-      <p:sp>
-        <p:nvSpPr>
-          <p:cNvPr id="13" name="Rounded Rectangle 12"/>
+          <p:cNvPr id="11" name="Rounded Rectangle 10"/>
           <p:cNvSpPr/>
           <p:nvPr/>
         </p:nvSpPr>
         <p:spPr>
           <a:xfrm>
-            <a:off x="4813300" y="2959100"/>
-            <a:ext cx="5029200" cy="279400"/>
+            <a:off x="4813300" y="2044700"/>
+            <a:ext cx="3865443" cy="279400"/>
           </a:xfrm>
           <a:prstGeom prst="roundRect">
-            <a:avLst/>
+            <a:avLst>
+              <a:gd name="adj" fmla="val 10000"/>
+            </a:avLst>
           </a:prstGeom>
           <a:solidFill>
-            <a:srgbClr val="EAF3F4"/>
+            <a:srgbClr val="087E83"/>
           </a:solidFill>
           <a:ln>
             <a:noFill/>
@@ -9093,6 +9528,96 @@
       </p:sp>
       <p:sp>
         <p:nvSpPr>
+          <p:cNvPr id="12" name="TextBox 11"/>
+          <p:cNvSpPr txBox="1"/>
+          <p:nvPr/>
+        </p:nvSpPr>
+        <p:spPr>
+          <a:xfrm>
+            <a:off x="10109200" y="1955800"/>
+            <a:ext cx="1435100" cy="495300"/>
+          </a:xfrm>
+          <a:prstGeom prst="rect">
+            <a:avLst/>
+          </a:prstGeom>
+          <a:noFill/>
+        </p:spPr>
+        <p:txBody>
+          <a:bodyPr wrap="square" lIns="0" rIns="0" tIns="0" bIns="0" anchor="ctr">
+            <a:spAutoFit/>
+          </a:bodyPr>
+          <a:lstStyle/>
+          <a:p>
+            <a:pPr algn="l">
+              <a:lnSpc>
+                <a:spcPct val="104000"/>
+              </a:lnSpc>
+              <a:spcBef>
+                <a:spcPts val="0"/>
+              </a:spcBef>
+              <a:spcAft>
+                <a:spcPts val="0"/>
+              </a:spcAft>
+              <a:defRPr sz="2300" b="1">
+                <a:solidFill>
+                  <a:srgbClr val="102A3D"/>
+                </a:solidFill>
+                <a:latin typeface="Aptos"/>
+              </a:defRPr>
+            </a:pPr>
+            <a:r>
+              <a:t>0,3843</a:t>
+            </a:r>
+          </a:p>
+        </p:txBody>
+      </p:sp>
+      <p:sp>
+        <p:nvSpPr>
+          <p:cNvPr id="13" name="TextBox 12"/>
+          <p:cNvSpPr txBox="1"/>
+          <p:nvPr/>
+        </p:nvSpPr>
+        <p:spPr>
+          <a:xfrm>
+            <a:off x="609600" y="2895600"/>
+            <a:ext cx="4102100" cy="406400"/>
+          </a:xfrm>
+          <a:prstGeom prst="rect">
+            <a:avLst/>
+          </a:prstGeom>
+          <a:noFill/>
+        </p:spPr>
+        <p:txBody>
+          <a:bodyPr wrap="square" lIns="0" rIns="0" tIns="0" bIns="0" anchor="ctr">
+            <a:spAutoFit/>
+          </a:bodyPr>
+          <a:lstStyle/>
+          <a:p>
+            <a:pPr algn="l">
+              <a:lnSpc>
+                <a:spcPct val="104000"/>
+              </a:lnSpc>
+              <a:spcBef>
+                <a:spcPts val="0"/>
+              </a:spcBef>
+              <a:spcAft>
+                <a:spcPts val="0"/>
+              </a:spcAft>
+              <a:defRPr sz="1700" b="1">
+                <a:solidFill>
+                  <a:srgbClr val="173348"/>
+                </a:solidFill>
+                <a:latin typeface="Aptos"/>
+              </a:defRPr>
+            </a:pPr>
+            <a:r>
+              <a:t>Test · ensamble fijo</a:t>
+            </a:r>
+          </a:p>
+        </p:txBody>
+      </p:sp>
+      <p:sp>
+        <p:nvSpPr>
           <p:cNvPr id="14" name="Rounded Rectangle 13"/>
           <p:cNvSpPr/>
           <p:nvPr/>
@@ -9100,13 +9625,15 @@
         <p:spPr>
           <a:xfrm>
             <a:off x="4813300" y="2959100"/>
-            <a:ext cx="3577772" cy="279400"/>
+            <a:ext cx="5029200" cy="279400"/>
           </a:xfrm>
           <a:prstGeom prst="roundRect">
-            <a:avLst/>
+            <a:avLst>
+              <a:gd name="adj" fmla="val 10000"/>
+            </a:avLst>
           </a:prstGeom>
           <a:solidFill>
-            <a:srgbClr val="215C80"/>
+            <a:srgbClr val="DDF0ED"/>
           </a:solidFill>
           <a:ln>
             <a:noFill/>
@@ -9136,110 +9663,22 @@
       </p:sp>
       <p:sp>
         <p:nvSpPr>
-          <p:cNvPr id="15" name="TextBox 14"/>
-          <p:cNvSpPr txBox="1"/>
-          <p:nvPr/>
-        </p:nvSpPr>
-        <p:spPr>
-          <a:xfrm>
-            <a:off x="10109200" y="2870200"/>
-            <a:ext cx="1435100" cy="495300"/>
-          </a:xfrm>
-          <a:prstGeom prst="rect">
-            <a:avLst/>
-          </a:prstGeom>
-          <a:noFill/>
-        </p:spPr>
-        <p:txBody>
-          <a:bodyPr wrap="square" lIns="0" rIns="0" tIns="0" bIns="0" anchor="ctr">
-            <a:spAutoFit/>
-          </a:bodyPr>
-          <a:lstStyle/>
-          <a:p>
-            <a:pPr algn="l">
-              <a:lnSpc>
-                <a:spcPct val="108000"/>
-              </a:lnSpc>
-              <a:spcBef>
-                <a:spcPts val="0"/>
-              </a:spcBef>
-              <a:spcAft>
-                <a:spcPts val="0"/>
-              </a:spcAft>
-              <a:defRPr sz="2300" b="1">
-                <a:solidFill>
-                  <a:srgbClr val="102B42"/>
-                </a:solidFill>
-                <a:latin typeface="Arial"/>
-              </a:defRPr>
-            </a:pPr>
-            <a:r>
-              <a:t>0,3557</a:t>
-            </a:r>
-          </a:p>
-        </p:txBody>
-      </p:sp>
-      <p:sp>
-        <p:nvSpPr>
-          <p:cNvPr id="16" name="TextBox 15"/>
-          <p:cNvSpPr txBox="1"/>
-          <p:nvPr/>
-        </p:nvSpPr>
-        <p:spPr>
-          <a:xfrm>
-            <a:off x="609600" y="3810000"/>
-            <a:ext cx="4102100" cy="406400"/>
-          </a:xfrm>
-          <a:prstGeom prst="rect">
-            <a:avLst/>
-          </a:prstGeom>
-          <a:noFill/>
-        </p:spPr>
-        <p:txBody>
-          <a:bodyPr wrap="square" lIns="0" rIns="0" tIns="0" bIns="0" anchor="ctr">
-            <a:spAutoFit/>
-          </a:bodyPr>
-          <a:lstStyle/>
-          <a:p>
-            <a:pPr algn="l">
-              <a:lnSpc>
-                <a:spcPct val="108000"/>
-              </a:lnSpc>
-              <a:spcBef>
-                <a:spcPts val="0"/>
-              </a:spcBef>
-              <a:spcAft>
-                <a:spcPts val="0"/>
-              </a:spcAft>
-              <a:defRPr sz="1700" b="1">
-                <a:solidFill>
-                  <a:srgbClr val="173047"/>
-                </a:solidFill>
-                <a:latin typeface="Arial"/>
-              </a:defRPr>
-            </a:pPr>
-            <a:r>
-              <a:t>Referencia matemática 1/k · test</a:t>
-            </a:r>
-          </a:p>
-        </p:txBody>
-      </p:sp>
-      <p:sp>
-        <p:nvSpPr>
-          <p:cNvPr id="17" name="Rounded Rectangle 16"/>
+          <p:cNvPr id="15" name="Rounded Rectangle 14"/>
           <p:cNvSpPr/>
           <p:nvPr/>
         </p:nvSpPr>
         <p:spPr>
           <a:xfrm>
-            <a:off x="4813300" y="3873500"/>
-            <a:ext cx="5029200" cy="279400"/>
+            <a:off x="4813300" y="2959100"/>
+            <a:ext cx="3577772" cy="279400"/>
           </a:xfrm>
           <a:prstGeom prst="roundRect">
-            <a:avLst/>
+            <a:avLst>
+              <a:gd name="adj" fmla="val 10000"/>
+            </a:avLst>
           </a:prstGeom>
           <a:solidFill>
-            <a:srgbClr val="EAF3F4"/>
+            <a:srgbClr val="376B91"/>
           </a:solidFill>
           <a:ln>
             <a:noFill/>
@@ -9269,6 +9708,96 @@
       </p:sp>
       <p:sp>
         <p:nvSpPr>
+          <p:cNvPr id="16" name="TextBox 15"/>
+          <p:cNvSpPr txBox="1"/>
+          <p:nvPr/>
+        </p:nvSpPr>
+        <p:spPr>
+          <a:xfrm>
+            <a:off x="10109200" y="2870200"/>
+            <a:ext cx="1435100" cy="495300"/>
+          </a:xfrm>
+          <a:prstGeom prst="rect">
+            <a:avLst/>
+          </a:prstGeom>
+          <a:noFill/>
+        </p:spPr>
+        <p:txBody>
+          <a:bodyPr wrap="square" lIns="0" rIns="0" tIns="0" bIns="0" anchor="ctr">
+            <a:spAutoFit/>
+          </a:bodyPr>
+          <a:lstStyle/>
+          <a:p>
+            <a:pPr algn="l">
+              <a:lnSpc>
+                <a:spcPct val="104000"/>
+              </a:lnSpc>
+              <a:spcBef>
+                <a:spcPts val="0"/>
+              </a:spcBef>
+              <a:spcAft>
+                <a:spcPts val="0"/>
+              </a:spcAft>
+              <a:defRPr sz="2300" b="1">
+                <a:solidFill>
+                  <a:srgbClr val="102A3D"/>
+                </a:solidFill>
+                <a:latin typeface="Aptos"/>
+              </a:defRPr>
+            </a:pPr>
+            <a:r>
+              <a:t>0,3557</a:t>
+            </a:r>
+          </a:p>
+        </p:txBody>
+      </p:sp>
+      <p:sp>
+        <p:nvSpPr>
+          <p:cNvPr id="17" name="TextBox 16"/>
+          <p:cNvSpPr txBox="1"/>
+          <p:nvPr/>
+        </p:nvSpPr>
+        <p:spPr>
+          <a:xfrm>
+            <a:off x="609600" y="3810000"/>
+            <a:ext cx="4102100" cy="406400"/>
+          </a:xfrm>
+          <a:prstGeom prst="rect">
+            <a:avLst/>
+          </a:prstGeom>
+          <a:noFill/>
+        </p:spPr>
+        <p:txBody>
+          <a:bodyPr wrap="square" lIns="0" rIns="0" tIns="0" bIns="0" anchor="ctr">
+            <a:spAutoFit/>
+          </a:bodyPr>
+          <a:lstStyle/>
+          <a:p>
+            <a:pPr algn="l">
+              <a:lnSpc>
+                <a:spcPct val="104000"/>
+              </a:lnSpc>
+              <a:spcBef>
+                <a:spcPts val="0"/>
+              </a:spcBef>
+              <a:spcAft>
+                <a:spcPts val="0"/>
+              </a:spcAft>
+              <a:defRPr sz="1700" b="1">
+                <a:solidFill>
+                  <a:srgbClr val="173348"/>
+                </a:solidFill>
+                <a:latin typeface="Aptos"/>
+              </a:defRPr>
+            </a:pPr>
+            <a:r>
+              <a:t>Referencia matemática 1/k · test</a:t>
+            </a:r>
+          </a:p>
+        </p:txBody>
+      </p:sp>
+      <p:sp>
+        <p:nvSpPr>
           <p:cNvPr id="18" name="Rounded Rectangle 17"/>
           <p:cNvSpPr/>
           <p:nvPr/>
@@ -9276,13 +9805,15 @@
         <p:spPr>
           <a:xfrm>
             <a:off x="4813300" y="3873500"/>
-            <a:ext cx="3562685" cy="279400"/>
+            <a:ext cx="5029200" cy="279400"/>
           </a:xfrm>
           <a:prstGeom prst="roundRect">
-            <a:avLst/>
+            <a:avLst>
+              <a:gd name="adj" fmla="val 10000"/>
+            </a:avLst>
           </a:prstGeom>
           <a:solidFill>
-            <a:srgbClr val="536675"/>
+            <a:srgbClr val="DDF0ED"/>
           </a:solidFill>
           <a:ln>
             <a:noFill/>
@@ -9312,110 +9843,22 @@
       </p:sp>
       <p:sp>
         <p:nvSpPr>
-          <p:cNvPr id="19" name="TextBox 18"/>
-          <p:cNvSpPr txBox="1"/>
-          <p:nvPr/>
-        </p:nvSpPr>
-        <p:spPr>
-          <a:xfrm>
-            <a:off x="10109200" y="3784600"/>
-            <a:ext cx="1435100" cy="495300"/>
-          </a:xfrm>
-          <a:prstGeom prst="rect">
-            <a:avLst/>
-          </a:prstGeom>
-          <a:noFill/>
-        </p:spPr>
-        <p:txBody>
-          <a:bodyPr wrap="square" lIns="0" rIns="0" tIns="0" bIns="0" anchor="ctr">
-            <a:spAutoFit/>
-          </a:bodyPr>
-          <a:lstStyle/>
-          <a:p>
-            <a:pPr algn="l">
-              <a:lnSpc>
-                <a:spcPct val="108000"/>
-              </a:lnSpc>
-              <a:spcBef>
-                <a:spcPts val="0"/>
-              </a:spcBef>
-              <a:spcAft>
-                <a:spcPts val="0"/>
-              </a:spcAft>
-              <a:defRPr sz="2300" b="1">
-                <a:solidFill>
-                  <a:srgbClr val="102B42"/>
-                </a:solidFill>
-                <a:latin typeface="Arial"/>
-              </a:defRPr>
-            </a:pPr>
-            <a:r>
-              <a:t>0,3542</a:t>
-            </a:r>
-          </a:p>
-        </p:txBody>
-      </p:sp>
-      <p:sp>
-        <p:nvSpPr>
-          <p:cNvPr id="20" name="TextBox 19"/>
-          <p:cNvSpPr txBox="1"/>
-          <p:nvPr/>
-        </p:nvSpPr>
-        <p:spPr>
-          <a:xfrm>
-            <a:off x="609600" y="4610100"/>
-            <a:ext cx="10972800" cy="571500"/>
-          </a:xfrm>
-          <a:prstGeom prst="rect">
-            <a:avLst/>
-          </a:prstGeom>
-          <a:noFill/>
-        </p:spPr>
-        <p:txBody>
-          <a:bodyPr wrap="square" lIns="0" rIns="0" tIns="0" bIns="0" anchor="ctr">
-            <a:spAutoFit/>
-          </a:bodyPr>
-          <a:lstStyle/>
-          <a:p>
-            <a:pPr algn="l">
-              <a:lnSpc>
-                <a:spcPct val="108000"/>
-              </a:lnSpc>
-              <a:spcBef>
-                <a:spcPts val="0"/>
-              </a:spcBef>
-              <a:spcAft>
-                <a:spcPts val="0"/>
-              </a:spcAft>
-              <a:defRPr sz="1500" b="0">
-                <a:solidFill>
-                  <a:srgbClr val="536675"/>
-                </a:solidFill>
-                <a:latin typeface="Arial"/>
-              </a:defRPr>
-            </a:pPr>
-            <a:r>
-              <a:t>1/k = BA de predecir siempre una clase presente; en test la media es 0,3542 porque una persona tiene dos clases.</a:t>
-            </a:r>
-          </a:p>
-        </p:txBody>
-      </p:sp>
-      <p:sp>
-        <p:nvSpPr>
-          <p:cNvPr id="21" name="Rounded Rectangle 20"/>
+          <p:cNvPr id="19" name="Rounded Rectangle 18"/>
           <p:cNvSpPr/>
           <p:nvPr/>
         </p:nvSpPr>
         <p:spPr>
           <a:xfrm>
-            <a:off x="609600" y="5232400"/>
-            <a:ext cx="10972800" cy="736600"/>
+            <a:off x="4813300" y="3873500"/>
+            <a:ext cx="3562685" cy="279400"/>
           </a:xfrm>
           <a:prstGeom prst="roundRect">
-            <a:avLst/>
+            <a:avLst>
+              <a:gd name="adj" fmla="val 10000"/>
+            </a:avLst>
           </a:prstGeom>
           <a:solidFill>
-            <a:srgbClr val="EAF3F4"/>
+            <a:srgbClr val="5D7180"/>
           </a:solidFill>
           <a:ln>
             <a:noFill/>
@@ -9445,14 +9888,14 @@
       </p:sp>
       <p:sp>
         <p:nvSpPr>
-          <p:cNvPr id="22" name="TextBox 21"/>
+          <p:cNvPr id="20" name="TextBox 19"/>
           <p:cNvSpPr txBox="1"/>
           <p:nvPr/>
         </p:nvSpPr>
         <p:spPr>
           <a:xfrm>
-            <a:off x="825500" y="5295900"/>
-            <a:ext cx="10528300" cy="609600"/>
+            <a:off x="10109200" y="3784600"/>
+            <a:ext cx="1435100" cy="495300"/>
           </a:xfrm>
           <a:prstGeom prst="rect">
             <a:avLst/>
@@ -9467,7 +9910,185 @@
           <a:p>
             <a:pPr algn="l">
               <a:lnSpc>
-                <a:spcPct val="108000"/>
+                <a:spcPct val="104000"/>
+              </a:lnSpc>
+              <a:spcBef>
+                <a:spcPts val="0"/>
+              </a:spcBef>
+              <a:spcAft>
+                <a:spcPts val="0"/>
+              </a:spcAft>
+              <a:defRPr sz="2300" b="1">
+                <a:solidFill>
+                  <a:srgbClr val="102A3D"/>
+                </a:solidFill>
+                <a:latin typeface="Aptos"/>
+              </a:defRPr>
+            </a:pPr>
+            <a:r>
+              <a:t>0,3542</a:t>
+            </a:r>
+          </a:p>
+        </p:txBody>
+      </p:sp>
+      <p:sp>
+        <p:nvSpPr>
+          <p:cNvPr id="21" name="TextBox 20"/>
+          <p:cNvSpPr txBox="1"/>
+          <p:nvPr/>
+        </p:nvSpPr>
+        <p:spPr>
+          <a:xfrm>
+            <a:off x="609600" y="4610100"/>
+            <a:ext cx="10972800" cy="571500"/>
+          </a:xfrm>
+          <a:prstGeom prst="rect">
+            <a:avLst/>
+          </a:prstGeom>
+          <a:noFill/>
+        </p:spPr>
+        <p:txBody>
+          <a:bodyPr wrap="square" lIns="0" rIns="0" tIns="0" bIns="0" anchor="ctr">
+            <a:spAutoFit/>
+          </a:bodyPr>
+          <a:lstStyle/>
+          <a:p>
+            <a:pPr algn="l">
+              <a:lnSpc>
+                <a:spcPct val="104000"/>
+              </a:lnSpc>
+              <a:spcBef>
+                <a:spcPts val="0"/>
+              </a:spcBef>
+              <a:spcAft>
+                <a:spcPts val="0"/>
+              </a:spcAft>
+              <a:defRPr sz="1500" b="0">
+                <a:solidFill>
+                  <a:srgbClr val="5D7180"/>
+                </a:solidFill>
+                <a:latin typeface="Aptos"/>
+              </a:defRPr>
+            </a:pPr>
+            <a:r>
+              <a:t>1/k = BA de predecir siempre una clase presente; en test la media es 0,3542 porque una persona tiene dos clases.</a:t>
+            </a:r>
+          </a:p>
+        </p:txBody>
+      </p:sp>
+      <p:sp>
+        <p:nvSpPr>
+          <p:cNvPr id="22" name="Rounded Rectangle 21"/>
+          <p:cNvSpPr/>
+          <p:nvPr/>
+        </p:nvSpPr>
+        <p:spPr>
+          <a:xfrm>
+            <a:off x="609600" y="5232400"/>
+            <a:ext cx="10972800" cy="736600"/>
+          </a:xfrm>
+          <a:prstGeom prst="roundRect">
+            <a:avLst>
+              <a:gd name="adj" fmla="val 10000"/>
+            </a:avLst>
+          </a:prstGeom>
+          <a:solidFill>
+            <a:srgbClr val="F9EBE5"/>
+          </a:solidFill>
+          <a:ln>
+            <a:noFill/>
+          </a:ln>
+        </p:spPr>
+        <p:style>
+          <a:lnRef idx="1">
+            <a:schemeClr val="accent1"/>
+          </a:lnRef>
+          <a:fillRef idx="3">
+            <a:schemeClr val="accent1"/>
+          </a:fillRef>
+          <a:effectRef idx="2">
+            <a:schemeClr val="accent1"/>
+          </a:effectRef>
+          <a:fontRef idx="minor">
+            <a:schemeClr val="lt1"/>
+          </a:fontRef>
+        </p:style>
+        <p:txBody>
+          <a:bodyPr rtlCol="0" anchor="ctr"/>
+          <a:lstStyle/>
+          <a:p>
+            <a:pPr algn="ctr"/>
+          </a:p>
+        </p:txBody>
+      </p:sp>
+      <p:sp>
+        <p:nvSpPr>
+          <p:cNvPr id="23" name="Rectangle 22"/>
+          <p:cNvSpPr/>
+          <p:nvPr/>
+        </p:nvSpPr>
+        <p:spPr>
+          <a:xfrm>
+            <a:off x="609600" y="5232400"/>
+            <a:ext cx="63500" cy="736600"/>
+          </a:xfrm>
+          <a:prstGeom prst="rect">
+            <a:avLst/>
+          </a:prstGeom>
+          <a:solidFill>
+            <a:srgbClr val="C66A44"/>
+          </a:solidFill>
+          <a:ln>
+            <a:noFill/>
+          </a:ln>
+        </p:spPr>
+        <p:style>
+          <a:lnRef idx="1">
+            <a:schemeClr val="accent1"/>
+          </a:lnRef>
+          <a:fillRef idx="3">
+            <a:schemeClr val="accent1"/>
+          </a:fillRef>
+          <a:effectRef idx="2">
+            <a:schemeClr val="accent1"/>
+          </a:effectRef>
+          <a:fontRef idx="minor">
+            <a:schemeClr val="lt1"/>
+          </a:fontRef>
+        </p:style>
+        <p:txBody>
+          <a:bodyPr rtlCol="0" anchor="ctr"/>
+          <a:lstStyle/>
+          <a:p>
+            <a:pPr algn="ctr"/>
+          </a:p>
+        </p:txBody>
+      </p:sp>
+      <p:sp>
+        <p:nvSpPr>
+          <p:cNvPr id="24" name="TextBox 23"/>
+          <p:cNvSpPr txBox="1"/>
+          <p:nvPr/>
+        </p:nvSpPr>
+        <p:spPr>
+          <a:xfrm>
+            <a:off x="863600" y="5295900"/>
+            <a:ext cx="10464800" cy="609600"/>
+          </a:xfrm>
+          <a:prstGeom prst="rect">
+            <a:avLst/>
+          </a:prstGeom>
+          <a:noFill/>
+        </p:spPr>
+        <p:txBody>
+          <a:bodyPr wrap="square" lIns="0" rIns="0" tIns="0" bIns="0" anchor="ctr">
+            <a:spAutoFit/>
+          </a:bodyPr>
+          <a:lstStyle/>
+          <a:p>
+            <a:pPr algn="l">
+              <a:lnSpc>
+                <a:spcPct val="104000"/>
               </a:lnSpc>
               <a:spcBef>
                 <a:spcPts val="0"/>
@@ -9477,9 +10098,9 @@
               </a:spcAft>
               <a:defRPr sz="1800" b="1">
                 <a:solidFill>
-                  <a:srgbClr val="A45A22"/>
+                  <a:srgbClr val="C66A44"/>
                 </a:solidFill>
-                <a:latin typeface="Arial"/>
+                <a:latin typeface="Aptos"/>
               </a:defRPr>
             </a:pPr>
             <a:r>
@@ -9502,7 +10123,7 @@
     <p:bg>
       <p:bgPr>
         <a:solidFill>
-          <a:srgbClr val="FFFFFF"/>
+          <a:srgbClr val="F7F8F5"/>
         </a:solidFill>
         <a:effectLst/>
       </p:bgPr>
@@ -9523,13 +10144,13 @@
         <p:spPr>
           <a:xfrm>
             <a:off x="0" y="0"/>
-            <a:ext cx="12192000" cy="88900"/>
+            <a:ext cx="12192000" cy="76200"/>
           </a:xfrm>
           <a:prstGeom prst="rect">
             <a:avLst/>
           </a:prstGeom>
           <a:solidFill>
-            <a:srgbClr val="102B42"/>
+            <a:srgbClr val="087E83"/>
           </a:solidFill>
           <a:ln>
             <a:noFill/>
@@ -9581,7 +10202,7 @@
           <a:p>
             <a:pPr algn="l">
               <a:lnSpc>
-                <a:spcPct val="108000"/>
+                <a:spcPct val="104000"/>
               </a:lnSpc>
               <a:spcBef>
                 <a:spcPts val="0"/>
@@ -9591,13 +10212,13 @@
               </a:spcAft>
               <a:defRPr sz="1100" b="1">
                 <a:solidFill>
-                  <a:srgbClr val="087F86"/>
+                  <a:srgbClr val="087E83"/>
                 </a:solidFill>
-                <a:latin typeface="Arial"/>
+                <a:latin typeface="Aptos"/>
               </a:defRPr>
             </a:pPr>
             <a:r>
-              <a:t>CONTROL NEGATIVO Y SENSIBILIDAD</a:t>
+              <a:t>07  /  CONTROL NEGATIVO Y SENSIBILIDAD</a:t>
             </a:r>
           </a:p>
         </p:txBody>
@@ -9611,7 +10232,7 @@
         <p:spPr>
           <a:xfrm>
             <a:off x="609600" y="723900"/>
-            <a:ext cx="10972800" cy="939800"/>
+            <a:ext cx="10972800" cy="990600"/>
           </a:xfrm>
           <a:prstGeom prst="rect">
             <a:avLst/>
@@ -9626,7 +10247,7 @@
           <a:p>
             <a:pPr algn="l">
               <a:lnSpc>
-                <a:spcPct val="108000"/>
+                <a:spcPct val="104000"/>
               </a:lnSpc>
               <a:spcBef>
                 <a:spcPts val="0"/>
@@ -9634,11 +10255,11 @@
               <a:spcAft>
                 <a:spcPts val="0"/>
               </a:spcAft>
-              <a:defRPr sz="3000" b="1">
+              <a:defRPr sz="3200" b="1">
                 <a:solidFill>
-                  <a:srgbClr val="102B42"/>
+                  <a:srgbClr val="102A3D"/>
                 </a:solidFill>
-                <a:latin typeface="Arial"/>
+                <a:latin typeface="Aptos"/>
               </a:defRPr>
             </a:pPr>
             <a:r>
@@ -9655,14 +10276,14 @@
         </p:nvSpPr>
         <p:spPr>
           <a:xfrm>
-            <a:off x="609600" y="6096000"/>
+            <a:off x="609600" y="6134100"/>
             <a:ext cx="10972800" cy="12700"/>
           </a:xfrm>
           <a:prstGeom prst="rect">
             <a:avLst/>
           </a:prstGeom>
           <a:solidFill>
-            <a:srgbClr val="D4DFE5"/>
+            <a:srgbClr val="D9E2E3"/>
           </a:solidFill>
           <a:ln>
             <a:noFill/>
@@ -9692,110 +10313,20 @@
       </p:sp>
       <p:sp>
         <p:nvSpPr>
-          <p:cNvPr id="6" name="TextBox 5"/>
-          <p:cNvSpPr txBox="1"/>
-          <p:nvPr/>
-        </p:nvSpPr>
-        <p:spPr>
-          <a:xfrm>
-            <a:off x="609600" y="6197600"/>
-            <a:ext cx="10223500" cy="469900"/>
-          </a:xfrm>
-          <a:prstGeom prst="rect">
-            <a:avLst/>
-          </a:prstGeom>
-          <a:noFill/>
-        </p:spPr>
-        <p:txBody>
-          <a:bodyPr wrap="square" lIns="0" rIns="0" tIns="0" bIns="0" anchor="ctr">
-            <a:spAutoFit/>
-          </a:bodyPr>
-          <a:lstStyle/>
-          <a:p>
-            <a:pPr algn="l">
-              <a:lnSpc>
-                <a:spcPct val="108000"/>
-              </a:lnSpc>
-              <a:spcBef>
-                <a:spcPts val="0"/>
-              </a:spcBef>
-              <a:spcAft>
-                <a:spcPts val="0"/>
-              </a:spcAft>
-              <a:defRPr sz="900" b="0">
-                <a:solidFill>
-                  <a:srgbClr val="536675"/>
-                </a:solidFill>
-                <a:latin typeface="Arial"/>
-              </a:defRPr>
-            </a:pPr>
-            <a:r>
-              <a:t>Fuentes: Control_Negativo_Temporal_y_Errores_24-10-2026.md; Robustez_Sin_Cohorte_Nueva_24-10-2026.md</a:t>
-            </a:r>
-          </a:p>
-        </p:txBody>
-      </p:sp>
-      <p:sp>
-        <p:nvSpPr>
-          <p:cNvPr id="7" name="TextBox 6"/>
-          <p:cNvSpPr txBox="1"/>
-          <p:nvPr/>
-        </p:nvSpPr>
-        <p:spPr>
-          <a:xfrm>
-            <a:off x="10896600" y="6210300"/>
-            <a:ext cx="660400" cy="279400"/>
-          </a:xfrm>
-          <a:prstGeom prst="rect">
-            <a:avLst/>
-          </a:prstGeom>
-          <a:noFill/>
-        </p:spPr>
-        <p:txBody>
-          <a:bodyPr wrap="square" lIns="0" rIns="0" tIns="0" bIns="0" anchor="ctr">
-            <a:spAutoFit/>
-          </a:bodyPr>
-          <a:lstStyle/>
-          <a:p>
-            <a:pPr algn="r">
-              <a:lnSpc>
-                <a:spcPct val="108000"/>
-              </a:lnSpc>
-              <a:spcBef>
-                <a:spcPts val="0"/>
-              </a:spcBef>
-              <a:spcAft>
-                <a:spcPts val="0"/>
-              </a:spcAft>
-              <a:defRPr sz="1000" b="1">
-                <a:solidFill>
-                  <a:srgbClr val="536675"/>
-                </a:solidFill>
-                <a:latin typeface="Arial"/>
-              </a:defRPr>
-            </a:pPr>
-            <a:r>
-              <a:t>7 / 8</a:t>
-            </a:r>
-          </a:p>
-        </p:txBody>
-      </p:sp>
-      <p:sp>
-        <p:nvSpPr>
-          <p:cNvPr id="8" name="Rounded Rectangle 7"/>
+          <p:cNvPr id="6" name="Rectangle 5"/>
           <p:cNvSpPr/>
           <p:nvPr/>
         </p:nvSpPr>
         <p:spPr>
           <a:xfrm>
-            <a:off x="609600" y="1892300"/>
-            <a:ext cx="5143500" cy="2705100"/>
-          </a:xfrm>
-          <a:prstGeom prst="roundRect">
+            <a:off x="609600" y="6083300"/>
+            <a:ext cx="9601200" cy="38100"/>
+          </a:xfrm>
+          <a:prstGeom prst="rect">
             <a:avLst/>
           </a:prstGeom>
           <a:solidFill>
-            <a:srgbClr val="F7F9FB"/>
+            <a:srgbClr val="087E83"/>
           </a:solidFill>
           <a:ln>
             <a:noFill/>
@@ -9825,20 +10356,112 @@
       </p:sp>
       <p:sp>
         <p:nvSpPr>
-          <p:cNvPr id="9" name="Rectangle 8"/>
+          <p:cNvPr id="7" name="TextBox 6"/>
+          <p:cNvSpPr txBox="1"/>
+          <p:nvPr/>
+        </p:nvSpPr>
+        <p:spPr>
+          <a:xfrm>
+            <a:off x="609600" y="6235700"/>
+            <a:ext cx="10223500" cy="444500"/>
+          </a:xfrm>
+          <a:prstGeom prst="rect">
+            <a:avLst/>
+          </a:prstGeom>
+          <a:noFill/>
+        </p:spPr>
+        <p:txBody>
+          <a:bodyPr wrap="square" lIns="0" rIns="0" tIns="0" bIns="0" anchor="ctr">
+            <a:spAutoFit/>
+          </a:bodyPr>
+          <a:lstStyle/>
+          <a:p>
+            <a:pPr algn="l">
+              <a:lnSpc>
+                <a:spcPct val="104000"/>
+              </a:lnSpc>
+              <a:spcBef>
+                <a:spcPts val="0"/>
+              </a:spcBef>
+              <a:spcAft>
+                <a:spcPts val="0"/>
+              </a:spcAft>
+              <a:defRPr sz="900" b="0">
+                <a:solidFill>
+                  <a:srgbClr val="5D7180"/>
+                </a:solidFill>
+                <a:latin typeface="Aptos"/>
+              </a:defRPr>
+            </a:pPr>
+            <a:r>
+              <a:t>Fuentes: Control_Negativo_Temporal_y_Errores_24-10-2026.md; Robustez_Sin_Cohorte_Nueva_24-10-2026.md</a:t>
+            </a:r>
+          </a:p>
+        </p:txBody>
+      </p:sp>
+      <p:sp>
+        <p:nvSpPr>
+          <p:cNvPr id="8" name="TextBox 7"/>
+          <p:cNvSpPr txBox="1"/>
+          <p:nvPr/>
+        </p:nvSpPr>
+        <p:spPr>
+          <a:xfrm>
+            <a:off x="10820400" y="6235700"/>
+            <a:ext cx="736600" cy="279400"/>
+          </a:xfrm>
+          <a:prstGeom prst="rect">
+            <a:avLst/>
+          </a:prstGeom>
+          <a:noFill/>
+        </p:spPr>
+        <p:txBody>
+          <a:bodyPr wrap="square" lIns="0" rIns="0" tIns="0" bIns="0" anchor="ctr">
+            <a:spAutoFit/>
+          </a:bodyPr>
+          <a:lstStyle/>
+          <a:p>
+            <a:pPr algn="r">
+              <a:lnSpc>
+                <a:spcPct val="104000"/>
+              </a:lnSpc>
+              <a:spcBef>
+                <a:spcPts val="0"/>
+              </a:spcBef>
+              <a:spcAft>
+                <a:spcPts val="0"/>
+              </a:spcAft>
+              <a:defRPr sz="1000" b="1">
+                <a:solidFill>
+                  <a:srgbClr val="5D7180"/>
+                </a:solidFill>
+                <a:latin typeface="Aptos"/>
+              </a:defRPr>
+            </a:pPr>
+            <a:r>
+              <a:t>07 / 08</a:t>
+            </a:r>
+          </a:p>
+        </p:txBody>
+      </p:sp>
+      <p:sp>
+        <p:nvSpPr>
+          <p:cNvPr id="9" name="Rounded Rectangle 8"/>
           <p:cNvSpPr/>
           <p:nvPr/>
         </p:nvSpPr>
         <p:spPr>
           <a:xfrm>
             <a:off x="609600" y="1892300"/>
-            <a:ext cx="63500" cy="2705100"/>
-          </a:xfrm>
-          <a:prstGeom prst="rect">
-            <a:avLst/>
+            <a:ext cx="5143500" cy="2705100"/>
+          </a:xfrm>
+          <a:prstGeom prst="roundRect">
+            <a:avLst>
+              <a:gd name="adj" fmla="val 10000"/>
+            </a:avLst>
           </a:prstGeom>
           <a:solidFill>
-            <a:srgbClr val="087F86"/>
+            <a:srgbClr val="FFFFFF"/>
           </a:solidFill>
           <a:ln>
             <a:noFill/>
@@ -9868,110 +10491,20 @@
       </p:sp>
       <p:sp>
         <p:nvSpPr>
-          <p:cNvPr id="10" name="TextBox 9"/>
-          <p:cNvSpPr txBox="1"/>
-          <p:nvPr/>
-        </p:nvSpPr>
-        <p:spPr>
-          <a:xfrm>
-            <a:off x="850900" y="2044700"/>
-            <a:ext cx="4686300" cy="381000"/>
-          </a:xfrm>
-          <a:prstGeom prst="rect">
-            <a:avLst/>
-          </a:prstGeom>
-          <a:noFill/>
-        </p:spPr>
-        <p:txBody>
-          <a:bodyPr wrap="square" lIns="0" rIns="0" tIns="0" bIns="0" anchor="ctr">
-            <a:spAutoFit/>
-          </a:bodyPr>
-          <a:lstStyle/>
-          <a:p>
-            <a:pPr algn="l">
-              <a:lnSpc>
-                <a:spcPct val="108000"/>
-              </a:lnSpc>
-              <a:spcBef>
-                <a:spcPts val="0"/>
-              </a:spcBef>
-              <a:spcAft>
-                <a:spcPts val="0"/>
-              </a:spcAft>
-              <a:defRPr sz="1600" b="1">
-                <a:solidFill>
-                  <a:srgbClr val="087F86"/>
-                </a:solidFill>
-                <a:latin typeface="Arial"/>
-              </a:defRPr>
-            </a:pPr>
-            <a:r>
-              <a:t>CONTROL TEMPORAL · TRAIN</a:t>
-            </a:r>
-          </a:p>
-        </p:txBody>
-      </p:sp>
-      <p:sp>
-        <p:nvSpPr>
-          <p:cNvPr id="11" name="TextBox 10"/>
-          <p:cNvSpPr txBox="1"/>
-          <p:nvPr/>
-        </p:nvSpPr>
-        <p:spPr>
-          <a:xfrm>
-            <a:off x="850900" y="2501900"/>
-            <a:ext cx="4660900" cy="1955800"/>
-          </a:xfrm>
-          <a:prstGeom prst="rect">
-            <a:avLst/>
-          </a:prstGeom>
-          <a:noFill/>
-        </p:spPr>
-        <p:txBody>
-          <a:bodyPr wrap="square" lIns="0" rIns="0" tIns="0" bIns="0" anchor="ctr">
-            <a:spAutoFit/>
-          </a:bodyPr>
-          <a:lstStyle/>
-          <a:p>
-            <a:pPr algn="l">
-              <a:lnSpc>
-                <a:spcPct val="108000"/>
-              </a:lnSpc>
-              <a:spcBef>
-                <a:spcPts val="0"/>
-              </a:spcBef>
-              <a:spcAft>
-                <a:spcPts val="0"/>
-              </a:spcAft>
-              <a:defRPr sz="1700" b="0">
-                <a:solidFill>
-                  <a:srgbClr val="173047"/>
-                </a:solidFill>
-                <a:latin typeface="Arial"/>
-              </a:defRPr>
-            </a:pPr>
-            <a:r>
-              <a:t>Ridge original: BA 0,3843. Al desplazar circularmente la etiqueta GSR en el ajuste: media 0,3268 en 12 controles. Diferencia +5,76 pp; 0/12 alcanzan el original.</a:t>
-            </a:r>
-          </a:p>
-        </p:txBody>
-      </p:sp>
-      <p:sp>
-        <p:nvSpPr>
-          <p:cNvPr id="12" name="Rounded Rectangle 11"/>
+          <p:cNvPr id="10" name="Rectangle 9"/>
           <p:cNvSpPr/>
           <p:nvPr/>
         </p:nvSpPr>
         <p:spPr>
           <a:xfrm>
-            <a:off x="6438900" y="1892300"/>
-            <a:ext cx="5143500" cy="2705100"/>
-          </a:xfrm>
-          <a:prstGeom prst="roundRect">
+            <a:off x="609600" y="1892300"/>
+            <a:ext cx="5143500" cy="63500"/>
+          </a:xfrm>
+          <a:prstGeom prst="rect">
             <a:avLst/>
           </a:prstGeom>
           <a:solidFill>
-            <a:srgbClr val="F7F9FB"/>
+            <a:srgbClr val="087E83"/>
           </a:solidFill>
           <a:ln>
             <a:noFill/>
@@ -10001,20 +10534,202 @@
       </p:sp>
       <p:sp>
         <p:nvSpPr>
-          <p:cNvPr id="13" name="Rectangle 12"/>
+          <p:cNvPr id="11" name="TextBox 10"/>
+          <p:cNvSpPr txBox="1"/>
+          <p:nvPr/>
+        </p:nvSpPr>
+        <p:spPr>
+          <a:xfrm>
+            <a:off x="850900" y="2120900"/>
+            <a:ext cx="4597400" cy="330200"/>
+          </a:xfrm>
+          <a:prstGeom prst="rect">
+            <a:avLst/>
+          </a:prstGeom>
+          <a:noFill/>
+        </p:spPr>
+        <p:txBody>
+          <a:bodyPr wrap="square" lIns="0" rIns="0" tIns="0" bIns="0" anchor="ctr">
+            <a:spAutoFit/>
+          </a:bodyPr>
+          <a:lstStyle/>
+          <a:p>
+            <a:pPr algn="l">
+              <a:lnSpc>
+                <a:spcPct val="104000"/>
+              </a:lnSpc>
+              <a:spcBef>
+                <a:spcPts val="0"/>
+              </a:spcBef>
+              <a:spcAft>
+                <a:spcPts val="0"/>
+              </a:spcAft>
+              <a:defRPr sz="1500" b="1">
+                <a:solidFill>
+                  <a:srgbClr val="087E83"/>
+                </a:solidFill>
+                <a:latin typeface="Aptos"/>
+              </a:defRPr>
+            </a:pPr>
+            <a:r>
+              <a:t>CONTROL TEMPORAL · TRAIN</a:t>
+            </a:r>
+          </a:p>
+        </p:txBody>
+      </p:sp>
+      <p:sp>
+        <p:nvSpPr>
+          <p:cNvPr id="12" name="TextBox 11"/>
+          <p:cNvSpPr txBox="1"/>
+          <p:nvPr/>
+        </p:nvSpPr>
+        <p:spPr>
+          <a:xfrm>
+            <a:off x="850900" y="2603500"/>
+            <a:ext cx="4610100" cy="698500"/>
+          </a:xfrm>
+          <a:prstGeom prst="rect">
+            <a:avLst/>
+          </a:prstGeom>
+          <a:noFill/>
+        </p:spPr>
+        <p:txBody>
+          <a:bodyPr wrap="square" lIns="0" rIns="0" tIns="0" bIns="0" anchor="ctr">
+            <a:spAutoFit/>
+          </a:bodyPr>
+          <a:lstStyle/>
+          <a:p>
+            <a:pPr algn="l">
+              <a:lnSpc>
+                <a:spcPct val="104000"/>
+              </a:lnSpc>
+              <a:spcBef>
+                <a:spcPts val="0"/>
+              </a:spcBef>
+              <a:spcAft>
+                <a:spcPts val="0"/>
+              </a:spcAft>
+              <a:defRPr sz="3500" b="1">
+                <a:solidFill>
+                  <a:srgbClr val="102A3D"/>
+                </a:solidFill>
+                <a:latin typeface="Aptos"/>
+              </a:defRPr>
+            </a:pPr>
+            <a:r>
+              <a:t>+5,76 pp</a:t>
+            </a:r>
+          </a:p>
+        </p:txBody>
+      </p:sp>
+      <p:sp>
+        <p:nvSpPr>
+          <p:cNvPr id="13" name="TextBox 12"/>
+          <p:cNvSpPr txBox="1"/>
+          <p:nvPr/>
+        </p:nvSpPr>
+        <p:spPr>
+          <a:xfrm>
+            <a:off x="850900" y="3454400"/>
+            <a:ext cx="4572000" cy="596900"/>
+          </a:xfrm>
+          <a:prstGeom prst="rect">
+            <a:avLst/>
+          </a:prstGeom>
+          <a:noFill/>
+        </p:spPr>
+        <p:txBody>
+          <a:bodyPr wrap="square" lIns="0" rIns="0" tIns="0" bIns="0" anchor="ctr">
+            <a:spAutoFit/>
+          </a:bodyPr>
+          <a:lstStyle/>
+          <a:p>
+            <a:pPr algn="l">
+              <a:lnSpc>
+                <a:spcPct val="104000"/>
+              </a:lnSpc>
+              <a:spcBef>
+                <a:spcPts val="0"/>
+              </a:spcBef>
+              <a:spcAft>
+                <a:spcPts val="0"/>
+              </a:spcAft>
+              <a:defRPr sz="1600" b="0">
+                <a:solidFill>
+                  <a:srgbClr val="173348"/>
+                </a:solidFill>
+                <a:latin typeface="Aptos"/>
+              </a:defRPr>
+            </a:pPr>
+            <a:r>
+              <a:t>BA 0,3843 original vs. 0,3268 con etiqueta desplazada.</a:t>
+            </a:r>
+          </a:p>
+        </p:txBody>
+      </p:sp>
+      <p:sp>
+        <p:nvSpPr>
+          <p:cNvPr id="14" name="TextBox 13"/>
+          <p:cNvSpPr txBox="1"/>
+          <p:nvPr/>
+        </p:nvSpPr>
+        <p:spPr>
+          <a:xfrm>
+            <a:off x="850900" y="4140200"/>
+            <a:ext cx="4572000" cy="304800"/>
+          </a:xfrm>
+          <a:prstGeom prst="rect">
+            <a:avLst/>
+          </a:prstGeom>
+          <a:noFill/>
+        </p:spPr>
+        <p:txBody>
+          <a:bodyPr wrap="square" lIns="0" rIns="0" tIns="0" bIns="0" anchor="ctr">
+            <a:spAutoFit/>
+          </a:bodyPr>
+          <a:lstStyle/>
+          <a:p>
+            <a:pPr algn="l">
+              <a:lnSpc>
+                <a:spcPct val="104000"/>
+              </a:lnSpc>
+              <a:spcBef>
+                <a:spcPts val="0"/>
+              </a:spcBef>
+              <a:spcAft>
+                <a:spcPts val="0"/>
+              </a:spcAft>
+              <a:defRPr sz="1300" b="1">
+                <a:solidFill>
+                  <a:srgbClr val="5D7180"/>
+                </a:solidFill>
+                <a:latin typeface="Aptos"/>
+              </a:defRPr>
+            </a:pPr>
+            <a:r>
+              <a:t>Ninguno de 12 controles alcanzó el original.</a:t>
+            </a:r>
+          </a:p>
+        </p:txBody>
+      </p:sp>
+      <p:sp>
+        <p:nvSpPr>
+          <p:cNvPr id="15" name="Rounded Rectangle 14"/>
           <p:cNvSpPr/>
           <p:nvPr/>
         </p:nvSpPr>
         <p:spPr>
           <a:xfrm>
             <a:off x="6438900" y="1892300"/>
-            <a:ext cx="63500" cy="2705100"/>
-          </a:xfrm>
-          <a:prstGeom prst="rect">
-            <a:avLst/>
+            <a:ext cx="5143500" cy="2705100"/>
+          </a:xfrm>
+          <a:prstGeom prst="roundRect">
+            <a:avLst>
+              <a:gd name="adj" fmla="val 10000"/>
+            </a:avLst>
           </a:prstGeom>
           <a:solidFill>
-            <a:srgbClr val="215C80"/>
+            <a:srgbClr val="FFFFFF"/>
           </a:solidFill>
           <a:ln>
             <a:noFill/>
@@ -10044,110 +10759,20 @@
       </p:sp>
       <p:sp>
         <p:nvSpPr>
-          <p:cNvPr id="14" name="TextBox 13"/>
-          <p:cNvSpPr txBox="1"/>
-          <p:nvPr/>
-        </p:nvSpPr>
-        <p:spPr>
-          <a:xfrm>
-            <a:off x="6680200" y="2044700"/>
-            <a:ext cx="4686300" cy="381000"/>
-          </a:xfrm>
-          <a:prstGeom prst="rect">
-            <a:avLst/>
-          </a:prstGeom>
-          <a:noFill/>
-        </p:spPr>
-        <p:txBody>
-          <a:bodyPr wrap="square" lIns="0" rIns="0" tIns="0" bIns="0" anchor="ctr">
-            <a:spAutoFit/>
-          </a:bodyPr>
-          <a:lstStyle/>
-          <a:p>
-            <a:pPr algn="l">
-              <a:lnSpc>
-                <a:spcPct val="108000"/>
-              </a:lnSpc>
-              <a:spcBef>
-                <a:spcPts val="0"/>
-              </a:spcBef>
-              <a:spcAft>
-                <a:spcPts val="0"/>
-              </a:spcAft>
-              <a:defRPr sz="1600" b="1">
-                <a:solidFill>
-                  <a:srgbClr val="215C80"/>
-                </a:solidFill>
-                <a:latin typeface="Arial"/>
-              </a:defRPr>
-            </a:pPr>
-            <a:r>
-              <a:t>OTRAS REGLAS · TEST</a:t>
-            </a:r>
-          </a:p>
-        </p:txBody>
-      </p:sp>
-      <p:sp>
-        <p:nvSpPr>
-          <p:cNvPr id="15" name="TextBox 14"/>
-          <p:cNvSpPr txBox="1"/>
-          <p:nvPr/>
-        </p:nvSpPr>
-        <p:spPr>
-          <a:xfrm>
-            <a:off x="6680200" y="2501900"/>
-            <a:ext cx="4660900" cy="1955800"/>
-          </a:xfrm>
-          <a:prstGeom prst="rect">
-            <a:avLst/>
-          </a:prstGeom>
-          <a:noFill/>
-        </p:spPr>
-        <p:txBody>
-          <a:bodyPr wrap="square" lIns="0" rIns="0" tIns="0" bIns="0" anchor="ctr">
-            <a:spAutoFit/>
-          </a:bodyPr>
-          <a:lstStyle/>
-          <a:p>
-            <a:pPr algn="l">
-              <a:lnSpc>
-                <a:spcPct val="108000"/>
-              </a:lnSpc>
-              <a:spcBef>
-                <a:spcPts val="0"/>
-              </a:spcBef>
-              <a:spcAft>
-                <a:spcPts val="0"/>
-              </a:spcAft>
-              <a:defRPr sz="1700" b="0">
-                <a:solidFill>
-                  <a:srgbClr val="173047"/>
-                </a:solidFill>
-                <a:latin typeface="Arial"/>
-              </a:defRPr>
-            </a:pPr>
-            <a:r>
-              <a:t>Con predicciones fijas, GSR 2 s cambia 19,7 % de etiquetas; PCA GSR cambia 30,5 %. Las diferencias de BA tienen intervalos que incluyen cero.</a:t>
-            </a:r>
-          </a:p>
-        </p:txBody>
-      </p:sp>
-      <p:sp>
-        <p:nvSpPr>
-          <p:cNvPr id="16" name="Rounded Rectangle 15"/>
+          <p:cNvPr id="16" name="Rectangle 15"/>
           <p:cNvSpPr/>
           <p:nvPr/>
         </p:nvSpPr>
         <p:spPr>
           <a:xfrm>
-            <a:off x="609600" y="4940300"/>
-            <a:ext cx="10972800" cy="736600"/>
-          </a:xfrm>
-          <a:prstGeom prst="roundRect">
+            <a:off x="6438900" y="1892300"/>
+            <a:ext cx="5143500" cy="63500"/>
+          </a:xfrm>
+          <a:prstGeom prst="rect">
             <a:avLst/>
           </a:prstGeom>
           <a:solidFill>
-            <a:srgbClr val="EAF3F4"/>
+            <a:srgbClr val="376B91"/>
           </a:solidFill>
           <a:ln>
             <a:noFill/>
@@ -10183,8 +10808,8 @@
         </p:nvSpPr>
         <p:spPr>
           <a:xfrm>
-            <a:off x="825500" y="5003800"/>
-            <a:ext cx="10528300" cy="609600"/>
+            <a:off x="6680200" y="2120900"/>
+            <a:ext cx="4597400" cy="330200"/>
           </a:xfrm>
           <a:prstGeom prst="rect">
             <a:avLst/>
@@ -10199,7 +10824,275 @@
           <a:p>
             <a:pPr algn="l">
               <a:lnSpc>
-                <a:spcPct val="108000"/>
+                <a:spcPct val="104000"/>
+              </a:lnSpc>
+              <a:spcBef>
+                <a:spcPts val="0"/>
+              </a:spcBef>
+              <a:spcAft>
+                <a:spcPts val="0"/>
+              </a:spcAft>
+              <a:defRPr sz="1500" b="1">
+                <a:solidFill>
+                  <a:srgbClr val="376B91"/>
+                </a:solidFill>
+                <a:latin typeface="Aptos"/>
+              </a:defRPr>
+            </a:pPr>
+            <a:r>
+              <a:t>OTRAS REGLAS · TEST</a:t>
+            </a:r>
+          </a:p>
+        </p:txBody>
+      </p:sp>
+      <p:sp>
+        <p:nvSpPr>
+          <p:cNvPr id="18" name="TextBox 17"/>
+          <p:cNvSpPr txBox="1"/>
+          <p:nvPr/>
+        </p:nvSpPr>
+        <p:spPr>
+          <a:xfrm>
+            <a:off x="6680200" y="2603500"/>
+            <a:ext cx="4635500" cy="698500"/>
+          </a:xfrm>
+          <a:prstGeom prst="rect">
+            <a:avLst/>
+          </a:prstGeom>
+          <a:noFill/>
+        </p:spPr>
+        <p:txBody>
+          <a:bodyPr wrap="square" lIns="0" rIns="0" tIns="0" bIns="0" anchor="ctr">
+            <a:spAutoFit/>
+          </a:bodyPr>
+          <a:lstStyle/>
+          <a:p>
+            <a:pPr algn="l">
+              <a:lnSpc>
+                <a:spcPct val="104000"/>
+              </a:lnSpc>
+              <a:spcBef>
+                <a:spcPts val="0"/>
+              </a:spcBef>
+              <a:spcAft>
+                <a:spcPts val="0"/>
+              </a:spcAft>
+              <a:defRPr sz="3100" b="1">
+                <a:solidFill>
+                  <a:srgbClr val="102A3D"/>
+                </a:solidFill>
+                <a:latin typeface="Aptos"/>
+              </a:defRPr>
+            </a:pPr>
+            <a:r>
+              <a:t>19,7–30,5 %</a:t>
+            </a:r>
+          </a:p>
+        </p:txBody>
+      </p:sp>
+      <p:sp>
+        <p:nvSpPr>
+          <p:cNvPr id="19" name="TextBox 18"/>
+          <p:cNvSpPr txBox="1"/>
+          <p:nvPr/>
+        </p:nvSpPr>
+        <p:spPr>
+          <a:xfrm>
+            <a:off x="6680200" y="3454400"/>
+            <a:ext cx="4572000" cy="596900"/>
+          </a:xfrm>
+          <a:prstGeom prst="rect">
+            <a:avLst/>
+          </a:prstGeom>
+          <a:noFill/>
+        </p:spPr>
+        <p:txBody>
+          <a:bodyPr wrap="square" lIns="0" rIns="0" tIns="0" bIns="0" anchor="ctr">
+            <a:spAutoFit/>
+          </a:bodyPr>
+          <a:lstStyle/>
+          <a:p>
+            <a:pPr algn="l">
+              <a:lnSpc>
+                <a:spcPct val="104000"/>
+              </a:lnSpc>
+              <a:spcBef>
+                <a:spcPts val="0"/>
+              </a:spcBef>
+              <a:spcAft>
+                <a:spcPts val="0"/>
+              </a:spcAft>
+              <a:defRPr sz="1600" b="0">
+                <a:solidFill>
+                  <a:srgbClr val="173348"/>
+                </a:solidFill>
+                <a:latin typeface="Aptos"/>
+              </a:defRPr>
+            </a:pPr>
+            <a:r>
+              <a:t>de etiquetas cambian con GSR de 2 s o PCA GSR.</a:t>
+            </a:r>
+          </a:p>
+        </p:txBody>
+      </p:sp>
+      <p:sp>
+        <p:nvSpPr>
+          <p:cNvPr id="20" name="TextBox 19"/>
+          <p:cNvSpPr txBox="1"/>
+          <p:nvPr/>
+        </p:nvSpPr>
+        <p:spPr>
+          <a:xfrm>
+            <a:off x="6680200" y="4140200"/>
+            <a:ext cx="4572000" cy="304800"/>
+          </a:xfrm>
+          <a:prstGeom prst="rect">
+            <a:avLst/>
+          </a:prstGeom>
+          <a:noFill/>
+        </p:spPr>
+        <p:txBody>
+          <a:bodyPr wrap="square" lIns="0" rIns="0" tIns="0" bIns="0" anchor="ctr">
+            <a:spAutoFit/>
+          </a:bodyPr>
+          <a:lstStyle/>
+          <a:p>
+            <a:pPr algn="l">
+              <a:lnSpc>
+                <a:spcPct val="104000"/>
+              </a:lnSpc>
+              <a:spcBef>
+                <a:spcPts val="0"/>
+              </a:spcBef>
+              <a:spcAft>
+                <a:spcPts val="0"/>
+              </a:spcAft>
+              <a:defRPr sz="1300" b="1">
+                <a:solidFill>
+                  <a:srgbClr val="5D7180"/>
+                </a:solidFill>
+                <a:latin typeface="Aptos"/>
+              </a:defRPr>
+            </a:pPr>
+            <a:r>
+              <a:t>Las diferencias de BA son inciertas.</a:t>
+            </a:r>
+          </a:p>
+        </p:txBody>
+      </p:sp>
+      <p:sp>
+        <p:nvSpPr>
+          <p:cNvPr id="21" name="Rounded Rectangle 20"/>
+          <p:cNvSpPr/>
+          <p:nvPr/>
+        </p:nvSpPr>
+        <p:spPr>
+          <a:xfrm>
+            <a:off x="609600" y="4940300"/>
+            <a:ext cx="10972800" cy="736600"/>
+          </a:xfrm>
+          <a:prstGeom prst="roundRect">
+            <a:avLst>
+              <a:gd name="adj" fmla="val 10000"/>
+            </a:avLst>
+          </a:prstGeom>
+          <a:solidFill>
+            <a:srgbClr val="F9EBE5"/>
+          </a:solidFill>
+          <a:ln>
+            <a:noFill/>
+          </a:ln>
+        </p:spPr>
+        <p:style>
+          <a:lnRef idx="1">
+            <a:schemeClr val="accent1"/>
+          </a:lnRef>
+          <a:fillRef idx="3">
+            <a:schemeClr val="accent1"/>
+          </a:fillRef>
+          <a:effectRef idx="2">
+            <a:schemeClr val="accent1"/>
+          </a:effectRef>
+          <a:fontRef idx="minor">
+            <a:schemeClr val="lt1"/>
+          </a:fontRef>
+        </p:style>
+        <p:txBody>
+          <a:bodyPr rtlCol="0" anchor="ctr"/>
+          <a:lstStyle/>
+          <a:p>
+            <a:pPr algn="ctr"/>
+          </a:p>
+        </p:txBody>
+      </p:sp>
+      <p:sp>
+        <p:nvSpPr>
+          <p:cNvPr id="22" name="Rectangle 21"/>
+          <p:cNvSpPr/>
+          <p:nvPr/>
+        </p:nvSpPr>
+        <p:spPr>
+          <a:xfrm>
+            <a:off x="609600" y="4940300"/>
+            <a:ext cx="63500" cy="736600"/>
+          </a:xfrm>
+          <a:prstGeom prst="rect">
+            <a:avLst/>
+          </a:prstGeom>
+          <a:solidFill>
+            <a:srgbClr val="C66A44"/>
+          </a:solidFill>
+          <a:ln>
+            <a:noFill/>
+          </a:ln>
+        </p:spPr>
+        <p:style>
+          <a:lnRef idx="1">
+            <a:schemeClr val="accent1"/>
+          </a:lnRef>
+          <a:fillRef idx="3">
+            <a:schemeClr val="accent1"/>
+          </a:fillRef>
+          <a:effectRef idx="2">
+            <a:schemeClr val="accent1"/>
+          </a:effectRef>
+          <a:fontRef idx="minor">
+            <a:schemeClr val="lt1"/>
+          </a:fontRef>
+        </p:style>
+        <p:txBody>
+          <a:bodyPr rtlCol="0" anchor="ctr"/>
+          <a:lstStyle/>
+          <a:p>
+            <a:pPr algn="ctr"/>
+          </a:p>
+        </p:txBody>
+      </p:sp>
+      <p:sp>
+        <p:nvSpPr>
+          <p:cNvPr id="23" name="TextBox 22"/>
+          <p:cNvSpPr txBox="1"/>
+          <p:nvPr/>
+        </p:nvSpPr>
+        <p:spPr>
+          <a:xfrm>
+            <a:off x="863600" y="5003800"/>
+            <a:ext cx="10464800" cy="609600"/>
+          </a:xfrm>
+          <a:prstGeom prst="rect">
+            <a:avLst/>
+          </a:prstGeom>
+          <a:noFill/>
+        </p:spPr>
+        <p:txBody>
+          <a:bodyPr wrap="square" lIns="0" rIns="0" tIns="0" bIns="0" anchor="ctr">
+            <a:spAutoFit/>
+          </a:bodyPr>
+          <a:lstStyle/>
+          <a:p>
+            <a:pPr algn="l">
+              <a:lnSpc>
+                <a:spcPct val="104000"/>
               </a:lnSpc>
               <a:spcBef>
                 <a:spcPts val="0"/>
@@ -10209,9 +11102,9 @@
               </a:spcAft>
               <a:defRPr sz="1700" b="1">
                 <a:solidFill>
-                  <a:srgbClr val="A45A22"/>
+                  <a:srgbClr val="C66A44"/>
                 </a:solidFill>
-                <a:latin typeface="Arial"/>
+                <a:latin typeface="Aptos"/>
               </a:defRPr>
             </a:pPr>
             <a:r>
@@ -10234,7 +11127,7 @@
     <p:bg>
       <p:bgPr>
         <a:solidFill>
-          <a:srgbClr val="FFFFFF"/>
+          <a:srgbClr val="F7F8F5"/>
         </a:solidFill>
         <a:effectLst/>
       </p:bgPr>
@@ -10255,13 +11148,13 @@
         <p:spPr>
           <a:xfrm>
             <a:off x="0" y="0"/>
-            <a:ext cx="12192000" cy="88900"/>
+            <a:ext cx="12192000" cy="76200"/>
           </a:xfrm>
           <a:prstGeom prst="rect">
             <a:avLst/>
           </a:prstGeom>
           <a:solidFill>
-            <a:srgbClr val="102B42"/>
+            <a:srgbClr val="087E83"/>
           </a:solidFill>
           <a:ln>
             <a:noFill/>
@@ -10313,7 +11206,7 @@
           <a:p>
             <a:pPr algn="l">
               <a:lnSpc>
-                <a:spcPct val="108000"/>
+                <a:spcPct val="104000"/>
               </a:lnSpc>
               <a:spcBef>
                 <a:spcPts val="0"/>
@@ -10323,13 +11216,13 @@
               </a:spcAft>
               <a:defRPr sz="1100" b="1">
                 <a:solidFill>
-                  <a:srgbClr val="087F86"/>
+                  <a:srgbClr val="087E83"/>
                 </a:solidFill>
-                <a:latin typeface="Arial"/>
+                <a:latin typeface="Aptos"/>
               </a:defRPr>
             </a:pPr>
             <a:r>
-              <a:t>BALANCE Y SIGUIENTE EVIDENCIA NECESARIA</a:t>
+              <a:t>08  /  BALANCE Y SIGUIENTE EVIDENCIA NECESARIA</a:t>
             </a:r>
           </a:p>
         </p:txBody>
@@ -10343,7 +11236,7 @@
         <p:spPr>
           <a:xfrm>
             <a:off x="609600" y="723900"/>
-            <a:ext cx="10972800" cy="939800"/>
+            <a:ext cx="10972800" cy="990600"/>
           </a:xfrm>
           <a:prstGeom prst="rect">
             <a:avLst/>
@@ -10358,7 +11251,7 @@
           <a:p>
             <a:pPr algn="l">
               <a:lnSpc>
-                <a:spcPct val="108000"/>
+                <a:spcPct val="104000"/>
               </a:lnSpc>
               <a:spcBef>
                 <a:spcPts val="0"/>
@@ -10366,11 +11259,11 @@
               <a:spcAft>
                 <a:spcPts val="0"/>
               </a:spcAft>
-              <a:defRPr sz="3000" b="1">
+              <a:defRPr sz="3200" b="1">
                 <a:solidFill>
-                  <a:srgbClr val="102B42"/>
+                  <a:srgbClr val="102A3D"/>
                 </a:solidFill>
-                <a:latin typeface="Arial"/>
+                <a:latin typeface="Aptos"/>
               </a:defRPr>
             </a:pPr>
             <a:r>
@@ -10387,14 +11280,14 @@
         </p:nvSpPr>
         <p:spPr>
           <a:xfrm>
-            <a:off x="609600" y="6096000"/>
+            <a:off x="609600" y="6134100"/>
             <a:ext cx="10972800" cy="12700"/>
           </a:xfrm>
           <a:prstGeom prst="rect">
             <a:avLst/>
           </a:prstGeom>
           <a:solidFill>
-            <a:srgbClr val="D4DFE5"/>
+            <a:srgbClr val="D9E2E3"/>
           </a:solidFill>
           <a:ln>
             <a:noFill/>
@@ -10424,110 +11317,20 @@
       </p:sp>
       <p:sp>
         <p:nvSpPr>
-          <p:cNvPr id="6" name="TextBox 5"/>
-          <p:cNvSpPr txBox="1"/>
-          <p:nvPr/>
-        </p:nvSpPr>
-        <p:spPr>
-          <a:xfrm>
-            <a:off x="609600" y="6197600"/>
-            <a:ext cx="10223500" cy="469900"/>
-          </a:xfrm>
-          <a:prstGeom prst="rect">
-            <a:avLst/>
-          </a:prstGeom>
-          <a:noFill/>
-        </p:spPr>
-        <p:txBody>
-          <a:bodyPr wrap="square" lIns="0" rIns="0" tIns="0" bIns="0" anchor="ctr">
-            <a:spAutoFit/>
-          </a:bodyPr>
-          <a:lstStyle/>
-          <a:p>
-            <a:pPr algn="l">
-              <a:lnSpc>
-                <a:spcPct val="108000"/>
-              </a:lnSpc>
-              <a:spcBef>
-                <a:spcPts val="0"/>
-              </a:spcBef>
-              <a:spcAft>
-                <a:spcPts val="0"/>
-              </a:spcAft>
-              <a:defRPr sz="900" b="0">
-                <a:solidFill>
-                  <a:srgbClr val="536675"/>
-                </a:solidFill>
-                <a:latin typeface="Arial"/>
-              </a:defRPr>
-            </a:pPr>
-            <a:r>
-              <a:t>Fuentes: informes del 24-10-2026; Evaluacion_Independiente_y_Validez_24-10-2026.md</a:t>
-            </a:r>
-          </a:p>
-        </p:txBody>
-      </p:sp>
-      <p:sp>
-        <p:nvSpPr>
-          <p:cNvPr id="7" name="TextBox 6"/>
-          <p:cNvSpPr txBox="1"/>
-          <p:nvPr/>
-        </p:nvSpPr>
-        <p:spPr>
-          <a:xfrm>
-            <a:off x="10896600" y="6210300"/>
-            <a:ext cx="660400" cy="279400"/>
-          </a:xfrm>
-          <a:prstGeom prst="rect">
-            <a:avLst/>
-          </a:prstGeom>
-          <a:noFill/>
-        </p:spPr>
-        <p:txBody>
-          <a:bodyPr wrap="square" lIns="0" rIns="0" tIns="0" bIns="0" anchor="ctr">
-            <a:spAutoFit/>
-          </a:bodyPr>
-          <a:lstStyle/>
-          <a:p>
-            <a:pPr algn="r">
-              <a:lnSpc>
-                <a:spcPct val="108000"/>
-              </a:lnSpc>
-              <a:spcBef>
-                <a:spcPts val="0"/>
-              </a:spcBef>
-              <a:spcAft>
-                <a:spcPts val="0"/>
-              </a:spcAft>
-              <a:defRPr sz="1000" b="1">
-                <a:solidFill>
-                  <a:srgbClr val="536675"/>
-                </a:solidFill>
-                <a:latin typeface="Arial"/>
-              </a:defRPr>
-            </a:pPr>
-            <a:r>
-              <a:t>8 / 8</a:t>
-            </a:r>
-          </a:p>
-        </p:txBody>
-      </p:sp>
-      <p:sp>
-        <p:nvSpPr>
-          <p:cNvPr id="8" name="Rounded Rectangle 7"/>
+          <p:cNvPr id="6" name="Rectangle 5"/>
           <p:cNvSpPr/>
           <p:nvPr/>
         </p:nvSpPr>
         <p:spPr>
           <a:xfrm>
-            <a:off x="609600" y="1841500"/>
-            <a:ext cx="10972800" cy="1117600"/>
-          </a:xfrm>
-          <a:prstGeom prst="roundRect">
+            <a:off x="609600" y="6083300"/>
+            <a:ext cx="10972800" cy="38100"/>
+          </a:xfrm>
+          <a:prstGeom prst="rect">
             <a:avLst/>
           </a:prstGeom>
           <a:solidFill>
-            <a:srgbClr val="F7F9FB"/>
+            <a:srgbClr val="087E83"/>
           </a:solidFill>
           <a:ln>
             <a:noFill/>
@@ -10557,20 +11360,112 @@
       </p:sp>
       <p:sp>
         <p:nvSpPr>
-          <p:cNvPr id="9" name="Rectangle 8"/>
+          <p:cNvPr id="7" name="TextBox 6"/>
+          <p:cNvSpPr txBox="1"/>
+          <p:nvPr/>
+        </p:nvSpPr>
+        <p:spPr>
+          <a:xfrm>
+            <a:off x="609600" y="6235700"/>
+            <a:ext cx="10223500" cy="444500"/>
+          </a:xfrm>
+          <a:prstGeom prst="rect">
+            <a:avLst/>
+          </a:prstGeom>
+          <a:noFill/>
+        </p:spPr>
+        <p:txBody>
+          <a:bodyPr wrap="square" lIns="0" rIns="0" tIns="0" bIns="0" anchor="ctr">
+            <a:spAutoFit/>
+          </a:bodyPr>
+          <a:lstStyle/>
+          <a:p>
+            <a:pPr algn="l">
+              <a:lnSpc>
+                <a:spcPct val="104000"/>
+              </a:lnSpc>
+              <a:spcBef>
+                <a:spcPts val="0"/>
+              </a:spcBef>
+              <a:spcAft>
+                <a:spcPts val="0"/>
+              </a:spcAft>
+              <a:defRPr sz="900" b="0">
+                <a:solidFill>
+                  <a:srgbClr val="5D7180"/>
+                </a:solidFill>
+                <a:latin typeface="Aptos"/>
+              </a:defRPr>
+            </a:pPr>
+            <a:r>
+              <a:t>Fuentes: informes del 24-10-2026; Evaluacion_Independiente_y_Validez_24-10-2026.md</a:t>
+            </a:r>
+          </a:p>
+        </p:txBody>
+      </p:sp>
+      <p:sp>
+        <p:nvSpPr>
+          <p:cNvPr id="8" name="TextBox 7"/>
+          <p:cNvSpPr txBox="1"/>
+          <p:nvPr/>
+        </p:nvSpPr>
+        <p:spPr>
+          <a:xfrm>
+            <a:off x="10820400" y="6235700"/>
+            <a:ext cx="736600" cy="279400"/>
+          </a:xfrm>
+          <a:prstGeom prst="rect">
+            <a:avLst/>
+          </a:prstGeom>
+          <a:noFill/>
+        </p:spPr>
+        <p:txBody>
+          <a:bodyPr wrap="square" lIns="0" rIns="0" tIns="0" bIns="0" anchor="ctr">
+            <a:spAutoFit/>
+          </a:bodyPr>
+          <a:lstStyle/>
+          <a:p>
+            <a:pPr algn="r">
+              <a:lnSpc>
+                <a:spcPct val="104000"/>
+              </a:lnSpc>
+              <a:spcBef>
+                <a:spcPts val="0"/>
+              </a:spcBef>
+              <a:spcAft>
+                <a:spcPts val="0"/>
+              </a:spcAft>
+              <a:defRPr sz="1000" b="1">
+                <a:solidFill>
+                  <a:srgbClr val="5D7180"/>
+                </a:solidFill>
+                <a:latin typeface="Aptos"/>
+              </a:defRPr>
+            </a:pPr>
+            <a:r>
+              <a:t>08 / 08</a:t>
+            </a:r>
+          </a:p>
+        </p:txBody>
+      </p:sp>
+      <p:sp>
+        <p:nvSpPr>
+          <p:cNvPr id="9" name="Rounded Rectangle 8"/>
           <p:cNvSpPr/>
           <p:nvPr/>
         </p:nvSpPr>
         <p:spPr>
           <a:xfrm>
             <a:off x="609600" y="1841500"/>
-            <a:ext cx="63500" cy="1117600"/>
-          </a:xfrm>
-          <a:prstGeom prst="rect">
-            <a:avLst/>
+            <a:ext cx="10972800" cy="1117600"/>
+          </a:xfrm>
+          <a:prstGeom prst="roundRect">
+            <a:avLst>
+              <a:gd name="adj" fmla="val 10000"/>
+            </a:avLst>
           </a:prstGeom>
           <a:solidFill>
-            <a:srgbClr val="087F86"/>
+            <a:srgbClr val="FFFFFF"/>
           </a:solidFill>
           <a:ln>
             <a:noFill/>
@@ -10600,110 +11495,20 @@
       </p:sp>
       <p:sp>
         <p:nvSpPr>
-          <p:cNvPr id="10" name="TextBox 9"/>
-          <p:cNvSpPr txBox="1"/>
-          <p:nvPr/>
-        </p:nvSpPr>
-        <p:spPr>
-          <a:xfrm>
-            <a:off x="850900" y="1943100"/>
-            <a:ext cx="10515600" cy="355600"/>
-          </a:xfrm>
-          <a:prstGeom prst="rect">
-            <a:avLst/>
-          </a:prstGeom>
-          <a:noFill/>
-        </p:spPr>
-        <p:txBody>
-          <a:bodyPr wrap="square" lIns="0" rIns="0" tIns="0" bIns="0" anchor="ctr">
-            <a:spAutoFit/>
-          </a:bodyPr>
-          <a:lstStyle/>
-          <a:p>
-            <a:pPr algn="l">
-              <a:lnSpc>
-                <a:spcPct val="108000"/>
-              </a:lnSpc>
-              <a:spcBef>
-                <a:spcPts val="0"/>
-              </a:spcBef>
-              <a:spcAft>
-                <a:spcPts val="0"/>
-              </a:spcAft>
-              <a:defRPr sz="1600" b="1">
-                <a:solidFill>
-                  <a:srgbClr val="087F86"/>
-                </a:solidFill>
-                <a:latin typeface="Arial"/>
-              </a:defRPr>
-            </a:pPr>
-            <a:r>
-              <a:t>OBSERVADO</a:t>
-            </a:r>
-          </a:p>
-        </p:txBody>
-      </p:sp>
-      <p:sp>
-        <p:nvSpPr>
-          <p:cNvPr id="11" name="TextBox 10"/>
-          <p:cNvSpPr txBox="1"/>
-          <p:nvPr/>
-        </p:nvSpPr>
-        <p:spPr>
-          <a:xfrm>
-            <a:off x="850900" y="2336800"/>
-            <a:ext cx="10490200" cy="558800"/>
-          </a:xfrm>
-          <a:prstGeom prst="rect">
-            <a:avLst/>
-          </a:prstGeom>
-          <a:noFill/>
-        </p:spPr>
-        <p:txBody>
-          <a:bodyPr wrap="square" lIns="0" rIns="0" tIns="0" bIns="0" anchor="ctr">
-            <a:spAutoFit/>
-          </a:bodyPr>
-          <a:lstStyle/>
-          <a:p>
-            <a:pPr algn="l">
-              <a:lnSpc>
-                <a:spcPct val="108000"/>
-              </a:lnSpc>
-              <a:spcBef>
-                <a:spcPts val="0"/>
-              </a:spcBef>
-              <a:spcAft>
-                <a:spcPts val="0"/>
-              </a:spcAft>
-              <a:defRPr sz="1800" b="0">
-                <a:solidFill>
-                  <a:srgbClr val="173047"/>
-                </a:solidFill>
-                <a:latin typeface="Arial"/>
-              </a:defRPr>
-            </a:pPr>
-            <a:r>
-              <a:t>En train, la predicción Ridge depende de la alineación temporal con su pseudoetiqueta GSR.</a:t>
-            </a:r>
-          </a:p>
-        </p:txBody>
-      </p:sp>
-      <p:sp>
-        <p:nvSpPr>
-          <p:cNvPr id="12" name="Rounded Rectangle 11"/>
+          <p:cNvPr id="10" name="Rectangle 9"/>
           <p:cNvSpPr/>
           <p:nvPr/>
         </p:nvSpPr>
         <p:spPr>
           <a:xfrm>
-            <a:off x="609600" y="3098800"/>
-            <a:ext cx="10972800" cy="1117600"/>
-          </a:xfrm>
-          <a:prstGeom prst="roundRect">
+            <a:off x="609600" y="1841500"/>
+            <a:ext cx="10972800" cy="63500"/>
+          </a:xfrm>
+          <a:prstGeom prst="rect">
             <a:avLst/>
           </a:prstGeom>
           <a:solidFill>
-            <a:srgbClr val="F7F9FB"/>
+            <a:srgbClr val="087E83"/>
           </a:solidFill>
           <a:ln>
             <a:noFill/>
@@ -10733,20 +11538,112 @@
       </p:sp>
       <p:sp>
         <p:nvSpPr>
-          <p:cNvPr id="13" name="Rectangle 12"/>
+          <p:cNvPr id="11" name="TextBox 10"/>
+          <p:cNvSpPr txBox="1"/>
+          <p:nvPr/>
+        </p:nvSpPr>
+        <p:spPr>
+          <a:xfrm>
+            <a:off x="850900" y="1993900"/>
+            <a:ext cx="10515600" cy="355600"/>
+          </a:xfrm>
+          <a:prstGeom prst="rect">
+            <a:avLst/>
+          </a:prstGeom>
+          <a:noFill/>
+        </p:spPr>
+        <p:txBody>
+          <a:bodyPr wrap="square" lIns="0" rIns="0" tIns="0" bIns="0" anchor="ctr">
+            <a:spAutoFit/>
+          </a:bodyPr>
+          <a:lstStyle/>
+          <a:p>
+            <a:pPr algn="l">
+              <a:lnSpc>
+                <a:spcPct val="104000"/>
+              </a:lnSpc>
+              <a:spcBef>
+                <a:spcPts val="0"/>
+              </a:spcBef>
+              <a:spcAft>
+                <a:spcPts val="0"/>
+              </a:spcAft>
+              <a:defRPr sz="1600" b="1">
+                <a:solidFill>
+                  <a:srgbClr val="087E83"/>
+                </a:solidFill>
+                <a:latin typeface="Aptos"/>
+              </a:defRPr>
+            </a:pPr>
+            <a:r>
+              <a:t>OBSERVADO</a:t>
+            </a:r>
+          </a:p>
+        </p:txBody>
+      </p:sp>
+      <p:sp>
+        <p:nvSpPr>
+          <p:cNvPr id="12" name="TextBox 11"/>
+          <p:cNvSpPr txBox="1"/>
+          <p:nvPr/>
+        </p:nvSpPr>
+        <p:spPr>
+          <a:xfrm>
+            <a:off x="850900" y="2387600"/>
+            <a:ext cx="10490200" cy="508000"/>
+          </a:xfrm>
+          <a:prstGeom prst="rect">
+            <a:avLst/>
+          </a:prstGeom>
+          <a:noFill/>
+        </p:spPr>
+        <p:txBody>
+          <a:bodyPr wrap="square" lIns="0" rIns="0" tIns="0" bIns="0" anchor="ctr">
+            <a:spAutoFit/>
+          </a:bodyPr>
+          <a:lstStyle/>
+          <a:p>
+            <a:pPr algn="l">
+              <a:lnSpc>
+                <a:spcPct val="104000"/>
+              </a:lnSpc>
+              <a:spcBef>
+                <a:spcPts val="0"/>
+              </a:spcBef>
+              <a:spcAft>
+                <a:spcPts val="0"/>
+              </a:spcAft>
+              <a:defRPr sz="1800" b="0">
+                <a:solidFill>
+                  <a:srgbClr val="173348"/>
+                </a:solidFill>
+                <a:latin typeface="Aptos"/>
+              </a:defRPr>
+            </a:pPr>
+            <a:r>
+              <a:t>En train, la predicción Ridge depende de la alineación temporal con su pseudoetiqueta GSR.</a:t>
+            </a:r>
+          </a:p>
+        </p:txBody>
+      </p:sp>
+      <p:sp>
+        <p:nvSpPr>
+          <p:cNvPr id="13" name="Rounded Rectangle 12"/>
           <p:cNvSpPr/>
           <p:nvPr/>
         </p:nvSpPr>
         <p:spPr>
           <a:xfrm>
             <a:off x="609600" y="3098800"/>
-            <a:ext cx="63500" cy="1117600"/>
-          </a:xfrm>
-          <a:prstGeom prst="rect">
-            <a:avLst/>
+            <a:ext cx="10972800" cy="1117600"/>
+          </a:xfrm>
+          <a:prstGeom prst="roundRect">
+            <a:avLst>
+              <a:gd name="adj" fmla="val 10000"/>
+            </a:avLst>
           </a:prstGeom>
           <a:solidFill>
-            <a:srgbClr val="A45A22"/>
+            <a:srgbClr val="FFFFFF"/>
           </a:solidFill>
           <a:ln>
             <a:noFill/>
@@ -10776,110 +11673,20 @@
       </p:sp>
       <p:sp>
         <p:nvSpPr>
-          <p:cNvPr id="14" name="TextBox 13"/>
-          <p:cNvSpPr txBox="1"/>
-          <p:nvPr/>
-        </p:nvSpPr>
-        <p:spPr>
-          <a:xfrm>
-            <a:off x="850900" y="3200400"/>
-            <a:ext cx="10515600" cy="355600"/>
-          </a:xfrm>
-          <a:prstGeom prst="rect">
-            <a:avLst/>
-          </a:prstGeom>
-          <a:noFill/>
-        </p:spPr>
-        <p:txBody>
-          <a:bodyPr wrap="square" lIns="0" rIns="0" tIns="0" bIns="0" anchor="ctr">
-            <a:spAutoFit/>
-          </a:bodyPr>
-          <a:lstStyle/>
-          <a:p>
-            <a:pPr algn="l">
-              <a:lnSpc>
-                <a:spcPct val="108000"/>
-              </a:lnSpc>
-              <a:spcBef>
-                <a:spcPts val="0"/>
-              </a:spcBef>
-              <a:spcAft>
-                <a:spcPts val="0"/>
-              </a:spcAft>
-              <a:defRPr sz="1600" b="1">
-                <a:solidFill>
-                  <a:srgbClr val="A45A22"/>
-                </a:solidFill>
-                <a:latin typeface="Arial"/>
-              </a:defRPr>
-            </a:pPr>
-            <a:r>
-              <a:t>LÍMITE DE LA CONCLUSIÓN</a:t>
-            </a:r>
-          </a:p>
-        </p:txBody>
-      </p:sp>
-      <p:sp>
-        <p:nvSpPr>
-          <p:cNvPr id="15" name="TextBox 14"/>
-          <p:cNvSpPr txBox="1"/>
-          <p:nvPr/>
-        </p:nvSpPr>
-        <p:spPr>
-          <a:xfrm>
-            <a:off x="850900" y="3594100"/>
-            <a:ext cx="10490200" cy="558800"/>
-          </a:xfrm>
-          <a:prstGeom prst="rect">
-            <a:avLst/>
-          </a:prstGeom>
-          <a:noFill/>
-        </p:spPr>
-        <p:txBody>
-          <a:bodyPr wrap="square" lIns="0" rIns="0" tIns="0" bIns="0" anchor="ctr">
-            <a:spAutoFit/>
-          </a:bodyPr>
-          <a:lstStyle/>
-          <a:p>
-            <a:pPr algn="l">
-              <a:lnSpc>
-                <a:spcPct val="108000"/>
-              </a:lnSpc>
-              <a:spcBef>
-                <a:spcPts val="0"/>
-              </a:spcBef>
-              <a:spcAft>
-                <a:spcPts val="0"/>
-              </a:spcAft>
-              <a:defRPr sz="1700" b="0">
-                <a:solidFill>
-                  <a:srgbClr val="173047"/>
-                </a:solidFill>
-                <a:latin typeface="Arial"/>
-              </a:defRPr>
-            </a:pPr>
-            <a:r>
-              <a:t>No se confirma una ventaja general del historial o la fusión; test ya se había consultado y falta una medida externa del estado psicológico.</a:t>
-            </a:r>
-          </a:p>
-        </p:txBody>
-      </p:sp>
-      <p:sp>
-        <p:nvSpPr>
-          <p:cNvPr id="16" name="Rounded Rectangle 15"/>
+          <p:cNvPr id="14" name="Rectangle 13"/>
           <p:cNvSpPr/>
           <p:nvPr/>
         </p:nvSpPr>
         <p:spPr>
           <a:xfrm>
-            <a:off x="609600" y="4356100"/>
-            <a:ext cx="10972800" cy="1384300"/>
-          </a:xfrm>
-          <a:prstGeom prst="roundRect">
+            <a:off x="609600" y="3098800"/>
+            <a:ext cx="10972800" cy="63500"/>
+          </a:xfrm>
+          <a:prstGeom prst="rect">
             <a:avLst/>
           </a:prstGeom>
           <a:solidFill>
-            <a:srgbClr val="F7F9FB"/>
+            <a:srgbClr val="C66A44"/>
           </a:solidFill>
           <a:ln>
             <a:noFill/>
@@ -10909,20 +11716,112 @@
       </p:sp>
       <p:sp>
         <p:nvSpPr>
-          <p:cNvPr id="17" name="Rectangle 16"/>
+          <p:cNvPr id="15" name="TextBox 14"/>
+          <p:cNvSpPr txBox="1"/>
+          <p:nvPr/>
+        </p:nvSpPr>
+        <p:spPr>
+          <a:xfrm>
+            <a:off x="850900" y="3251200"/>
+            <a:ext cx="10515600" cy="355600"/>
+          </a:xfrm>
+          <a:prstGeom prst="rect">
+            <a:avLst/>
+          </a:prstGeom>
+          <a:noFill/>
+        </p:spPr>
+        <p:txBody>
+          <a:bodyPr wrap="square" lIns="0" rIns="0" tIns="0" bIns="0" anchor="ctr">
+            <a:spAutoFit/>
+          </a:bodyPr>
+          <a:lstStyle/>
+          <a:p>
+            <a:pPr algn="l">
+              <a:lnSpc>
+                <a:spcPct val="104000"/>
+              </a:lnSpc>
+              <a:spcBef>
+                <a:spcPts val="0"/>
+              </a:spcBef>
+              <a:spcAft>
+                <a:spcPts val="0"/>
+              </a:spcAft>
+              <a:defRPr sz="1600" b="1">
+                <a:solidFill>
+                  <a:srgbClr val="C66A44"/>
+                </a:solidFill>
+                <a:latin typeface="Aptos"/>
+              </a:defRPr>
+            </a:pPr>
+            <a:r>
+              <a:t>LÍMITE DE LA CONCLUSIÓN</a:t>
+            </a:r>
+          </a:p>
+        </p:txBody>
+      </p:sp>
+      <p:sp>
+        <p:nvSpPr>
+          <p:cNvPr id="16" name="TextBox 15"/>
+          <p:cNvSpPr txBox="1"/>
+          <p:nvPr/>
+        </p:nvSpPr>
+        <p:spPr>
+          <a:xfrm>
+            <a:off x="850900" y="3644900"/>
+            <a:ext cx="10490200" cy="508000"/>
+          </a:xfrm>
+          <a:prstGeom prst="rect">
+            <a:avLst/>
+          </a:prstGeom>
+          <a:noFill/>
+        </p:spPr>
+        <p:txBody>
+          <a:bodyPr wrap="square" lIns="0" rIns="0" tIns="0" bIns="0" anchor="ctr">
+            <a:spAutoFit/>
+          </a:bodyPr>
+          <a:lstStyle/>
+          <a:p>
+            <a:pPr algn="l">
+              <a:lnSpc>
+                <a:spcPct val="104000"/>
+              </a:lnSpc>
+              <a:spcBef>
+                <a:spcPts val="0"/>
+              </a:spcBef>
+              <a:spcAft>
+                <a:spcPts val="0"/>
+              </a:spcAft>
+              <a:defRPr sz="1700" b="0">
+                <a:solidFill>
+                  <a:srgbClr val="173348"/>
+                </a:solidFill>
+                <a:latin typeface="Aptos"/>
+              </a:defRPr>
+            </a:pPr>
+            <a:r>
+              <a:t>No se confirma una ventaja general del historial o la fusión; test ya se había consultado y falta una medida externa del estado psicológico.</a:t>
+            </a:r>
+          </a:p>
+        </p:txBody>
+      </p:sp>
+      <p:sp>
+        <p:nvSpPr>
+          <p:cNvPr id="17" name="Rounded Rectangle 16"/>
           <p:cNvSpPr/>
           <p:nvPr/>
         </p:nvSpPr>
         <p:spPr>
           <a:xfrm>
             <a:off x="609600" y="4356100"/>
-            <a:ext cx="63500" cy="1384300"/>
-          </a:xfrm>
-          <a:prstGeom prst="rect">
-            <a:avLst/>
+            <a:ext cx="10972800" cy="1384300"/>
+          </a:xfrm>
+          <a:prstGeom prst="roundRect">
+            <a:avLst>
+              <a:gd name="adj" fmla="val 10000"/>
+            </a:avLst>
           </a:prstGeom>
           <a:solidFill>
-            <a:srgbClr val="215C80"/>
+            <a:srgbClr val="FFFFFF"/>
           </a:solidFill>
           <a:ln>
             <a:noFill/>
@@ -10952,13 +11851,56 @@
       </p:sp>
       <p:sp>
         <p:nvSpPr>
-          <p:cNvPr id="18" name="TextBox 17"/>
+          <p:cNvPr id="18" name="Rectangle 17"/>
+          <p:cNvSpPr/>
+          <p:nvPr/>
+        </p:nvSpPr>
+        <p:spPr>
+          <a:xfrm>
+            <a:off x="609600" y="4356100"/>
+            <a:ext cx="10972800" cy="63500"/>
+          </a:xfrm>
+          <a:prstGeom prst="rect">
+            <a:avLst/>
+          </a:prstGeom>
+          <a:solidFill>
+            <a:srgbClr val="376B91"/>
+          </a:solidFill>
+          <a:ln>
+            <a:noFill/>
+          </a:ln>
+        </p:spPr>
+        <p:style>
+          <a:lnRef idx="1">
+            <a:schemeClr val="accent1"/>
+          </a:lnRef>
+          <a:fillRef idx="3">
+            <a:schemeClr val="accent1"/>
+          </a:fillRef>
+          <a:effectRef idx="2">
+            <a:schemeClr val="accent1"/>
+          </a:effectRef>
+          <a:fontRef idx="minor">
+            <a:schemeClr val="lt1"/>
+          </a:fontRef>
+        </p:style>
+        <p:txBody>
+          <a:bodyPr rtlCol="0" anchor="ctr"/>
+          <a:lstStyle/>
+          <a:p>
+            <a:pPr algn="ctr"/>
+          </a:p>
+        </p:txBody>
+      </p:sp>
+      <p:sp>
+        <p:nvSpPr>
+          <p:cNvPr id="19" name="TextBox 18"/>
           <p:cNvSpPr txBox="1"/>
           <p:nvPr/>
         </p:nvSpPr>
         <p:spPr>
           <a:xfrm>
-            <a:off x="850900" y="4457700"/>
+            <a:off x="850900" y="4508500"/>
             <a:ext cx="10515600" cy="355600"/>
           </a:xfrm>
           <a:prstGeom prst="rect">
@@ -10974,7 +11916,7 @@
           <a:p>
             <a:pPr algn="l">
               <a:lnSpc>
-                <a:spcPct val="108000"/>
+                <a:spcPct val="104000"/>
               </a:lnSpc>
               <a:spcBef>
                 <a:spcPts val="0"/>
@@ -10984,9 +11926,9 @@
               </a:spcAft>
               <a:defRPr sz="1600" b="1">
                 <a:solidFill>
-                  <a:srgbClr val="215C80"/>
+                  <a:srgbClr val="376B91"/>
                 </a:solidFill>
-                <a:latin typeface="Arial"/>
+                <a:latin typeface="Aptos"/>
               </a:defRPr>
             </a:pPr>
             <a:r>
@@ -10997,14 +11939,14 @@
       </p:sp>
       <p:sp>
         <p:nvSpPr>
-          <p:cNvPr id="19" name="TextBox 18"/>
+          <p:cNvPr id="20" name="TextBox 19"/>
           <p:cNvSpPr txBox="1"/>
           <p:nvPr/>
         </p:nvSpPr>
         <p:spPr>
           <a:xfrm>
-            <a:off x="850900" y="4851400"/>
-            <a:ext cx="10490200" cy="825500"/>
+            <a:off x="850900" y="4902200"/>
+            <a:ext cx="10490200" cy="774700"/>
           </a:xfrm>
           <a:prstGeom prst="rect">
             <a:avLst/>
@@ -11019,7 +11961,7 @@
           <a:p>
             <a:pPr algn="l">
               <a:lnSpc>
-                <a:spcPct val="108000"/>
+                <a:spcPct val="104000"/>
               </a:lnSpc>
               <a:spcBef>
                 <a:spcPts val="0"/>
@@ -11029,9 +11971,9 @@
               </a:spcAft>
               <a:defRPr sz="1700" b="0">
                 <a:solidFill>
-                  <a:srgbClr val="173047"/>
+                  <a:srgbClr val="173348"/>
                 </a:solidFill>
-                <a:latin typeface="Arial"/>
+                <a:latin typeface="Aptos"/>
               </a:defRPr>
             </a:pPr>
             <a:r>
